--- a/招投标RAG智能问答系统介绍.pptx
+++ b/招投标RAG智能问答系统介绍.pptx
@@ -17,6 +17,10 @@
     <p:sldId id="265" r:id="rId16"/>
     <p:sldId id="266" r:id="rId17"/>
     <p:sldId id="267" r:id="rId18"/>
+    <p:sldId id="268" r:id="rId19"/>
+    <p:sldId id="269" r:id="rId20"/>
+    <p:sldId id="270" r:id="rId21"/>
+    <p:sldId id="271" r:id="rId22"/>
   </p:sldIdLst>
   <p:sldSz cx="12191695" cy="6858000" type="screen4x3"/>
   <p:notesSz cx="6858000" cy="9144000"/>
@@ -3416,7 +3420,7 @@
                 </a:solidFill>
                 <a:latin typeface="微软雅黑"/>
               </a:rPr>
-              <a:t>八、质量保障 — 评测体系与验收数据</a:t>
+              <a:t>九、前端展示 — 一键生成标书 (单章流式 + 整本合稿)</a:t>
             </a:r>
           </a:p>
         </p:txBody>
@@ -3465,50 +3469,35 @@
           </a:p>
         </p:txBody>
       </p:sp>
-      <p:sp>
-        <p:nvSpPr>
-          <p:cNvPr id="5" name="Rounded Rectangle 4"/>
-          <p:cNvSpPr/>
-          <p:nvPr/>
-        </p:nvSpPr>
-        <p:spPr>
-          <a:xfrm>
-            <a:off x="411480" y="1097280"/>
-            <a:ext cx="1737360" cy="749808"/>
-          </a:xfrm>
-          <a:prstGeom prst="roundRect">
-            <a:avLst/>
-          </a:prstGeom>
-          <a:solidFill>
-            <a:srgbClr val="4F8A5B"/>
-          </a:solidFill>
-          <a:ln>
-            <a:noFill/>
+      <p:pic>
+        <p:nvPicPr>
+          <p:cNvPr id="5" name="Picture 4" descr="v14_bid_tabs.png"/>
+          <p:cNvPicPr>
+            <a:picLocks noChangeAspect="1"/>
+          </p:cNvPicPr>
+          <p:nvPr/>
+        </p:nvPicPr>
+        <p:blipFill>
+          <a:blip r:embed="rId2"/>
+          <a:stretch>
+            <a:fillRect/>
+          </a:stretch>
+        </p:blipFill>
+        <p:spPr>
+          <a:xfrm>
+            <a:off x="694021" y="1051560"/>
+            <a:ext cx="7390198" cy="5486400"/>
+          </a:xfrm>
+          <a:prstGeom prst="rect">
+            <a:avLst/>
+          </a:prstGeom>
+          <a:ln w="9525">
+            <a:solidFill>
+              <a:srgbClr val="BDBDBD"/>
+            </a:solidFill>
           </a:ln>
-          <a:effectLst/>
-        </p:spPr>
-        <p:style>
-          <a:lnRef idx="1">
-            <a:schemeClr val="accent1"/>
-          </a:lnRef>
-          <a:fillRef idx="3">
-            <a:schemeClr val="accent1"/>
-          </a:fillRef>
-          <a:effectRef idx="2">
-            <a:schemeClr val="accent1"/>
-          </a:effectRef>
-          <a:fontRef idx="minor">
-            <a:schemeClr val="lt1"/>
-          </a:fontRef>
-        </p:style>
-        <p:txBody>
-          <a:bodyPr rtlCol="0" anchor="ctr"/>
-          <a:lstStyle/>
-          <a:p>
-            <a:pPr algn="ctr"/>
-          </a:p>
-        </p:txBody>
-      </p:sp>
+        </p:spPr>
+      </p:pic>
       <p:sp>
         <p:nvSpPr>
           <p:cNvPr id="6" name="TextBox 5"/>
@@ -3517,8 +3506,8 @@
         </p:nvSpPr>
         <p:spPr>
           <a:xfrm>
-            <a:off x="457200" y="1170432"/>
-            <a:ext cx="1645920" cy="603504"/>
+            <a:off x="8549640" y="1170432"/>
+            <a:ext cx="3291840" cy="402336"/>
           </a:xfrm>
           <a:prstGeom prst="rect">
             <a:avLst/>
@@ -3531,77 +3520,33 @@
           </a:bodyPr>
           <a:lstStyle/>
           <a:p>
-            <a:pPr algn="ctr">
-              <a:spcAft>
-                <a:spcPts val="400"/>
-              </a:spcAft>
-            </a:pPr>
-            <a:r>
-              <a:rPr sz="1300" b="1">
-                <a:solidFill>
-                  <a:srgbClr val="FFFFFF"/>
-                </a:solidFill>
-                <a:latin typeface="微软雅黑"/>
-              </a:rPr>
-              <a:t>检索评测</a:t>
-            </a:r>
-          </a:p>
-        </p:txBody>
-      </p:sp>
-      <p:sp>
-        <p:nvSpPr>
-          <p:cNvPr id="7" name="Rounded Rectangle 6"/>
-          <p:cNvSpPr/>
-          <p:nvPr/>
-        </p:nvSpPr>
-        <p:spPr>
-          <a:xfrm>
-            <a:off x="2194560" y="1097280"/>
-            <a:ext cx="1783080" cy="749808"/>
-          </a:xfrm>
-          <a:prstGeom prst="roundRect">
-            <a:avLst/>
-          </a:prstGeom>
-          <a:solidFill>
-            <a:srgbClr val="DCE6F1"/>
-          </a:solidFill>
-          <a:ln>
-            <a:noFill/>
-          </a:ln>
-          <a:effectLst/>
-        </p:spPr>
-        <p:style>
-          <a:lnRef idx="1">
-            <a:schemeClr val="accent1"/>
-          </a:lnRef>
-          <a:fillRef idx="3">
-            <a:schemeClr val="accent1"/>
-          </a:fillRef>
-          <a:effectRef idx="2">
-            <a:schemeClr val="accent1"/>
-          </a:effectRef>
-          <a:fontRef idx="minor">
-            <a:schemeClr val="lt1"/>
-          </a:fontRef>
-        </p:style>
-        <p:txBody>
-          <a:bodyPr rtlCol="0" anchor="ctr"/>
-          <a:lstStyle/>
-          <a:p>
-            <a:pPr algn="ctr"/>
-          </a:p>
-        </p:txBody>
-      </p:sp>
-      <p:sp>
-        <p:nvSpPr>
-          <p:cNvPr id="8" name="TextBox 7"/>
+            <a:pPr algn="l">
+              <a:spcAft>
+                <a:spcPts val="400"/>
+              </a:spcAft>
+            </a:pPr>
+            <a:r>
+              <a:rPr sz="1200" b="1">
+                <a:solidFill>
+                  <a:srgbClr val="1F4E79"/>
+                </a:solidFill>
+                <a:latin typeface="微软雅黑"/>
+              </a:rPr>
+              <a:t>▸ 单章生成: 5 章节可选</a:t>
+            </a:r>
+          </a:p>
+        </p:txBody>
+      </p:sp>
+      <p:sp>
+        <p:nvSpPr>
+          <p:cNvPr id="7" name="TextBox 6"/>
           <p:cNvSpPr txBox="1"/>
           <p:nvPr/>
         </p:nvSpPr>
         <p:spPr>
           <a:xfrm>
-            <a:off x="2286000" y="1243584"/>
-            <a:ext cx="1645920" cy="502920"/>
+            <a:off x="8549640" y="1700784"/>
+            <a:ext cx="3291840" cy="402336"/>
           </a:xfrm>
           <a:prstGeom prst="rect">
             <a:avLst/>
@@ -3614,77 +3559,33 @@
           </a:bodyPr>
           <a:lstStyle/>
           <a:p>
-            <a:pPr algn="ctr">
-              <a:spcAft>
-                <a:spcPts val="400"/>
-              </a:spcAft>
-            </a:pPr>
-            <a:r>
-              <a:rPr sz="1150" b="1">
+            <a:pPr algn="l">
+              <a:spcAft>
+                <a:spcPts val="400"/>
+              </a:spcAft>
+            </a:pPr>
+            <a:r>
+              <a:rPr sz="1200" b="1">
                 <a:solidFill>
                   <a:srgbClr val="1F4E79"/>
                 </a:solidFill>
                 <a:latin typeface="微软雅黑"/>
               </a:rPr>
-              <a:t>70 题 × 6 指标</a:t>
-            </a:r>
-          </a:p>
-        </p:txBody>
-      </p:sp>
-      <p:sp>
-        <p:nvSpPr>
-          <p:cNvPr id="9" name="Rounded Rectangle 8"/>
-          <p:cNvSpPr/>
-          <p:nvPr/>
-        </p:nvSpPr>
-        <p:spPr>
-          <a:xfrm>
-            <a:off x="4023360" y="1097280"/>
-            <a:ext cx="7772400" cy="749808"/>
-          </a:xfrm>
-          <a:prstGeom prst="roundRect">
-            <a:avLst/>
-          </a:prstGeom>
-          <a:solidFill>
-            <a:srgbClr val="DCE6F1"/>
-          </a:solidFill>
-          <a:ln>
-            <a:noFill/>
-          </a:ln>
-          <a:effectLst/>
-        </p:spPr>
-        <p:style>
-          <a:lnRef idx="1">
-            <a:schemeClr val="accent1"/>
-          </a:lnRef>
-          <a:fillRef idx="3">
-            <a:schemeClr val="accent1"/>
-          </a:fillRef>
-          <a:effectRef idx="2">
-            <a:schemeClr val="accent1"/>
-          </a:effectRef>
-          <a:fontRef idx="minor">
-            <a:schemeClr val="lt1"/>
-          </a:fontRef>
-        </p:style>
-        <p:txBody>
-          <a:bodyPr rtlCol="0" anchor="ctr"/>
-          <a:lstStyle/>
-          <a:p>
-            <a:pPr algn="ctr"/>
-          </a:p>
-        </p:txBody>
-      </p:sp>
-      <p:sp>
-        <p:nvSpPr>
-          <p:cNvPr id="10" name="TextBox 9"/>
+              <a:t>▸ 流式 SSE 实时渲染 Markdown</a:t>
+            </a:r>
+          </a:p>
+        </p:txBody>
+      </p:sp>
+      <p:sp>
+        <p:nvSpPr>
+          <p:cNvPr id="8" name="TextBox 7"/>
           <p:cNvSpPr txBox="1"/>
           <p:nvPr/>
         </p:nvSpPr>
         <p:spPr>
           <a:xfrm>
-            <a:off x="4206240" y="1243584"/>
-            <a:ext cx="7452360" cy="502920"/>
+            <a:off x="8549640" y="2231136"/>
+            <a:ext cx="3291840" cy="402336"/>
           </a:xfrm>
           <a:prstGeom prst="rect">
             <a:avLst/>
@@ -3703,71 +3604,27 @@
               </a:spcAft>
             </a:pPr>
             <a:r>
-              <a:rPr sz="1250" b="0">
-                <a:solidFill>
-                  <a:srgbClr val="333333"/>
-                </a:solidFill>
-                <a:latin typeface="微软雅黑"/>
-              </a:rPr>
-              <a:t>HitRate@5 = 100% · MRR = 1.0 · nDCG = 0.9933 · EvidenceCoverage = 100%</a:t>
-            </a:r>
-          </a:p>
-        </p:txBody>
-      </p:sp>
-      <p:sp>
-        <p:nvSpPr>
-          <p:cNvPr id="11" name="Rounded Rectangle 10"/>
-          <p:cNvSpPr/>
-          <p:nvPr/>
-        </p:nvSpPr>
-        <p:spPr>
-          <a:xfrm>
-            <a:off x="411480" y="1956816"/>
-            <a:ext cx="1737360" cy="749808"/>
-          </a:xfrm>
-          <a:prstGeom prst="roundRect">
-            <a:avLst/>
-          </a:prstGeom>
-          <a:solidFill>
-            <a:srgbClr val="4F8A5B"/>
-          </a:solidFill>
-          <a:ln>
-            <a:noFill/>
-          </a:ln>
-          <a:effectLst/>
-        </p:spPr>
-        <p:style>
-          <a:lnRef idx="1">
-            <a:schemeClr val="accent1"/>
-          </a:lnRef>
-          <a:fillRef idx="3">
-            <a:schemeClr val="accent1"/>
-          </a:fillRef>
-          <a:effectRef idx="2">
-            <a:schemeClr val="accent1"/>
-          </a:effectRef>
-          <a:fontRef idx="minor">
-            <a:schemeClr val="lt1"/>
-          </a:fontRef>
-        </p:style>
-        <p:txBody>
-          <a:bodyPr rtlCol="0" anchor="ctr"/>
-          <a:lstStyle/>
-          <a:p>
-            <a:pPr algn="ctr"/>
-          </a:p>
-        </p:txBody>
-      </p:sp>
-      <p:sp>
-        <p:nvSpPr>
-          <p:cNvPr id="12" name="TextBox 11"/>
+              <a:rPr sz="1200" b="1">
+                <a:solidFill>
+                  <a:srgbClr val="1F4E79"/>
+                </a:solidFill>
+                <a:latin typeface="微软雅黑"/>
+              </a:rPr>
+              <a:t>▸ [占位符] 黄色高亮 (如 [公司全称])</a:t>
+            </a:r>
+          </a:p>
+        </p:txBody>
+      </p:sp>
+      <p:sp>
+        <p:nvSpPr>
+          <p:cNvPr id="9" name="TextBox 8"/>
           <p:cNvSpPr txBox="1"/>
           <p:nvPr/>
         </p:nvSpPr>
         <p:spPr>
           <a:xfrm>
-            <a:off x="457200" y="2029968"/>
-            <a:ext cx="1645920" cy="603504"/>
+            <a:off x="8549640" y="2761488"/>
+            <a:ext cx="3291840" cy="402336"/>
           </a:xfrm>
           <a:prstGeom prst="rect">
             <a:avLst/>
@@ -3780,77 +3637,33 @@
           </a:bodyPr>
           <a:lstStyle/>
           <a:p>
-            <a:pPr algn="ctr">
-              <a:spcAft>
-                <a:spcPts val="400"/>
-              </a:spcAft>
-            </a:pPr>
-            <a:r>
-              <a:rPr sz="1300" b="1">
-                <a:solidFill>
-                  <a:srgbClr val="FFFFFF"/>
-                </a:solidFill>
-                <a:latin typeface="微软雅黑"/>
-              </a:rPr>
-              <a:t>消融对比</a:t>
-            </a:r>
-          </a:p>
-        </p:txBody>
-      </p:sp>
-      <p:sp>
-        <p:nvSpPr>
-          <p:cNvPr id="13" name="Rounded Rectangle 12"/>
-          <p:cNvSpPr/>
-          <p:nvPr/>
-        </p:nvSpPr>
-        <p:spPr>
-          <a:xfrm>
-            <a:off x="2194560" y="1956816"/>
-            <a:ext cx="1783080" cy="749808"/>
-          </a:xfrm>
-          <a:prstGeom prst="roundRect">
-            <a:avLst/>
-          </a:prstGeom>
-          <a:solidFill>
-            <a:srgbClr val="DCE6F1"/>
-          </a:solidFill>
-          <a:ln>
-            <a:noFill/>
-          </a:ln>
-          <a:effectLst/>
-        </p:spPr>
-        <p:style>
-          <a:lnRef idx="1">
-            <a:schemeClr val="accent1"/>
-          </a:lnRef>
-          <a:fillRef idx="3">
-            <a:schemeClr val="accent1"/>
-          </a:fillRef>
-          <a:effectRef idx="2">
-            <a:schemeClr val="accent1"/>
-          </a:effectRef>
-          <a:fontRef idx="minor">
-            <a:schemeClr val="lt1"/>
-          </a:fontRef>
-        </p:style>
-        <p:txBody>
-          <a:bodyPr rtlCol="0" anchor="ctr"/>
-          <a:lstStyle/>
-          <a:p>
-            <a:pPr algn="ctr"/>
-          </a:p>
-        </p:txBody>
-      </p:sp>
-      <p:sp>
-        <p:nvSpPr>
-          <p:cNvPr id="14" name="TextBox 13"/>
+            <a:pPr algn="l">
+              <a:spcAft>
+                <a:spcPts val="400"/>
+              </a:spcAft>
+            </a:pPr>
+            <a:r>
+              <a:rPr sz="1200" b="1">
+                <a:solidFill>
+                  <a:srgbClr val="1F4E79"/>
+                </a:solidFill>
+                <a:latin typeface="微软雅黑"/>
+              </a:rPr>
+              <a:t>▸ 整本合稿: 5 章 + 招标要求对照表</a:t>
+            </a:r>
+          </a:p>
+        </p:txBody>
+      </p:sp>
+      <p:sp>
+        <p:nvSpPr>
+          <p:cNvPr id="10" name="TextBox 9"/>
           <p:cNvSpPr txBox="1"/>
           <p:nvPr/>
         </p:nvSpPr>
         <p:spPr>
           <a:xfrm>
-            <a:off x="2286000" y="2103120"/>
-            <a:ext cx="1645920" cy="502920"/>
+            <a:off x="8549640" y="3291840"/>
+            <a:ext cx="3291840" cy="402336"/>
           </a:xfrm>
           <a:prstGeom prst="rect">
             <a:avLst/>
@@ -3863,77 +3676,33 @@
           </a:bodyPr>
           <a:lstStyle/>
           <a:p>
-            <a:pPr algn="ctr">
-              <a:spcAft>
-                <a:spcPts val="400"/>
-              </a:spcAft>
-            </a:pPr>
-            <a:r>
-              <a:rPr sz="1150" b="1">
+            <a:pPr algn="l">
+              <a:spcAft>
+                <a:spcPts val="400"/>
+              </a:spcAft>
+            </a:pPr>
+            <a:r>
+              <a:rPr sz="1200" b="1">
                 <a:solidFill>
                   <a:srgbClr val="1F4E79"/>
                 </a:solidFill>
                 <a:latin typeface="微软雅黑"/>
               </a:rPr>
-              <a:t>17 题 × 4 档</a:t>
-            </a:r>
-          </a:p>
-        </p:txBody>
-      </p:sp>
-      <p:sp>
-        <p:nvSpPr>
-          <p:cNvPr id="15" name="Rounded Rectangle 14"/>
-          <p:cNvSpPr/>
-          <p:nvPr/>
-        </p:nvSpPr>
-        <p:spPr>
-          <a:xfrm>
-            <a:off x="4023360" y="1956816"/>
-            <a:ext cx="7772400" cy="749808"/>
-          </a:xfrm>
-          <a:prstGeom prst="roundRect">
-            <a:avLst/>
-          </a:prstGeom>
-          <a:solidFill>
-            <a:srgbClr val="DCE6F1"/>
-          </a:solidFill>
-          <a:ln>
-            <a:noFill/>
-          </a:ln>
-          <a:effectLst/>
-        </p:spPr>
-        <p:style>
-          <a:lnRef idx="1">
-            <a:schemeClr val="accent1"/>
-          </a:lnRef>
-          <a:fillRef idx="3">
-            <a:schemeClr val="accent1"/>
-          </a:fillRef>
-          <a:effectRef idx="2">
-            <a:schemeClr val="accent1"/>
-          </a:effectRef>
-          <a:fontRef idx="minor">
-            <a:schemeClr val="lt1"/>
-          </a:fontRef>
-        </p:style>
-        <p:txBody>
-          <a:bodyPr rtlCol="0" anchor="ctr"/>
-          <a:lstStyle/>
-          <a:p>
-            <a:pPr algn="ctr"/>
-          </a:p>
-        </p:txBody>
-      </p:sp>
-      <p:sp>
-        <p:nvSpPr>
-          <p:cNvPr id="16" name="TextBox 15"/>
+              <a:t>▸ 体检表: 不合格项标红</a:t>
+            </a:r>
+          </a:p>
+        </p:txBody>
+      </p:sp>
+      <p:sp>
+        <p:nvSpPr>
+          <p:cNvPr id="11" name="TextBox 10"/>
           <p:cNvSpPr txBox="1"/>
           <p:nvPr/>
         </p:nvSpPr>
         <p:spPr>
           <a:xfrm>
-            <a:off x="4206240" y="2103120"/>
-            <a:ext cx="7452360" cy="502920"/>
+            <a:off x="8549640" y="3822192"/>
+            <a:ext cx="3291840" cy="402336"/>
           </a:xfrm>
           <a:prstGeom prst="rect">
             <a:avLst/>
@@ -3952,71 +3721,27 @@
               </a:spcAft>
             </a:pPr>
             <a:r>
-              <a:rPr sz="1250" b="0">
-                <a:solidFill>
-                  <a:srgbClr val="333333"/>
-                </a:solidFill>
-                <a:latin typeface="微软雅黑"/>
-              </a:rPr>
-              <a:t>A0 纯 Dense 0.9756 → A3 完整 0.9953; 精排单贡献 +34.3pp</a:t>
-            </a:r>
-          </a:p>
-        </p:txBody>
-      </p:sp>
-      <p:sp>
-        <p:nvSpPr>
-          <p:cNvPr id="17" name="Rounded Rectangle 16"/>
-          <p:cNvSpPr/>
-          <p:nvPr/>
-        </p:nvSpPr>
-        <p:spPr>
-          <a:xfrm>
-            <a:off x="411480" y="2816352"/>
-            <a:ext cx="1737360" cy="749808"/>
-          </a:xfrm>
-          <a:prstGeom prst="roundRect">
-            <a:avLst/>
-          </a:prstGeom>
-          <a:solidFill>
-            <a:srgbClr val="31859C"/>
-          </a:solidFill>
-          <a:ln>
-            <a:noFill/>
-          </a:ln>
-          <a:effectLst/>
-        </p:spPr>
-        <p:style>
-          <a:lnRef idx="1">
-            <a:schemeClr val="accent1"/>
-          </a:lnRef>
-          <a:fillRef idx="3">
-            <a:schemeClr val="accent1"/>
-          </a:fillRef>
-          <a:effectRef idx="2">
-            <a:schemeClr val="accent1"/>
-          </a:effectRef>
-          <a:fontRef idx="minor">
-            <a:schemeClr val="lt1"/>
-          </a:fontRef>
-        </p:style>
-        <p:txBody>
-          <a:bodyPr rtlCol="0" anchor="ctr"/>
-          <a:lstStyle/>
-          <a:p>
-            <a:pPr algn="ctr"/>
-          </a:p>
-        </p:txBody>
-      </p:sp>
-      <p:sp>
-        <p:nvSpPr>
-          <p:cNvPr id="18" name="TextBox 17"/>
+              <a:rPr sz="1200" b="1">
+                <a:solidFill>
+                  <a:srgbClr val="1F4E79"/>
+                </a:solidFill>
+                <a:latin typeface="微软雅黑"/>
+              </a:rPr>
+              <a:t>▸ 复制 Markdown / 导出 DOCX</a:t>
+            </a:r>
+          </a:p>
+        </p:txBody>
+      </p:sp>
+      <p:sp>
+        <p:nvSpPr>
+          <p:cNvPr id="12" name="TextBox 11"/>
           <p:cNvSpPr txBox="1"/>
           <p:nvPr/>
         </p:nvSpPr>
         <p:spPr>
           <a:xfrm>
-            <a:off x="457200" y="2889504"/>
-            <a:ext cx="1645920" cy="603504"/>
+            <a:off x="8549640" y="4443984"/>
+            <a:ext cx="3291840" cy="1280160"/>
           </a:xfrm>
           <a:prstGeom prst="rect">
             <a:avLst/>
@@ -4029,971 +3754,51 @@
           </a:bodyPr>
           <a:lstStyle/>
           <a:p>
-            <a:pPr algn="ctr">
-              <a:spcAft>
-                <a:spcPts val="400"/>
-              </a:spcAft>
-            </a:pPr>
-            <a:r>
-              <a:rPr sz="1300" b="1">
-                <a:solidFill>
-                  <a:srgbClr val="FFFFFF"/>
-                </a:solidFill>
-                <a:latin typeface="微软雅黑"/>
-              </a:rPr>
-              <a:t>Agent 端到端</a:t>
-            </a:r>
-          </a:p>
-        </p:txBody>
-      </p:sp>
-      <p:sp>
-        <p:nvSpPr>
-          <p:cNvPr id="19" name="Rounded Rectangle 18"/>
-          <p:cNvSpPr/>
-          <p:nvPr/>
-        </p:nvSpPr>
-        <p:spPr>
-          <a:xfrm>
-            <a:off x="2194560" y="2816352"/>
-            <a:ext cx="1783080" cy="749808"/>
-          </a:xfrm>
-          <a:prstGeom prst="roundRect">
-            <a:avLst/>
-          </a:prstGeom>
-          <a:solidFill>
-            <a:srgbClr val="DCE6F1"/>
-          </a:solidFill>
-          <a:ln>
-            <a:noFill/>
-          </a:ln>
-          <a:effectLst/>
-        </p:spPr>
-        <p:style>
-          <a:lnRef idx="1">
-            <a:schemeClr val="accent1"/>
-          </a:lnRef>
-          <a:fillRef idx="3">
-            <a:schemeClr val="accent1"/>
-          </a:fillRef>
-          <a:effectRef idx="2">
-            <a:schemeClr val="accent1"/>
-          </a:effectRef>
-          <a:fontRef idx="minor">
-            <a:schemeClr val="lt1"/>
-          </a:fontRef>
-        </p:style>
-        <p:txBody>
-          <a:bodyPr rtlCol="0" anchor="ctr"/>
-          <a:lstStyle/>
-          <a:p>
-            <a:pPr algn="ctr"/>
-          </a:p>
-        </p:txBody>
-      </p:sp>
-      <p:sp>
-        <p:nvSpPr>
-          <p:cNvPr id="20" name="TextBox 19"/>
-          <p:cNvSpPr txBox="1"/>
-          <p:nvPr/>
-        </p:nvSpPr>
-        <p:spPr>
-          <a:xfrm>
-            <a:off x="2286000" y="2962656"/>
-            <a:ext cx="1645920" cy="502920"/>
-          </a:xfrm>
-          <a:prstGeom prst="rect">
-            <a:avLst/>
-          </a:prstGeom>
-          <a:noFill/>
-        </p:spPr>
-        <p:txBody>
-          <a:bodyPr wrap="square">
-            <a:spAutoFit/>
-          </a:bodyPr>
-          <a:lstStyle/>
-          <a:p>
-            <a:pPr algn="ctr">
-              <a:spcAft>
-                <a:spcPts val="400"/>
-              </a:spcAft>
-            </a:pPr>
-            <a:r>
-              <a:rPr sz="1150" b="1">
-                <a:solidFill>
-                  <a:srgbClr val="1F4E79"/>
-                </a:solidFill>
-                <a:latin typeface="微软雅黑"/>
-              </a:rPr>
-              <a:t>55 题真实 HTTP</a:t>
-            </a:r>
-          </a:p>
-        </p:txBody>
-      </p:sp>
-      <p:sp>
-        <p:nvSpPr>
-          <p:cNvPr id="21" name="Rounded Rectangle 20"/>
-          <p:cNvSpPr/>
-          <p:nvPr/>
-        </p:nvSpPr>
-        <p:spPr>
-          <a:xfrm>
-            <a:off x="4023360" y="2816352"/>
-            <a:ext cx="7772400" cy="749808"/>
-          </a:xfrm>
-          <a:prstGeom prst="roundRect">
-            <a:avLst/>
-          </a:prstGeom>
-          <a:solidFill>
-            <a:srgbClr val="DCE6F1"/>
-          </a:solidFill>
-          <a:ln>
-            <a:noFill/>
-          </a:ln>
-          <a:effectLst/>
-        </p:spPr>
-        <p:style>
-          <a:lnRef idx="1">
-            <a:schemeClr val="accent1"/>
-          </a:lnRef>
-          <a:fillRef idx="3">
-            <a:schemeClr val="accent1"/>
-          </a:fillRef>
-          <a:effectRef idx="2">
-            <a:schemeClr val="accent1"/>
-          </a:effectRef>
-          <a:fontRef idx="minor">
-            <a:schemeClr val="lt1"/>
-          </a:fontRef>
-        </p:style>
-        <p:txBody>
-          <a:bodyPr rtlCol="0" anchor="ctr"/>
-          <a:lstStyle/>
-          <a:p>
-            <a:pPr algn="ctr"/>
-          </a:p>
-        </p:txBody>
-      </p:sp>
-      <p:sp>
-        <p:nvSpPr>
-          <p:cNvPr id="22" name="TextBox 21"/>
-          <p:cNvSpPr txBox="1"/>
-          <p:nvPr/>
-        </p:nvSpPr>
-        <p:spPr>
-          <a:xfrm>
-            <a:off x="4206240" y="2962656"/>
-            <a:ext cx="7452360" cy="502920"/>
-          </a:xfrm>
-          <a:prstGeom prst="rect">
-            <a:avLst/>
-          </a:prstGeom>
-          <a:noFill/>
-        </p:spPr>
-        <p:txBody>
-          <a:bodyPr wrap="square">
-            <a:spAutoFit/>
-          </a:bodyPr>
-          <a:lstStyle/>
-          <a:p>
-            <a:pPr algn="l">
-              <a:spcAft>
-                <a:spcPts val="400"/>
-              </a:spcAft>
-            </a:pPr>
-            <a:r>
-              <a:rPr sz="1250" b="0">
-                <a:solidFill>
-                  <a:srgbClr val="333333"/>
-                </a:solidFill>
-                <a:latin typeface="微软雅黑"/>
-              </a:rPr>
-              <a:t>通过率 85.5% · 工具选择 87.3% · 事实覆盖 92.6%</a:t>
-            </a:r>
-          </a:p>
-        </p:txBody>
-      </p:sp>
-      <p:sp>
-        <p:nvSpPr>
-          <p:cNvPr id="23" name="Rounded Rectangle 22"/>
-          <p:cNvSpPr/>
-          <p:nvPr/>
-        </p:nvSpPr>
-        <p:spPr>
-          <a:xfrm>
-            <a:off x="411480" y="3675888"/>
-            <a:ext cx="1737360" cy="749808"/>
-          </a:xfrm>
-          <a:prstGeom prst="roundRect">
-            <a:avLst/>
-          </a:prstGeom>
-          <a:solidFill>
-            <a:srgbClr val="1F4E79"/>
-          </a:solidFill>
-          <a:ln>
-            <a:noFill/>
-          </a:ln>
-          <a:effectLst/>
-        </p:spPr>
-        <p:style>
-          <a:lnRef idx="1">
-            <a:schemeClr val="accent1"/>
-          </a:lnRef>
-          <a:fillRef idx="3">
-            <a:schemeClr val="accent1"/>
-          </a:fillRef>
-          <a:effectRef idx="2">
-            <a:schemeClr val="accent1"/>
-          </a:effectRef>
-          <a:fontRef idx="minor">
-            <a:schemeClr val="lt1"/>
-          </a:fontRef>
-        </p:style>
-        <p:txBody>
-          <a:bodyPr rtlCol="0" anchor="ctr"/>
-          <a:lstStyle/>
-          <a:p>
-            <a:pPr algn="ctr"/>
-          </a:p>
-        </p:txBody>
-      </p:sp>
-      <p:sp>
-        <p:nvSpPr>
-          <p:cNvPr id="24" name="TextBox 23"/>
-          <p:cNvSpPr txBox="1"/>
-          <p:nvPr/>
-        </p:nvSpPr>
-        <p:spPr>
-          <a:xfrm>
-            <a:off x="457200" y="3749040"/>
-            <a:ext cx="1645920" cy="603504"/>
-          </a:xfrm>
-          <a:prstGeom prst="rect">
-            <a:avLst/>
-          </a:prstGeom>
-          <a:noFill/>
-        </p:spPr>
-        <p:txBody>
-          <a:bodyPr wrap="square">
-            <a:spAutoFit/>
-          </a:bodyPr>
-          <a:lstStyle/>
-          <a:p>
-            <a:pPr algn="ctr">
-              <a:spcAft>
-                <a:spcPts val="400"/>
-              </a:spcAft>
-            </a:pPr>
-            <a:r>
-              <a:rPr sz="1300" b="1">
-                <a:solidFill>
-                  <a:srgbClr val="FFFFFF"/>
-                </a:solidFill>
-                <a:latin typeface="微软雅黑"/>
-              </a:rPr>
-              <a:t>HTTP 验收</a:t>
-            </a:r>
-          </a:p>
-        </p:txBody>
-      </p:sp>
-      <p:sp>
-        <p:nvSpPr>
-          <p:cNvPr id="25" name="Rounded Rectangle 24"/>
-          <p:cNvSpPr/>
-          <p:nvPr/>
-        </p:nvSpPr>
-        <p:spPr>
-          <a:xfrm>
-            <a:off x="2194560" y="3675888"/>
-            <a:ext cx="1783080" cy="749808"/>
-          </a:xfrm>
-          <a:prstGeom prst="roundRect">
-            <a:avLst/>
-          </a:prstGeom>
-          <a:solidFill>
-            <a:srgbClr val="DCE6F1"/>
-          </a:solidFill>
-          <a:ln>
-            <a:noFill/>
-          </a:ln>
-          <a:effectLst/>
-        </p:spPr>
-        <p:style>
-          <a:lnRef idx="1">
-            <a:schemeClr val="accent1"/>
-          </a:lnRef>
-          <a:fillRef idx="3">
-            <a:schemeClr val="accent1"/>
-          </a:fillRef>
-          <a:effectRef idx="2">
-            <a:schemeClr val="accent1"/>
-          </a:effectRef>
-          <a:fontRef idx="minor">
-            <a:schemeClr val="lt1"/>
-          </a:fontRef>
-        </p:style>
-        <p:txBody>
-          <a:bodyPr rtlCol="0" anchor="ctr"/>
-          <a:lstStyle/>
-          <a:p>
-            <a:pPr algn="ctr"/>
-          </a:p>
-        </p:txBody>
-      </p:sp>
-      <p:sp>
-        <p:nvSpPr>
-          <p:cNvPr id="26" name="TextBox 25"/>
-          <p:cNvSpPr txBox="1"/>
-          <p:nvPr/>
-        </p:nvSpPr>
-        <p:spPr>
-          <a:xfrm>
-            <a:off x="2286000" y="3822192"/>
-            <a:ext cx="1645920" cy="502920"/>
-          </a:xfrm>
-          <a:prstGeom prst="rect">
-            <a:avLst/>
-          </a:prstGeom>
-          <a:noFill/>
-        </p:spPr>
-        <p:txBody>
-          <a:bodyPr wrap="square">
-            <a:spAutoFit/>
-          </a:bodyPr>
-          <a:lstStyle/>
-          <a:p>
-            <a:pPr algn="ctr">
-              <a:spcAft>
-                <a:spcPts val="400"/>
-              </a:spcAft>
-            </a:pPr>
-            <a:r>
-              <a:rPr sz="1150" b="1">
-                <a:solidFill>
-                  <a:srgbClr val="1F4E79"/>
-                </a:solidFill>
-                <a:latin typeface="微软雅黑"/>
-              </a:rPr>
-              <a:t>60 例全场景</a:t>
-            </a:r>
-          </a:p>
-        </p:txBody>
-      </p:sp>
-      <p:sp>
-        <p:nvSpPr>
-          <p:cNvPr id="27" name="Rounded Rectangle 26"/>
-          <p:cNvSpPr/>
-          <p:nvPr/>
-        </p:nvSpPr>
-        <p:spPr>
-          <a:xfrm>
-            <a:off x="4023360" y="3675888"/>
-            <a:ext cx="7772400" cy="749808"/>
-          </a:xfrm>
-          <a:prstGeom prst="roundRect">
-            <a:avLst/>
-          </a:prstGeom>
-          <a:solidFill>
-            <a:srgbClr val="DCE6F1"/>
-          </a:solidFill>
-          <a:ln>
-            <a:noFill/>
-          </a:ln>
-          <a:effectLst/>
-        </p:spPr>
-        <p:style>
-          <a:lnRef idx="1">
-            <a:schemeClr val="accent1"/>
-          </a:lnRef>
-          <a:fillRef idx="3">
-            <a:schemeClr val="accent1"/>
-          </a:fillRef>
-          <a:effectRef idx="2">
-            <a:schemeClr val="accent1"/>
-          </a:effectRef>
-          <a:fontRef idx="minor">
-            <a:schemeClr val="lt1"/>
-          </a:fontRef>
-        </p:style>
-        <p:txBody>
-          <a:bodyPr rtlCol="0" anchor="ctr"/>
-          <a:lstStyle/>
-          <a:p>
-            <a:pPr algn="ctr"/>
-          </a:p>
-        </p:txBody>
-      </p:sp>
-      <p:sp>
-        <p:nvSpPr>
-          <p:cNvPr id="28" name="TextBox 27"/>
-          <p:cNvSpPr txBox="1"/>
-          <p:nvPr/>
-        </p:nvSpPr>
-        <p:spPr>
-          <a:xfrm>
-            <a:off x="4206240" y="3822192"/>
-            <a:ext cx="7452360" cy="502920"/>
-          </a:xfrm>
-          <a:prstGeom prst="rect">
-            <a:avLst/>
-          </a:prstGeom>
-          <a:noFill/>
-        </p:spPr>
-        <p:txBody>
-          <a:bodyPr wrap="square">
-            <a:spAutoFit/>
-          </a:bodyPr>
-          <a:lstStyle/>
-          <a:p>
-            <a:pPr algn="l">
-              <a:spcAft>
-                <a:spcPts val="400"/>
-              </a:spcAft>
-            </a:pPr>
-            <a:r>
-              <a:rPr sz="1250" b="0">
-                <a:solidFill>
-                  <a:srgbClr val="333333"/>
-                </a:solidFill>
-                <a:latin typeface="微软雅黑"/>
-              </a:rPr>
-              <a:t>60/60 通过 · 链路可用性 100% · GATE-01 持续拒答</a:t>
-            </a:r>
-          </a:p>
-        </p:txBody>
-      </p:sp>
-      <p:sp>
-        <p:nvSpPr>
-          <p:cNvPr id="29" name="Rounded Rectangle 28"/>
-          <p:cNvSpPr/>
-          <p:nvPr/>
-        </p:nvSpPr>
-        <p:spPr>
-          <a:xfrm>
-            <a:off x="411480" y="4535424"/>
-            <a:ext cx="1737360" cy="749808"/>
-          </a:xfrm>
-          <a:prstGeom prst="roundRect">
-            <a:avLst/>
-          </a:prstGeom>
-          <a:solidFill>
-            <a:srgbClr val="BF8F00"/>
-          </a:solidFill>
-          <a:ln>
-            <a:noFill/>
-          </a:ln>
-          <a:effectLst/>
-        </p:spPr>
-        <p:style>
-          <a:lnRef idx="1">
-            <a:schemeClr val="accent1"/>
-          </a:lnRef>
-          <a:fillRef idx="3">
-            <a:schemeClr val="accent1"/>
-          </a:fillRef>
-          <a:effectRef idx="2">
-            <a:schemeClr val="accent1"/>
-          </a:effectRef>
-          <a:fontRef idx="minor">
-            <a:schemeClr val="lt1"/>
-          </a:fontRef>
-        </p:style>
-        <p:txBody>
-          <a:bodyPr rtlCol="0" anchor="ctr"/>
-          <a:lstStyle/>
-          <a:p>
-            <a:pPr algn="ctr"/>
-          </a:p>
-        </p:txBody>
-      </p:sp>
-      <p:sp>
-        <p:nvSpPr>
-          <p:cNvPr id="30" name="TextBox 29"/>
-          <p:cNvSpPr txBox="1"/>
-          <p:nvPr/>
-        </p:nvSpPr>
-        <p:spPr>
-          <a:xfrm>
-            <a:off x="457200" y="4608576"/>
-            <a:ext cx="1645920" cy="603504"/>
-          </a:xfrm>
-          <a:prstGeom prst="rect">
-            <a:avLst/>
-          </a:prstGeom>
-          <a:noFill/>
-        </p:spPr>
-        <p:txBody>
-          <a:bodyPr wrap="square">
-            <a:spAutoFit/>
-          </a:bodyPr>
-          <a:lstStyle/>
-          <a:p>
-            <a:pPr algn="ctr">
-              <a:spcAft>
-                <a:spcPts val="400"/>
-              </a:spcAft>
-            </a:pPr>
-            <a:r>
-              <a:rPr sz="1300" b="1">
-                <a:solidFill>
-                  <a:srgbClr val="FFFFFF"/>
-                </a:solidFill>
-                <a:latin typeface="微软雅黑"/>
-              </a:rPr>
-              <a:t>硬闸门</a:t>
-            </a:r>
-          </a:p>
-        </p:txBody>
-      </p:sp>
-      <p:sp>
-        <p:nvSpPr>
-          <p:cNvPr id="31" name="Rounded Rectangle 30"/>
-          <p:cNvSpPr/>
-          <p:nvPr/>
-        </p:nvSpPr>
-        <p:spPr>
-          <a:xfrm>
-            <a:off x="2194560" y="4535424"/>
-            <a:ext cx="1783080" cy="749808"/>
-          </a:xfrm>
-          <a:prstGeom prst="roundRect">
-            <a:avLst/>
-          </a:prstGeom>
-          <a:solidFill>
-            <a:srgbClr val="DCE6F1"/>
-          </a:solidFill>
-          <a:ln>
-            <a:noFill/>
-          </a:ln>
-          <a:effectLst/>
-        </p:spPr>
-        <p:style>
-          <a:lnRef idx="1">
-            <a:schemeClr val="accent1"/>
-          </a:lnRef>
-          <a:fillRef idx="3">
-            <a:schemeClr val="accent1"/>
-          </a:fillRef>
-          <a:effectRef idx="2">
-            <a:schemeClr val="accent1"/>
-          </a:effectRef>
-          <a:fontRef idx="minor">
-            <a:schemeClr val="lt1"/>
-          </a:fontRef>
-        </p:style>
-        <p:txBody>
-          <a:bodyPr rtlCol="0" anchor="ctr"/>
-          <a:lstStyle/>
-          <a:p>
-            <a:pPr algn="ctr"/>
-          </a:p>
-        </p:txBody>
-      </p:sp>
-      <p:sp>
-        <p:nvSpPr>
-          <p:cNvPr id="32" name="TextBox 31"/>
-          <p:cNvSpPr txBox="1"/>
-          <p:nvPr/>
-        </p:nvSpPr>
-        <p:spPr>
-          <a:xfrm>
-            <a:off x="2286000" y="4681728"/>
-            <a:ext cx="1645920" cy="502920"/>
-          </a:xfrm>
-          <a:prstGeom prst="rect">
-            <a:avLst/>
-          </a:prstGeom>
-          <a:noFill/>
-        </p:spPr>
-        <p:txBody>
-          <a:bodyPr wrap="square">
-            <a:spAutoFit/>
-          </a:bodyPr>
-          <a:lstStyle/>
-          <a:p>
-            <a:pPr algn="ctr">
-              <a:spcAft>
-                <a:spcPts val="400"/>
-              </a:spcAft>
-            </a:pPr>
-            <a:r>
-              <a:rPr sz="1150" b="1">
-                <a:solidFill>
-                  <a:srgbClr val="1F4E79"/>
-                </a:solidFill>
-                <a:latin typeface="微软雅黑"/>
-              </a:rPr>
-              <a:t>54 项断言</a:t>
-            </a:r>
-          </a:p>
-        </p:txBody>
-      </p:sp>
-      <p:sp>
-        <p:nvSpPr>
-          <p:cNvPr id="33" name="Rounded Rectangle 32"/>
-          <p:cNvSpPr/>
-          <p:nvPr/>
-        </p:nvSpPr>
-        <p:spPr>
-          <a:xfrm>
-            <a:off x="4023360" y="4535424"/>
-            <a:ext cx="7772400" cy="749808"/>
-          </a:xfrm>
-          <a:prstGeom prst="roundRect">
-            <a:avLst/>
-          </a:prstGeom>
-          <a:solidFill>
-            <a:srgbClr val="DCE6F1"/>
-          </a:solidFill>
-          <a:ln>
-            <a:noFill/>
-          </a:ln>
-          <a:effectLst/>
-        </p:spPr>
-        <p:style>
-          <a:lnRef idx="1">
-            <a:schemeClr val="accent1"/>
-          </a:lnRef>
-          <a:fillRef idx="3">
-            <a:schemeClr val="accent1"/>
-          </a:fillRef>
-          <a:effectRef idx="2">
-            <a:schemeClr val="accent1"/>
-          </a:effectRef>
-          <a:fontRef idx="minor">
-            <a:schemeClr val="lt1"/>
-          </a:fontRef>
-        </p:style>
-        <p:txBody>
-          <a:bodyPr rtlCol="0" anchor="ctr"/>
-          <a:lstStyle/>
-          <a:p>
-            <a:pPr algn="ctr"/>
-          </a:p>
-        </p:txBody>
-      </p:sp>
-      <p:sp>
-        <p:nvSpPr>
-          <p:cNvPr id="34" name="TextBox 33"/>
-          <p:cNvSpPr txBox="1"/>
-          <p:nvPr/>
-        </p:nvSpPr>
-        <p:spPr>
-          <a:xfrm>
-            <a:off x="4206240" y="4681728"/>
-            <a:ext cx="7452360" cy="502920"/>
-          </a:xfrm>
-          <a:prstGeom prst="rect">
-            <a:avLst/>
-          </a:prstGeom>
-          <a:noFill/>
-        </p:spPr>
-        <p:txBody>
-          <a:bodyPr wrap="square">
-            <a:spAutoFit/>
-          </a:bodyPr>
-          <a:lstStyle/>
-          <a:p>
-            <a:pPr algn="l">
-              <a:spcAft>
-                <a:spcPts val="400"/>
-              </a:spcAft>
-            </a:pPr>
-            <a:r>
-              <a:rPr sz="1250" b="0">
-                <a:solidFill>
-                  <a:srgbClr val="333333"/>
-                </a:solidFill>
-                <a:latin typeface="微软雅黑"/>
-              </a:rPr>
-              <a:t>无引用不生成 · 低分噪声拦截 · 特征词覆盖校验</a:t>
-            </a:r>
-          </a:p>
-        </p:txBody>
-      </p:sp>
-      <p:sp>
-        <p:nvSpPr>
-          <p:cNvPr id="35" name="Rounded Rectangle 34"/>
-          <p:cNvSpPr/>
-          <p:nvPr/>
-        </p:nvSpPr>
-        <p:spPr>
-          <a:xfrm>
-            <a:off x="411480" y="5394960"/>
-            <a:ext cx="1737360" cy="749808"/>
-          </a:xfrm>
-          <a:prstGeom prst="roundRect">
-            <a:avLst/>
-          </a:prstGeom>
-          <a:solidFill>
-            <a:srgbClr val="595959"/>
-          </a:solidFill>
-          <a:ln>
-            <a:noFill/>
-          </a:ln>
-          <a:effectLst/>
-        </p:spPr>
-        <p:style>
-          <a:lnRef idx="1">
-            <a:schemeClr val="accent1"/>
-          </a:lnRef>
-          <a:fillRef idx="3">
-            <a:schemeClr val="accent1"/>
-          </a:fillRef>
-          <a:effectRef idx="2">
-            <a:schemeClr val="accent1"/>
-          </a:effectRef>
-          <a:fontRef idx="minor">
-            <a:schemeClr val="lt1"/>
-          </a:fontRef>
-        </p:style>
-        <p:txBody>
-          <a:bodyPr rtlCol="0" anchor="ctr"/>
-          <a:lstStyle/>
-          <a:p>
-            <a:pPr algn="ctr"/>
-          </a:p>
-        </p:txBody>
-      </p:sp>
-      <p:sp>
-        <p:nvSpPr>
-          <p:cNvPr id="36" name="TextBox 35"/>
-          <p:cNvSpPr txBox="1"/>
-          <p:nvPr/>
-        </p:nvSpPr>
-        <p:spPr>
-          <a:xfrm>
-            <a:off x="457200" y="5468112"/>
-            <a:ext cx="1645920" cy="603504"/>
-          </a:xfrm>
-          <a:prstGeom prst="rect">
-            <a:avLst/>
-          </a:prstGeom>
-          <a:noFill/>
-        </p:spPr>
-        <p:txBody>
-          <a:bodyPr wrap="square">
-            <a:spAutoFit/>
-          </a:bodyPr>
-          <a:lstStyle/>
-          <a:p>
-            <a:pPr algn="ctr">
-              <a:spcAft>
-                <a:spcPts val="400"/>
-              </a:spcAft>
-            </a:pPr>
-            <a:r>
-              <a:rPr sz="1300" b="1">
-                <a:solidFill>
-                  <a:srgbClr val="FFFFFF"/>
-                </a:solidFill>
-                <a:latin typeface="微软雅黑"/>
-              </a:rPr>
-              <a:t>审计与安全</a:t>
-            </a:r>
-          </a:p>
-        </p:txBody>
-      </p:sp>
-      <p:sp>
-        <p:nvSpPr>
-          <p:cNvPr id="37" name="Rounded Rectangle 36"/>
-          <p:cNvSpPr/>
-          <p:nvPr/>
-        </p:nvSpPr>
-        <p:spPr>
-          <a:xfrm>
-            <a:off x="2194560" y="5394960"/>
-            <a:ext cx="1783080" cy="749808"/>
-          </a:xfrm>
-          <a:prstGeom prst="roundRect">
-            <a:avLst/>
-          </a:prstGeom>
-          <a:solidFill>
-            <a:srgbClr val="DCE6F1"/>
-          </a:solidFill>
-          <a:ln>
-            <a:noFill/>
-          </a:ln>
-          <a:effectLst/>
-        </p:spPr>
-        <p:style>
-          <a:lnRef idx="1">
-            <a:schemeClr val="accent1"/>
-          </a:lnRef>
-          <a:fillRef idx="3">
-            <a:schemeClr val="accent1"/>
-          </a:fillRef>
-          <a:effectRef idx="2">
-            <a:schemeClr val="accent1"/>
-          </a:effectRef>
-          <a:fontRef idx="minor">
-            <a:schemeClr val="lt1"/>
-          </a:fontRef>
-        </p:style>
-        <p:txBody>
-          <a:bodyPr rtlCol="0" anchor="ctr"/>
-          <a:lstStyle/>
-          <a:p>
-            <a:pPr algn="ctr"/>
-          </a:p>
-        </p:txBody>
-      </p:sp>
-      <p:sp>
-        <p:nvSpPr>
-          <p:cNvPr id="38" name="TextBox 37"/>
-          <p:cNvSpPr txBox="1"/>
-          <p:nvPr/>
-        </p:nvSpPr>
-        <p:spPr>
-          <a:xfrm>
-            <a:off x="2286000" y="5541264"/>
-            <a:ext cx="1645920" cy="502920"/>
-          </a:xfrm>
-          <a:prstGeom prst="rect">
-            <a:avLst/>
-          </a:prstGeom>
-          <a:noFill/>
-        </p:spPr>
-        <p:txBody>
-          <a:bodyPr wrap="square">
-            <a:spAutoFit/>
-          </a:bodyPr>
-          <a:lstStyle/>
-          <a:p>
-            <a:pPr algn="ctr">
-              <a:spcAft>
-                <a:spcPts val="400"/>
-              </a:spcAft>
-            </a:pPr>
-            <a:r>
-              <a:rPr sz="1150" b="1">
-                <a:solidFill>
-                  <a:srgbClr val="1F4E79"/>
-                </a:solidFill>
-                <a:latin typeface="微软雅黑"/>
-              </a:rPr>
-              <a:t>audit_logs</a:t>
-            </a:r>
-          </a:p>
-        </p:txBody>
-      </p:sp>
-      <p:sp>
-        <p:nvSpPr>
-          <p:cNvPr id="39" name="Rounded Rectangle 38"/>
-          <p:cNvSpPr/>
-          <p:nvPr/>
-        </p:nvSpPr>
-        <p:spPr>
-          <a:xfrm>
-            <a:off x="4023360" y="5394960"/>
-            <a:ext cx="7772400" cy="749808"/>
-          </a:xfrm>
-          <a:prstGeom prst="roundRect">
-            <a:avLst/>
-          </a:prstGeom>
-          <a:solidFill>
-            <a:srgbClr val="DCE6F1"/>
-          </a:solidFill>
-          <a:ln>
-            <a:noFill/>
-          </a:ln>
-          <a:effectLst/>
-        </p:spPr>
-        <p:style>
-          <a:lnRef idx="1">
-            <a:schemeClr val="accent1"/>
-          </a:lnRef>
-          <a:fillRef idx="3">
-            <a:schemeClr val="accent1"/>
-          </a:fillRef>
-          <a:effectRef idx="2">
-            <a:schemeClr val="accent1"/>
-          </a:effectRef>
-          <a:fontRef idx="minor">
-            <a:schemeClr val="lt1"/>
-          </a:fontRef>
-        </p:style>
-        <p:txBody>
-          <a:bodyPr rtlCol="0" anchor="ctr"/>
-          <a:lstStyle/>
-          <a:p>
-            <a:pPr algn="ctr"/>
-          </a:p>
-        </p:txBody>
-      </p:sp>
-      <p:sp>
-        <p:nvSpPr>
-          <p:cNvPr id="40" name="TextBox 39"/>
-          <p:cNvSpPr txBox="1"/>
-          <p:nvPr/>
-        </p:nvSpPr>
-        <p:spPr>
-          <a:xfrm>
-            <a:off x="4206240" y="5541264"/>
-            <a:ext cx="7452360" cy="502920"/>
-          </a:xfrm>
-          <a:prstGeom prst="rect">
-            <a:avLst/>
-          </a:prstGeom>
-          <a:noFill/>
-        </p:spPr>
-        <p:txBody>
-          <a:bodyPr wrap="square">
-            <a:spAutoFit/>
-          </a:bodyPr>
-          <a:lstStyle/>
-          <a:p>
-            <a:pPr algn="l">
-              <a:spcAft>
-                <a:spcPts val="400"/>
-              </a:spcAft>
-            </a:pPr>
-            <a:r>
-              <a:rPr sz="1250" b="0">
-                <a:solidFill>
-                  <a:srgbClr val="333333"/>
-                </a:solidFill>
-                <a:latin typeface="微软雅黑"/>
-              </a:rPr>
-              <a:t>敏感操作 + 问答交互双审计 · JWT/RBAC 三角色 · Fernet 字段加密</a:t>
-            </a:r>
-          </a:p>
-        </p:txBody>
-      </p:sp>
-      <p:sp>
-        <p:nvSpPr>
-          <p:cNvPr id="41" name="TextBox 40"/>
-          <p:cNvSpPr txBox="1"/>
-          <p:nvPr/>
-        </p:nvSpPr>
-        <p:spPr>
-          <a:xfrm>
-            <a:off x="411480" y="6355080"/>
-            <a:ext cx="11338560" cy="365760"/>
-          </a:xfrm>
-          <a:prstGeom prst="rect">
-            <a:avLst/>
-          </a:prstGeom>
-          <a:noFill/>
-        </p:spPr>
-        <p:txBody>
-          <a:bodyPr wrap="square">
-            <a:spAutoFit/>
-          </a:bodyPr>
-          <a:lstStyle/>
-          <a:p>
-            <a:pPr algn="l">
-              <a:spcAft>
-                <a:spcPts val="400"/>
-              </a:spcAft>
-            </a:pPr>
-            <a:r>
-              <a:rPr sz="1200" b="1">
-                <a:solidFill>
-                  <a:srgbClr val="31859C"/>
-                </a:solidFill>
-                <a:latin typeface="微软雅黑"/>
-              </a:rPr>
-              <a:t>原则: 检索与生成分离评测 · 固定语料固定题集 · 指标可复现可追溯 · 全部离线毫秒级可回归</a:t>
+            <a:pPr algn="l">
+              <a:spcAft>
+                <a:spcPts val="400"/>
+              </a:spcAft>
+            </a:pPr>
+            <a:r>
+              <a:rPr sz="1100" b="0">
+                <a:solidFill>
+                  <a:srgbClr val="595959"/>
+                </a:solidFill>
+                <a:latin typeface="微软雅黑"/>
+              </a:rPr>
+              <a:t>实测: 技术方案 ~2500 字</a:t>
+            </a:r>
+          </a:p>
+          <a:p>
+            <a:pPr algn="l">
+              <a:spcAft>
+                <a:spcPts val="400"/>
+              </a:spcAft>
+            </a:pPr>
+            <a:r>
+              <a:rPr sz="1100" b="0">
+                <a:solidFill>
+                  <a:srgbClr val="595959"/>
+                </a:solidFill>
+                <a:latin typeface="微软雅黑"/>
+              </a:rPr>
+              <a:t>商务报价 ~2765 字, 含报价表</a:t>
+            </a:r>
+          </a:p>
+          <a:p>
+            <a:pPr algn="l">
+              <a:spcAft>
+                <a:spcPts val="400"/>
+              </a:spcAft>
+            </a:pPr>
+            <a:r>
+              <a:rPr sz="1100" b="0">
+                <a:solidFill>
+                  <a:srgbClr val="595959"/>
+                </a:solidFill>
+                <a:latin typeface="微软雅黑"/>
+              </a:rPr>
+              <a:t>企业资料已填字段自动回填</a:t>
             </a:r>
           </a:p>
         </p:txBody>
@@ -5094,7 +3899,7 @@
                 </a:solidFill>
                 <a:latin typeface="微软雅黑"/>
               </a:rPr>
-              <a:t>九、本地部署 — 两种方式一键启动</a:t>
+              <a:t>十、前端展示 — 知识图谱 + 企业资料库</a:t>
             </a:r>
           </a:p>
         </p:txBody>
@@ -5143,60 +3948,74 @@
           </a:p>
         </p:txBody>
       </p:sp>
-      <p:sp>
-        <p:nvSpPr>
-          <p:cNvPr id="5" name="Rounded Rectangle 4"/>
-          <p:cNvSpPr/>
-          <p:nvPr/>
-        </p:nvSpPr>
-        <p:spPr>
-          <a:xfrm>
-            <a:off x="365760" y="1097280"/>
-            <a:ext cx="5577840" cy="4480560"/>
-          </a:xfrm>
-          <a:prstGeom prst="roundRect">
-            <a:avLst/>
-          </a:prstGeom>
-          <a:solidFill>
-            <a:srgbClr val="DCE6F1"/>
-          </a:solidFill>
-          <a:ln>
-            <a:noFill/>
+      <p:pic>
+        <p:nvPicPr>
+          <p:cNvPr id="5" name="Picture 4" descr="fe_test_graph.png"/>
+          <p:cNvPicPr>
+            <a:picLocks noChangeAspect="1"/>
+          </p:cNvPicPr>
+          <p:nvPr/>
+        </p:nvPicPr>
+        <p:blipFill>
+          <a:blip r:embed="rId2"/>
+          <a:stretch>
+            <a:fillRect/>
+          </a:stretch>
+        </p:blipFill>
+        <p:spPr>
+          <a:xfrm>
+            <a:off x="365760" y="1232812"/>
+            <a:ext cx="5486399" cy="3752295"/>
+          </a:xfrm>
+          <a:prstGeom prst="rect">
+            <a:avLst/>
+          </a:prstGeom>
+          <a:ln w="9525">
+            <a:solidFill>
+              <a:srgbClr val="BDBDBD"/>
+            </a:solidFill>
           </a:ln>
-          <a:effectLst/>
-        </p:spPr>
-        <p:style>
-          <a:lnRef idx="1">
-            <a:schemeClr val="accent1"/>
-          </a:lnRef>
-          <a:fillRef idx="3">
-            <a:schemeClr val="accent1"/>
-          </a:fillRef>
-          <a:effectRef idx="2">
-            <a:schemeClr val="accent1"/>
-          </a:effectRef>
-          <a:fontRef idx="minor">
-            <a:schemeClr val="lt1"/>
-          </a:fontRef>
-        </p:style>
-        <p:txBody>
-          <a:bodyPr rtlCol="0" anchor="ctr"/>
-          <a:lstStyle/>
-          <a:p>
-            <a:pPr algn="ctr"/>
-          </a:p>
-        </p:txBody>
-      </p:sp>
-      <p:sp>
-        <p:nvSpPr>
-          <p:cNvPr id="6" name="TextBox 5"/>
+        </p:spPr>
+      </p:pic>
+      <p:pic>
+        <p:nvPicPr>
+          <p:cNvPr id="6" name="Picture 5" descr="fe_test_profile.png"/>
+          <p:cNvPicPr>
+            <a:picLocks noChangeAspect="1"/>
+          </p:cNvPicPr>
+          <p:nvPr/>
+        </p:nvPicPr>
+        <p:blipFill>
+          <a:blip r:embed="rId3"/>
+          <a:stretch>
+            <a:fillRect/>
+          </a:stretch>
+        </p:blipFill>
+        <p:spPr>
+          <a:xfrm>
+            <a:off x="6035040" y="1232812"/>
+            <a:ext cx="5486399" cy="3752295"/>
+          </a:xfrm>
+          <a:prstGeom prst="rect">
+            <a:avLst/>
+          </a:prstGeom>
+          <a:ln w="9525">
+            <a:solidFill>
+              <a:srgbClr val="BDBDBD"/>
+            </a:solidFill>
+          </a:ln>
+        </p:spPr>
+      </p:pic>
+      <p:sp>
+        <p:nvSpPr>
+          <p:cNvPr id="7" name="TextBox 6"/>
           <p:cNvSpPr txBox="1"/>
           <p:nvPr/>
         </p:nvSpPr>
         <p:spPr>
           <a:xfrm>
-            <a:off x="594360" y="1280160"/>
-            <a:ext cx="5120640" cy="411480"/>
+            <a:off x="365760" y="5303520"/>
+            <a:ext cx="5486400" cy="1280160"/>
           </a:xfrm>
           <a:prstGeom prst="rect">
             <a:avLst/>
@@ -5215,27 +4034,75 @@
               </a:spcAft>
             </a:pPr>
             <a:r>
-              <a:rPr sz="1600" b="1">
+              <a:rPr sz="1400" b="1">
                 <a:solidFill>
                   <a:srgbClr val="1F4E79"/>
                 </a:solidFill>
                 <a:latin typeface="微软雅黑"/>
               </a:rPr>
-              <a:t>方式 A: 原生部署 (开发常用)</a:t>
-            </a:r>
-          </a:p>
-        </p:txBody>
-      </p:sp>
-      <p:sp>
-        <p:nvSpPr>
-          <p:cNvPr id="7" name="TextBox 6"/>
+              <a:t>知识图谱可视化</a:t>
+            </a:r>
+          </a:p>
+          <a:p>
+            <a:pPr algn="l">
+              <a:spcAft>
+                <a:spcPts val="400"/>
+              </a:spcAft>
+            </a:pPr>
+            <a:r>
+              <a:rPr sz="1100" b="0">
+                <a:solidFill>
+                  <a:srgbClr val="595959"/>
+                </a:solidFill>
+                <a:latin typeface="微软雅黑"/>
+              </a:rPr>
+              <a:t>▸ 全图 68 节点 / 52 关系 (三类节点)</a:t>
+            </a:r>
+          </a:p>
+          <a:p>
+            <a:pPr algn="l">
+              <a:spcAft>
+                <a:spcPts val="400"/>
+              </a:spcAft>
+            </a:pPr>
+            <a:r>
+              <a:rPr sz="1100" b="0">
+                <a:solidFill>
+                  <a:srgbClr val="595959"/>
+                </a:solidFill>
+                <a:latin typeface="微软雅黑"/>
+              </a:rPr>
+              <a:t>▸ 力导向布局 + 标的物搜索 + 模糊匹配</a:t>
+            </a:r>
+          </a:p>
+          <a:p>
+            <a:pPr algn="l">
+              <a:spcAft>
+                <a:spcPts val="400"/>
+              </a:spcAft>
+            </a:pPr>
+            <a:r>
+              <a:rPr sz="1100" b="0">
+                <a:solidFill>
+                  <a:srgbClr val="595959"/>
+                </a:solidFill>
+                <a:latin typeface="微软雅黑"/>
+              </a:rPr>
+              <a:t>▸ 页面渲染 TOP 子图 39/31, hover 详情</a:t>
+            </a:r>
+          </a:p>
+        </p:txBody>
+      </p:sp>
+      <p:sp>
+        <p:nvSpPr>
+          <p:cNvPr id="8" name="TextBox 7"/>
           <p:cNvSpPr txBox="1"/>
           <p:nvPr/>
         </p:nvSpPr>
         <p:spPr>
           <a:xfrm>
-            <a:off x="594360" y="1783080"/>
-            <a:ext cx="5120640" cy="3657600"/>
+            <a:off x="6035040" y="5303520"/>
+            <a:ext cx="5486400" cy="1280160"/>
           </a:xfrm>
           <a:prstGeom prst="rect">
             <a:avLst/>
@@ -5254,430 +4121,61 @@
               </a:spcAft>
             </a:pPr>
             <a:r>
-              <a:rPr sz="1400" b="0">
+              <a:rPr sz="1400" b="1">
+                <a:solidFill>
+                  <a:srgbClr val="4F8A5B"/>
+                </a:solidFill>
+                <a:latin typeface="微软雅黑"/>
+              </a:rPr>
+              <a:t>企业资料库 (登录鉴权)</a:t>
+            </a:r>
+          </a:p>
+          <a:p>
+            <a:pPr algn="l">
+              <a:spcAft>
+                <a:spcPts val="400"/>
+              </a:spcAft>
+            </a:pPr>
+            <a:r>
+              <a:rPr sz="1100" b="0">
                 <a:solidFill>
                   <a:srgbClr val="595959"/>
                 </a:solidFill>
                 <a:latin typeface="微软雅黑"/>
               </a:rPr>
-              <a:t>1. uv sync — 建 .venv 装依赖</a:t>
-            </a:r>
-          </a:p>
-          <a:p>
-            <a:pPr algn="l">
-              <a:spcAft>
-                <a:spcPts val="400"/>
-              </a:spcAft>
-            </a:pPr>
-            <a:r>
-              <a:rPr sz="1400" b="0">
+              <a:t>▸ 12 项基础字段, 敏感字段脱敏显示</a:t>
+            </a:r>
+          </a:p>
+          <a:p>
+            <a:pPr algn="l">
+              <a:spcAft>
+                <a:spcPts val="400"/>
+              </a:spcAft>
+            </a:pPr>
+            <a:r>
+              <a:rPr sz="1100" b="0">
                 <a:solidFill>
                   <a:srgbClr val="595959"/>
                 </a:solidFill>
                 <a:latin typeface="微软雅黑"/>
               </a:rPr>
-              <a:t>2. 配置 .env — API Key / Qdrant / 加密密钥</a:t>
-            </a:r>
-          </a:p>
-          <a:p>
-            <a:pPr algn="l">
-              <a:spcAft>
-                <a:spcPts val="400"/>
-              </a:spcAft>
-            </a:pPr>
-            <a:r>
-              <a:rPr sz="1400" b="0">
+              <a:t>▸ 资质证书 OCR + 业绩管理</a:t>
+            </a:r>
+          </a:p>
+          <a:p>
+            <a:pPr algn="l">
+              <a:spcAft>
+                <a:spcPts val="400"/>
+              </a:spcAft>
+            </a:pPr>
+            <a:r>
+              <a:rPr sz="1100" b="0">
                 <a:solidFill>
                   <a:srgbClr val="595959"/>
                 </a:solidFill>
                 <a:latin typeface="微软雅黑"/>
               </a:rPr>
-              <a:t>3. python main.py ingest — Excel 灌知识库</a:t>
-            </a:r>
-          </a:p>
-          <a:p>
-            <a:pPr algn="l">
-              <a:spcAft>
-                <a:spcPts val="400"/>
-              </a:spcAft>
-            </a:pPr>
-            <a:r>
-              <a:rPr sz="1400" b="0">
-                <a:solidFill>
-                  <a:srgbClr val="595959"/>
-                </a:solidFill>
-                <a:latin typeface="微软雅黑"/>
-              </a:rPr>
-              <a:t>4. 种子脚本 — PG 历史中标 30 条</a:t>
-            </a:r>
-          </a:p>
-          <a:p>
-            <a:pPr algn="l">
-              <a:spcAft>
-                <a:spcPts val="400"/>
-              </a:spcAft>
-            </a:pPr>
-            <a:r>
-              <a:rPr sz="1400" b="0">
-                <a:solidFill>
-                  <a:srgbClr val="595959"/>
-                </a:solidFill>
-                <a:latin typeface="微软雅黑"/>
-              </a:rPr>
-              <a:t>5. start.bat — 自动拉起前后端两个窗口</a:t>
-            </a:r>
-          </a:p>
-          <a:p>
-            <a:pPr algn="l">
-              <a:spcAft>
-                <a:spcPts val="400"/>
-              </a:spcAft>
-            </a:pPr>
-            <a:r>
-              <a:rPr sz="1400" b="0">
-                <a:solidFill>
-                  <a:srgbClr val="595959"/>
-                </a:solidFill>
-                <a:latin typeface="微软雅黑"/>
-              </a:rPr>
-              <a:t/>
-            </a:r>
-          </a:p>
-          <a:p>
-            <a:pPr algn="l">
-              <a:spcAft>
-                <a:spcPts val="400"/>
-              </a:spcAft>
-            </a:pPr>
-            <a:r>
-              <a:rPr sz="1400" b="1">
-                <a:solidFill>
-                  <a:srgbClr val="595959"/>
-                </a:solidFill>
-                <a:latin typeface="微软雅黑"/>
-              </a:rPr>
-              <a:t>前端 :3000 · 后端 :8001 · /docs 在线文档</a:t>
-            </a:r>
-          </a:p>
-          <a:p>
-            <a:pPr algn="l">
-              <a:spcAft>
-                <a:spcPts val="400"/>
-              </a:spcAft>
-            </a:pPr>
-            <a:r>
-              <a:rPr sz="1400" b="0">
-                <a:solidFill>
-                  <a:srgbClr val="595959"/>
-                </a:solidFill>
-                <a:latin typeface="微软雅黑"/>
-              </a:rPr>
-              <a:t>stop.bat 四级兜底停止 (标题/端口/进程树/进程名)</a:t>
-            </a:r>
-          </a:p>
-        </p:txBody>
-      </p:sp>
-      <p:sp>
-        <p:nvSpPr>
-          <p:cNvPr id="8" name="Rounded Rectangle 7"/>
-          <p:cNvSpPr/>
-          <p:nvPr/>
-        </p:nvSpPr>
-        <p:spPr>
-          <a:xfrm>
-            <a:off x="6217920" y="1097280"/>
-            <a:ext cx="5577840" cy="4480560"/>
-          </a:xfrm>
-          <a:prstGeom prst="roundRect">
-            <a:avLst/>
-          </a:prstGeom>
-          <a:solidFill>
-            <a:srgbClr val="DCE6F1"/>
-          </a:solidFill>
-          <a:ln>
-            <a:noFill/>
-          </a:ln>
-          <a:effectLst/>
-        </p:spPr>
-        <p:style>
-          <a:lnRef idx="1">
-            <a:schemeClr val="accent1"/>
-          </a:lnRef>
-          <a:fillRef idx="3">
-            <a:schemeClr val="accent1"/>
-          </a:fillRef>
-          <a:effectRef idx="2">
-            <a:schemeClr val="accent1"/>
-          </a:effectRef>
-          <a:fontRef idx="minor">
-            <a:schemeClr val="lt1"/>
-          </a:fontRef>
-        </p:style>
-        <p:txBody>
-          <a:bodyPr rtlCol="0" anchor="ctr"/>
-          <a:lstStyle/>
-          <a:p>
-            <a:pPr algn="ctr"/>
-          </a:p>
-        </p:txBody>
-      </p:sp>
-      <p:sp>
-        <p:nvSpPr>
-          <p:cNvPr id="9" name="TextBox 8"/>
-          <p:cNvSpPr txBox="1"/>
-          <p:nvPr/>
-        </p:nvSpPr>
-        <p:spPr>
-          <a:xfrm>
-            <a:off x="6446520" y="1280160"/>
-            <a:ext cx="5120640" cy="411480"/>
-          </a:xfrm>
-          <a:prstGeom prst="rect">
-            <a:avLst/>
-          </a:prstGeom>
-          <a:noFill/>
-        </p:spPr>
-        <p:txBody>
-          <a:bodyPr wrap="square">
-            <a:spAutoFit/>
-          </a:bodyPr>
-          <a:lstStyle/>
-          <a:p>
-            <a:pPr algn="l">
-              <a:spcAft>
-                <a:spcPts val="400"/>
-              </a:spcAft>
-            </a:pPr>
-            <a:r>
-              <a:rPr sz="1600" b="1">
-                <a:solidFill>
-                  <a:srgbClr val="4F8A5B"/>
-                </a:solidFill>
-                <a:latin typeface="微软雅黑"/>
-              </a:rPr>
-              <a:t>方式 B: Docker Compose 全栈 (交付演示)</a:t>
-            </a:r>
-          </a:p>
-        </p:txBody>
-      </p:sp>
-      <p:sp>
-        <p:nvSpPr>
-          <p:cNvPr id="10" name="TextBox 9"/>
-          <p:cNvSpPr txBox="1"/>
-          <p:nvPr/>
-        </p:nvSpPr>
-        <p:spPr>
-          <a:xfrm>
-            <a:off x="6446520" y="1783080"/>
-            <a:ext cx="5120640" cy="3657600"/>
-          </a:xfrm>
-          <a:prstGeom prst="rect">
-            <a:avLst/>
-          </a:prstGeom>
-          <a:noFill/>
-        </p:spPr>
-        <p:txBody>
-          <a:bodyPr wrap="square">
-            <a:spAutoFit/>
-          </a:bodyPr>
-          <a:lstStyle/>
-          <a:p>
-            <a:pPr algn="l">
-              <a:spcAft>
-                <a:spcPts val="400"/>
-              </a:spcAft>
-            </a:pPr>
-            <a:r>
-              <a:rPr sz="1400" b="0">
-                <a:solidFill>
-                  <a:srgbClr val="595959"/>
-                </a:solidFill>
-                <a:latin typeface="微软雅黑"/>
-              </a:rPr>
-              <a:t>start-docker.bat 一条命令起 5 容器:</a:t>
-            </a:r>
-          </a:p>
-          <a:p>
-            <a:pPr algn="l">
-              <a:spcAft>
-                <a:spcPts val="400"/>
-              </a:spcAft>
-            </a:pPr>
-            <a:r>
-              <a:rPr sz="1400" b="0">
-                <a:solidFill>
-                  <a:srgbClr val="595959"/>
-                </a:solidFill>
-                <a:latin typeface="微软雅黑"/>
-              </a:rPr>
-              <a:t>  backend (python:3.12-slim + uv)</a:t>
-            </a:r>
-          </a:p>
-          <a:p>
-            <a:pPr algn="l">
-              <a:spcAft>
-                <a:spcPts val="400"/>
-              </a:spcAft>
-            </a:pPr>
-            <a:r>
-              <a:rPr sz="1400" b="0">
-                <a:solidFill>
-                  <a:srgbClr val="595959"/>
-                </a:solidFill>
-                <a:latin typeface="微软雅黑"/>
-              </a:rPr>
-              <a:t>  frontend (Next.js standalone 产物)</a:t>
-            </a:r>
-          </a:p>
-          <a:p>
-            <a:pPr algn="l">
-              <a:spcAft>
-                <a:spcPts val="400"/>
-              </a:spcAft>
-            </a:pPr>
-            <a:r>
-              <a:rPr sz="1400" b="0">
-                <a:solidFill>
-                  <a:srgbClr val="595959"/>
-                </a:solidFill>
-                <a:latin typeface="微软雅黑"/>
-              </a:rPr>
-              <a:t>  qdrant :6333 (volume 持久化)</a:t>
-            </a:r>
-          </a:p>
-          <a:p>
-            <a:pPr algn="l">
-              <a:spcAft>
-                <a:spcPts val="400"/>
-              </a:spcAft>
-            </a:pPr>
-            <a:r>
-              <a:rPr sz="1400" b="0">
-                <a:solidFill>
-                  <a:srgbClr val="595959"/>
-                </a:solidFill>
-                <a:latin typeface="微软雅黑"/>
-              </a:rPr>
-              <a:t>  postgres :5432 (volume 持久化)</a:t>
-            </a:r>
-          </a:p>
-          <a:p>
-            <a:pPr algn="l">
-              <a:spcAft>
-                <a:spcPts val="400"/>
-              </a:spcAft>
-            </a:pPr>
-            <a:r>
-              <a:rPr sz="1400" b="0">
-                <a:solidFill>
-                  <a:srgbClr val="595959"/>
-                </a:solidFill>
-                <a:latin typeface="微软雅黑"/>
-              </a:rPr>
-              <a:t>  neo4j :7474/7687 (volume 持久化)</a:t>
-            </a:r>
-          </a:p>
-          <a:p>
-            <a:pPr algn="l">
-              <a:spcAft>
-                <a:spcPts val="400"/>
-              </a:spcAft>
-            </a:pPr>
-            <a:r>
-              <a:rPr sz="1400" b="0">
-                <a:solidFill>
-                  <a:srgbClr val="595959"/>
-                </a:solidFill>
-                <a:latin typeface="微软雅黑"/>
-              </a:rPr>
-              <a:t/>
-            </a:r>
-          </a:p>
-          <a:p>
-            <a:pPr algn="l">
-              <a:spcAft>
-                <a:spcPts val="400"/>
-              </a:spcAft>
-            </a:pPr>
-            <a:r>
-              <a:rPr sz="1400" b="1">
-                <a:solidFill>
-                  <a:srgbClr val="595959"/>
-                </a:solidFill>
-                <a:latin typeface="微软雅黑"/>
-              </a:rPr>
-              <a:t>健康检查轮询 60s → 自动开浏览器</a:t>
-            </a:r>
-          </a:p>
-          <a:p>
-            <a:pPr algn="l">
-              <a:spcAft>
-                <a:spcPts val="400"/>
-              </a:spcAft>
-            </a:pPr>
-            <a:r>
-              <a:rPr sz="1400" b="0">
-                <a:solidFill>
-                  <a:srgbClr val="595959"/>
-                </a:solidFill>
-                <a:latin typeface="微软雅黑"/>
-              </a:rPr>
-              <a:t>容器内服务名互联, restart: unless-stopped</a:t>
-            </a:r>
-          </a:p>
-        </p:txBody>
-      </p:sp>
-      <p:sp>
-        <p:nvSpPr>
-          <p:cNvPr id="11" name="TextBox 10"/>
-          <p:cNvSpPr txBox="1"/>
-          <p:nvPr/>
-        </p:nvSpPr>
-        <p:spPr>
-          <a:xfrm>
-            <a:off x="365760" y="5852160"/>
-            <a:ext cx="11430000" cy="640080"/>
-          </a:xfrm>
-          <a:prstGeom prst="rect">
-            <a:avLst/>
-          </a:prstGeom>
-          <a:noFill/>
-        </p:spPr>
-        <p:txBody>
-          <a:bodyPr wrap="square">
-            <a:spAutoFit/>
-          </a:bodyPr>
-          <a:lstStyle/>
-          <a:p>
-            <a:pPr algn="l">
-              <a:spcAft>
-                <a:spcPts val="400"/>
-              </a:spcAft>
-            </a:pPr>
-            <a:r>
-              <a:rPr sz="1200" b="1">
-                <a:solidFill>
-                  <a:srgbClr val="1F4E79"/>
-                </a:solidFill>
-                <a:latin typeface="微软雅黑"/>
-              </a:rPr>
-              <a:t>组件清单: FastAPI API + Next.js 前端 + Qdrant 向量库 + PostgreSQL 业务库 + Neo4j 图谱 + BGE-M3/reranker 本地模型</a:t>
-            </a:r>
-          </a:p>
-          <a:p>
-            <a:pPr algn="l">
-              <a:spcAft>
-                <a:spcPts val="400"/>
-              </a:spcAft>
-            </a:pPr>
-            <a:r>
-              <a:rPr sz="1100" b="0">
-                <a:solidFill>
-                  <a:srgbClr val="595959"/>
-                </a:solidFill>
-                <a:latin typeface="微软雅黑"/>
-              </a:rPr>
-              <a:t>模型本地化: HF_HOME 重定向 D 盘, 离线可加载, 无 GPU 依赖</a:t>
+              <a:t>▸ 保存后标书占位符自动回填</a:t>
             </a:r>
           </a:p>
         </p:txBody>
@@ -5709,7 +4207,7 @@
         <p:spPr>
           <a:xfrm>
             <a:off x="0" y="0"/>
-            <a:ext cx="12191695" cy="6858000"/>
+            <a:ext cx="12191695" cy="822960"/>
           </a:xfrm>
           <a:prstGeom prst="rect">
             <a:avLst/>
@@ -5752,8 +4250,8 @@
         </p:nvSpPr>
         <p:spPr>
           <a:xfrm>
-            <a:off x="914400" y="2377440"/>
-            <a:ext cx="10332720" cy="914400"/>
+            <a:off x="457200" y="109728"/>
+            <a:ext cx="11247120" cy="603504"/>
           </a:xfrm>
           <a:prstGeom prst="rect">
             <a:avLst/>
@@ -5772,13 +4270,3241 @@
               </a:spcAft>
             </a:pPr>
             <a:r>
-              <a:rPr sz="3600" b="1">
+              <a:rPr sz="2400" b="1">
                 <a:solidFill>
                   <a:srgbClr val="FFFFFF"/>
                 </a:solidFill>
                 <a:latin typeface="微软雅黑"/>
               </a:rPr>
-              <a:t>从 "能回答" 到 "有依据地回答"</a:t>
+              <a:t>十一、前端展示 — 招投标专项工具 (1/2): 评估分析</a:t>
+            </a:r>
+          </a:p>
+        </p:txBody>
+      </p:sp>
+      <p:sp>
+        <p:nvSpPr>
+          <p:cNvPr id="4" name="Rectangle 3"/>
+          <p:cNvSpPr/>
+          <p:nvPr/>
+        </p:nvSpPr>
+        <p:spPr>
+          <a:xfrm>
+            <a:off x="0" y="822960"/>
+            <a:ext cx="12191695" cy="38100"/>
+          </a:xfrm>
+          <a:prstGeom prst="rect">
+            <a:avLst/>
+          </a:prstGeom>
+          <a:solidFill>
+            <a:srgbClr val="BF8F00"/>
+          </a:solidFill>
+          <a:ln>
+            <a:noFill/>
+          </a:ln>
+          <a:effectLst/>
+        </p:spPr>
+        <p:style>
+          <a:lnRef idx="1">
+            <a:schemeClr val="accent1"/>
+          </a:lnRef>
+          <a:fillRef idx="3">
+            <a:schemeClr val="accent1"/>
+          </a:fillRef>
+          <a:effectRef idx="2">
+            <a:schemeClr val="accent1"/>
+          </a:effectRef>
+          <a:fontRef idx="minor">
+            <a:schemeClr val="lt1"/>
+          </a:fontRef>
+        </p:style>
+        <p:txBody>
+          <a:bodyPr rtlCol="0" anchor="ctr"/>
+          <a:lstStyle/>
+          <a:p>
+            <a:pPr algn="ctr"/>
+          </a:p>
+        </p:txBody>
+      </p:sp>
+      <p:pic>
+        <p:nvPicPr>
+          <p:cNvPr id="5" name="Picture 4" descr="07_price_panel.png"/>
+          <p:cNvPicPr>
+            <a:picLocks noChangeAspect="1"/>
+          </p:cNvPicPr>
+          <p:nvPr/>
+        </p:nvPicPr>
+        <p:blipFill>
+          <a:blip r:embed="rId2"/>
+          <a:stretch>
+            <a:fillRect/>
+          </a:stretch>
+        </p:blipFill>
+        <p:spPr>
+          <a:xfrm>
+            <a:off x="459868" y="1097280"/>
+            <a:ext cx="5481063" cy="4069080"/>
+          </a:xfrm>
+          <a:prstGeom prst="rect">
+            <a:avLst/>
+          </a:prstGeom>
+          <a:ln w="9525">
+            <a:solidFill>
+              <a:srgbClr val="BDBDBD"/>
+            </a:solidFill>
+          </a:ln>
+        </p:spPr>
+      </p:pic>
+      <p:sp>
+        <p:nvSpPr>
+          <p:cNvPr id="6" name="Rounded Rectangle 5"/>
+          <p:cNvSpPr/>
+          <p:nvPr/>
+        </p:nvSpPr>
+        <p:spPr>
+          <a:xfrm>
+            <a:off x="365760" y="5303520"/>
+            <a:ext cx="5669280" cy="1280160"/>
+          </a:xfrm>
+          <a:prstGeom prst="roundRect">
+            <a:avLst/>
+          </a:prstGeom>
+          <a:solidFill>
+            <a:srgbClr val="DCE6F1"/>
+          </a:solidFill>
+          <a:ln>
+            <a:noFill/>
+          </a:ln>
+          <a:effectLst/>
+        </p:spPr>
+        <p:style>
+          <a:lnRef idx="1">
+            <a:schemeClr val="accent1"/>
+          </a:lnRef>
+          <a:fillRef idx="3">
+            <a:schemeClr val="accent1"/>
+          </a:fillRef>
+          <a:effectRef idx="2">
+            <a:schemeClr val="accent1"/>
+          </a:effectRef>
+          <a:fontRef idx="minor">
+            <a:schemeClr val="lt1"/>
+          </a:fontRef>
+        </p:style>
+        <p:txBody>
+          <a:bodyPr rtlCol="0" anchor="ctr"/>
+          <a:lstStyle/>
+          <a:p>
+            <a:pPr algn="ctr"/>
+          </a:p>
+        </p:txBody>
+      </p:sp>
+      <p:sp>
+        <p:nvSpPr>
+          <p:cNvPr id="7" name="TextBox 6"/>
+          <p:cNvSpPr txBox="1"/>
+          <p:nvPr/>
+        </p:nvSpPr>
+        <p:spPr>
+          <a:xfrm>
+            <a:off x="530352" y="5413248"/>
+            <a:ext cx="5349240" cy="1097280"/>
+          </a:xfrm>
+          <a:prstGeom prst="rect">
+            <a:avLst/>
+          </a:prstGeom>
+          <a:noFill/>
+        </p:spPr>
+        <p:txBody>
+          <a:bodyPr wrap="square">
+            <a:spAutoFit/>
+          </a:bodyPr>
+          <a:lstStyle/>
+          <a:p>
+            <a:pPr algn="l">
+              <a:spcAft>
+                <a:spcPts val="400"/>
+              </a:spcAft>
+            </a:pPr>
+            <a:r>
+              <a:rPr sz="1500" b="1">
+                <a:solidFill>
+                  <a:srgbClr val="1F4E79"/>
+                </a:solidFill>
+                <a:latin typeface="微软雅黑"/>
+              </a:rPr>
+              <a:t>价格分析面板</a:t>
+            </a:r>
+          </a:p>
+          <a:p>
+            <a:pPr algn="l">
+              <a:spcAft>
+                <a:spcPts val="500"/>
+              </a:spcAft>
+            </a:pPr>
+            <a:r>
+              <a:rPr sz="1200" b="0">
+                <a:solidFill>
+                  <a:srgbClr val="333333"/>
+                </a:solidFill>
+                <a:latin typeface="微软雅黑"/>
+              </a:rPr>
+              <a:t>• 投标报价对比分析, 异常报价提示</a:t>
+            </a:r>
+          </a:p>
+          <a:p>
+            <a:pPr algn="l">
+              <a:spcAft>
+                <a:spcPts val="500"/>
+              </a:spcAft>
+            </a:pPr>
+            <a:r>
+              <a:rPr sz="1200" b="0">
+                <a:solidFill>
+                  <a:srgbClr val="333333"/>
+                </a:solidFill>
+                <a:latin typeface="微软雅黑"/>
+              </a:rPr>
+              <a:t>• 总价/单价构成透明可查</a:t>
+            </a:r>
+          </a:p>
+        </p:txBody>
+      </p:sp>
+      <p:pic>
+        <p:nvPicPr>
+          <p:cNvPr id="8" name="Picture 7" descr="08_bid_parse_panel.png"/>
+          <p:cNvPicPr>
+            <a:picLocks noChangeAspect="1"/>
+          </p:cNvPicPr>
+          <p:nvPr/>
+        </p:nvPicPr>
+        <p:blipFill>
+          <a:blip r:embed="rId3"/>
+          <a:stretch>
+            <a:fillRect/>
+          </a:stretch>
+        </p:blipFill>
+        <p:spPr>
+          <a:xfrm>
+            <a:off x="6266308" y="1097280"/>
+            <a:ext cx="5481063" cy="4069080"/>
+          </a:xfrm>
+          <a:prstGeom prst="rect">
+            <a:avLst/>
+          </a:prstGeom>
+          <a:ln w="9525">
+            <a:solidFill>
+              <a:srgbClr val="BDBDBD"/>
+            </a:solidFill>
+          </a:ln>
+        </p:spPr>
+      </p:pic>
+      <p:sp>
+        <p:nvSpPr>
+          <p:cNvPr id="9" name="Rounded Rectangle 8"/>
+          <p:cNvSpPr/>
+          <p:nvPr/>
+        </p:nvSpPr>
+        <p:spPr>
+          <a:xfrm>
+            <a:off x="6172200" y="5303520"/>
+            <a:ext cx="5669280" cy="1280160"/>
+          </a:xfrm>
+          <a:prstGeom prst="roundRect">
+            <a:avLst/>
+          </a:prstGeom>
+          <a:solidFill>
+            <a:srgbClr val="DCE6F1"/>
+          </a:solidFill>
+          <a:ln>
+            <a:noFill/>
+          </a:ln>
+          <a:effectLst/>
+        </p:spPr>
+        <p:style>
+          <a:lnRef idx="1">
+            <a:schemeClr val="accent1"/>
+          </a:lnRef>
+          <a:fillRef idx="3">
+            <a:schemeClr val="accent1"/>
+          </a:fillRef>
+          <a:effectRef idx="2">
+            <a:schemeClr val="accent1"/>
+          </a:effectRef>
+          <a:fontRef idx="minor">
+            <a:schemeClr val="lt1"/>
+          </a:fontRef>
+        </p:style>
+        <p:txBody>
+          <a:bodyPr rtlCol="0" anchor="ctr"/>
+          <a:lstStyle/>
+          <a:p>
+            <a:pPr algn="ctr"/>
+          </a:p>
+        </p:txBody>
+      </p:sp>
+      <p:sp>
+        <p:nvSpPr>
+          <p:cNvPr id="10" name="TextBox 9"/>
+          <p:cNvSpPr txBox="1"/>
+          <p:nvPr/>
+        </p:nvSpPr>
+        <p:spPr>
+          <a:xfrm>
+            <a:off x="6336792" y="5413248"/>
+            <a:ext cx="5349240" cy="1097280"/>
+          </a:xfrm>
+          <a:prstGeom prst="rect">
+            <a:avLst/>
+          </a:prstGeom>
+          <a:noFill/>
+        </p:spPr>
+        <p:txBody>
+          <a:bodyPr wrap="square">
+            <a:spAutoFit/>
+          </a:bodyPr>
+          <a:lstStyle/>
+          <a:p>
+            <a:pPr algn="l">
+              <a:spcAft>
+                <a:spcPts val="400"/>
+              </a:spcAft>
+            </a:pPr>
+            <a:r>
+              <a:rPr sz="1500" b="1">
+                <a:solidFill>
+                  <a:srgbClr val="1F4E79"/>
+                </a:solidFill>
+                <a:latin typeface="微软雅黑"/>
+              </a:rPr>
+              <a:t>标书解析 + 逐条响应矩阵</a:t>
+            </a:r>
+          </a:p>
+          <a:p>
+            <a:pPr algn="l">
+              <a:spcAft>
+                <a:spcPts val="500"/>
+              </a:spcAft>
+            </a:pPr>
+            <a:r>
+              <a:rPr sz="1200" b="0">
+                <a:solidFill>
+                  <a:srgbClr val="333333"/>
+                </a:solidFill>
+                <a:latin typeface="微软雅黑"/>
+              </a:rPr>
+              <a:t>• 招标要求 vs 投标响应逐条对照</a:t>
+            </a:r>
+          </a:p>
+          <a:p>
+            <a:pPr algn="l">
+              <a:spcAft>
+                <a:spcPts val="500"/>
+              </a:spcAft>
+            </a:pPr>
+            <a:r>
+              <a:rPr sz="1200" b="0">
+                <a:solidFill>
+                  <a:srgbClr val="333333"/>
+                </a:solidFill>
+                <a:latin typeface="微软雅黑"/>
+              </a:rPr>
+              <a:t>• 响应/偏离自动判定, 偏差项高亮</a:t>
+            </a:r>
+          </a:p>
+        </p:txBody>
+      </p:sp>
+    </p:spTree>
+  </p:cSld>
+  <p:clrMapOvr>
+    <a:masterClrMapping/>
+  </p:clrMapOvr>
+</p:sld>
+</file>
+
+<file path=ppt/slides/slide13.xml><?xml version="1.0" encoding="utf-8"?>
+<p:sld xmlns:a="http://schemas.openxmlformats.org/drawingml/2006/main" xmlns:p="http://schemas.openxmlformats.org/presentationml/2006/main" xmlns:r="http://schemas.openxmlformats.org/officeDocument/2006/relationships">
+  <p:cSld>
+    <p:spTree>
+      <p:nvGrpSpPr>
+        <p:cNvPr id="1" name=""/>
+        <p:cNvGrpSpPr/>
+        <p:nvPr/>
+      </p:nvGrpSpPr>
+      <p:grpSpPr/>
+      <p:sp>
+        <p:nvSpPr>
+          <p:cNvPr id="2" name="Rectangle 1"/>
+          <p:cNvSpPr/>
+          <p:nvPr/>
+        </p:nvSpPr>
+        <p:spPr>
+          <a:xfrm>
+            <a:off x="0" y="0"/>
+            <a:ext cx="12191695" cy="822960"/>
+          </a:xfrm>
+          <a:prstGeom prst="rect">
+            <a:avLst/>
+          </a:prstGeom>
+          <a:solidFill>
+            <a:srgbClr val="1F4E79"/>
+          </a:solidFill>
+          <a:ln>
+            <a:noFill/>
+          </a:ln>
+          <a:effectLst/>
+        </p:spPr>
+        <p:style>
+          <a:lnRef idx="1">
+            <a:schemeClr val="accent1"/>
+          </a:lnRef>
+          <a:fillRef idx="3">
+            <a:schemeClr val="accent1"/>
+          </a:fillRef>
+          <a:effectRef idx="2">
+            <a:schemeClr val="accent1"/>
+          </a:effectRef>
+          <a:fontRef idx="minor">
+            <a:schemeClr val="lt1"/>
+          </a:fontRef>
+        </p:style>
+        <p:txBody>
+          <a:bodyPr rtlCol="0" anchor="ctr"/>
+          <a:lstStyle/>
+          <a:p>
+            <a:pPr algn="ctr"/>
+          </a:p>
+        </p:txBody>
+      </p:sp>
+      <p:sp>
+        <p:nvSpPr>
+          <p:cNvPr id="3" name="TextBox 2"/>
+          <p:cNvSpPr txBox="1"/>
+          <p:nvPr/>
+        </p:nvSpPr>
+        <p:spPr>
+          <a:xfrm>
+            <a:off x="457200" y="109728"/>
+            <a:ext cx="11247120" cy="603504"/>
+          </a:xfrm>
+          <a:prstGeom prst="rect">
+            <a:avLst/>
+          </a:prstGeom>
+          <a:noFill/>
+        </p:spPr>
+        <p:txBody>
+          <a:bodyPr wrap="square">
+            <a:spAutoFit/>
+          </a:bodyPr>
+          <a:lstStyle/>
+          <a:p>
+            <a:pPr algn="l">
+              <a:spcAft>
+                <a:spcPts val="400"/>
+              </a:spcAft>
+            </a:pPr>
+            <a:r>
+              <a:rPr sz="2400" b="1">
+                <a:solidFill>
+                  <a:srgbClr val="FFFFFF"/>
+                </a:solidFill>
+                <a:latin typeface="微软雅黑"/>
+              </a:rPr>
+              <a:t>十一、前端展示 — 招投标专项工具 (2/2): 核验风控</a:t>
+            </a:r>
+          </a:p>
+        </p:txBody>
+      </p:sp>
+      <p:sp>
+        <p:nvSpPr>
+          <p:cNvPr id="4" name="Rectangle 3"/>
+          <p:cNvSpPr/>
+          <p:nvPr/>
+        </p:nvSpPr>
+        <p:spPr>
+          <a:xfrm>
+            <a:off x="0" y="822960"/>
+            <a:ext cx="12191695" cy="38100"/>
+          </a:xfrm>
+          <a:prstGeom prst="rect">
+            <a:avLst/>
+          </a:prstGeom>
+          <a:solidFill>
+            <a:srgbClr val="BF8F00"/>
+          </a:solidFill>
+          <a:ln>
+            <a:noFill/>
+          </a:ln>
+          <a:effectLst/>
+        </p:spPr>
+        <p:style>
+          <a:lnRef idx="1">
+            <a:schemeClr val="accent1"/>
+          </a:lnRef>
+          <a:fillRef idx="3">
+            <a:schemeClr val="accent1"/>
+          </a:fillRef>
+          <a:effectRef idx="2">
+            <a:schemeClr val="accent1"/>
+          </a:effectRef>
+          <a:fontRef idx="minor">
+            <a:schemeClr val="lt1"/>
+          </a:fontRef>
+        </p:style>
+        <p:txBody>
+          <a:bodyPr rtlCol="0" anchor="ctr"/>
+          <a:lstStyle/>
+          <a:p>
+            <a:pPr algn="ctr"/>
+          </a:p>
+        </p:txBody>
+      </p:sp>
+      <p:pic>
+        <p:nvPicPr>
+          <p:cNvPr id="5" name="Picture 4" descr="v15_cert_ocr.png"/>
+          <p:cNvPicPr>
+            <a:picLocks noChangeAspect="1"/>
+          </p:cNvPicPr>
+          <p:nvPr/>
+        </p:nvPicPr>
+        <p:blipFill>
+          <a:blip r:embed="rId2"/>
+          <a:stretch>
+            <a:fillRect/>
+          </a:stretch>
+        </p:blipFill>
+        <p:spPr>
+          <a:xfrm>
+            <a:off x="459868" y="1097280"/>
+            <a:ext cx="5481063" cy="4069080"/>
+          </a:xfrm>
+          <a:prstGeom prst="rect">
+            <a:avLst/>
+          </a:prstGeom>
+          <a:ln w="9525">
+            <a:solidFill>
+              <a:srgbClr val="BDBDBD"/>
+            </a:solidFill>
+          </a:ln>
+        </p:spPr>
+      </p:pic>
+      <p:sp>
+        <p:nvSpPr>
+          <p:cNvPr id="6" name="Rounded Rectangle 5"/>
+          <p:cNvSpPr/>
+          <p:nvPr/>
+        </p:nvSpPr>
+        <p:spPr>
+          <a:xfrm>
+            <a:off x="365760" y="5303520"/>
+            <a:ext cx="5669280" cy="1280160"/>
+          </a:xfrm>
+          <a:prstGeom prst="roundRect">
+            <a:avLst/>
+          </a:prstGeom>
+          <a:solidFill>
+            <a:srgbClr val="DCE6F1"/>
+          </a:solidFill>
+          <a:ln>
+            <a:noFill/>
+          </a:ln>
+          <a:effectLst/>
+        </p:spPr>
+        <p:style>
+          <a:lnRef idx="1">
+            <a:schemeClr val="accent1"/>
+          </a:lnRef>
+          <a:fillRef idx="3">
+            <a:schemeClr val="accent1"/>
+          </a:fillRef>
+          <a:effectRef idx="2">
+            <a:schemeClr val="accent1"/>
+          </a:effectRef>
+          <a:fontRef idx="minor">
+            <a:schemeClr val="lt1"/>
+          </a:fontRef>
+        </p:style>
+        <p:txBody>
+          <a:bodyPr rtlCol="0" anchor="ctr"/>
+          <a:lstStyle/>
+          <a:p>
+            <a:pPr algn="ctr"/>
+          </a:p>
+        </p:txBody>
+      </p:sp>
+      <p:sp>
+        <p:nvSpPr>
+          <p:cNvPr id="7" name="TextBox 6"/>
+          <p:cNvSpPr txBox="1"/>
+          <p:nvPr/>
+        </p:nvSpPr>
+        <p:spPr>
+          <a:xfrm>
+            <a:off x="530352" y="5413248"/>
+            <a:ext cx="5349240" cy="1097280"/>
+          </a:xfrm>
+          <a:prstGeom prst="rect">
+            <a:avLst/>
+          </a:prstGeom>
+          <a:noFill/>
+        </p:spPr>
+        <p:txBody>
+          <a:bodyPr wrap="square">
+            <a:spAutoFit/>
+          </a:bodyPr>
+          <a:lstStyle/>
+          <a:p>
+            <a:pPr algn="l">
+              <a:spcAft>
+                <a:spcPts val="400"/>
+              </a:spcAft>
+            </a:pPr>
+            <a:r>
+              <a:rPr sz="1500" b="1">
+                <a:solidFill>
+                  <a:srgbClr val="1F4E79"/>
+                </a:solidFill>
+                <a:latin typeface="微软雅黑"/>
+              </a:rPr>
+              <a:t>企业资料 + 证书 OCR</a:t>
+            </a:r>
+          </a:p>
+          <a:p>
+            <a:pPr algn="l">
+              <a:spcAft>
+                <a:spcPts val="500"/>
+              </a:spcAft>
+            </a:pPr>
+            <a:r>
+              <a:rPr sz="1200" b="0">
+                <a:solidFill>
+                  <a:srgbClr val="333333"/>
+                </a:solidFill>
+                <a:latin typeface="微软雅黑"/>
+              </a:rPr>
+              <a:t>• 营业执照/资质证书自动识别录入</a:t>
+            </a:r>
+          </a:p>
+          <a:p>
+            <a:pPr algn="l">
+              <a:spcAft>
+                <a:spcPts val="500"/>
+              </a:spcAft>
+            </a:pPr>
+            <a:r>
+              <a:rPr sz="1200" b="0">
+                <a:solidFill>
+                  <a:srgbClr val="333333"/>
+                </a:solidFill>
+                <a:latin typeface="微软雅黑"/>
+              </a:rPr>
+              <a:t>• 敏感字段 Fernet 加密入库</a:t>
+            </a:r>
+          </a:p>
+        </p:txBody>
+      </p:sp>
+      <p:pic>
+        <p:nvPicPr>
+          <p:cNvPr id="8" name="Picture 7" descr="09_collusion_dialog.png"/>
+          <p:cNvPicPr>
+            <a:picLocks noChangeAspect="1"/>
+          </p:cNvPicPr>
+          <p:nvPr/>
+        </p:nvPicPr>
+        <p:blipFill>
+          <a:blip r:embed="rId3"/>
+          <a:stretch>
+            <a:fillRect/>
+          </a:stretch>
+        </p:blipFill>
+        <p:spPr>
+          <a:xfrm>
+            <a:off x="6266308" y="1097280"/>
+            <a:ext cx="5481063" cy="4069080"/>
+          </a:xfrm>
+          <a:prstGeom prst="rect">
+            <a:avLst/>
+          </a:prstGeom>
+          <a:ln w="9525">
+            <a:solidFill>
+              <a:srgbClr val="BDBDBD"/>
+            </a:solidFill>
+          </a:ln>
+        </p:spPr>
+      </p:pic>
+      <p:sp>
+        <p:nvSpPr>
+          <p:cNvPr id="9" name="Rounded Rectangle 8"/>
+          <p:cNvSpPr/>
+          <p:nvPr/>
+        </p:nvSpPr>
+        <p:spPr>
+          <a:xfrm>
+            <a:off x="6172200" y="5303520"/>
+            <a:ext cx="5669280" cy="1280160"/>
+          </a:xfrm>
+          <a:prstGeom prst="roundRect">
+            <a:avLst/>
+          </a:prstGeom>
+          <a:solidFill>
+            <a:srgbClr val="DCE6F1"/>
+          </a:solidFill>
+          <a:ln>
+            <a:noFill/>
+          </a:ln>
+          <a:effectLst/>
+        </p:spPr>
+        <p:style>
+          <a:lnRef idx="1">
+            <a:schemeClr val="accent1"/>
+          </a:lnRef>
+          <a:fillRef idx="3">
+            <a:schemeClr val="accent1"/>
+          </a:fillRef>
+          <a:effectRef idx="2">
+            <a:schemeClr val="accent1"/>
+          </a:effectRef>
+          <a:fontRef idx="minor">
+            <a:schemeClr val="lt1"/>
+          </a:fontRef>
+        </p:style>
+        <p:txBody>
+          <a:bodyPr rtlCol="0" anchor="ctr"/>
+          <a:lstStyle/>
+          <a:p>
+            <a:pPr algn="ctr"/>
+          </a:p>
+        </p:txBody>
+      </p:sp>
+      <p:sp>
+        <p:nvSpPr>
+          <p:cNvPr id="10" name="TextBox 9"/>
+          <p:cNvSpPr txBox="1"/>
+          <p:nvPr/>
+        </p:nvSpPr>
+        <p:spPr>
+          <a:xfrm>
+            <a:off x="6336792" y="5413248"/>
+            <a:ext cx="5349240" cy="1097280"/>
+          </a:xfrm>
+          <a:prstGeom prst="rect">
+            <a:avLst/>
+          </a:prstGeom>
+          <a:noFill/>
+        </p:spPr>
+        <p:txBody>
+          <a:bodyPr wrap="square">
+            <a:spAutoFit/>
+          </a:bodyPr>
+          <a:lstStyle/>
+          <a:p>
+            <a:pPr algn="l">
+              <a:spcAft>
+                <a:spcPts val="400"/>
+              </a:spcAft>
+            </a:pPr>
+            <a:r>
+              <a:rPr sz="1500" b="1">
+                <a:solidFill>
+                  <a:srgbClr val="1F4E79"/>
+                </a:solidFill>
+                <a:latin typeface="微软雅黑"/>
+              </a:rPr>
+              <a:t>围串标检测</a:t>
+            </a:r>
+          </a:p>
+          <a:p>
+            <a:pPr algn="l">
+              <a:spcAft>
+                <a:spcPts val="500"/>
+              </a:spcAft>
+            </a:pPr>
+            <a:r>
+              <a:rPr sz="1200" b="0">
+                <a:solidFill>
+                  <a:srgbClr val="333333"/>
+                </a:solidFill>
+                <a:latin typeface="微软雅黑"/>
+              </a:rPr>
+              <a:t>• 两份投标文件相似度对比</a:t>
+            </a:r>
+          </a:p>
+          <a:p>
+            <a:pPr algn="l">
+              <a:spcAft>
+                <a:spcPts val="500"/>
+              </a:spcAft>
+            </a:pPr>
+            <a:r>
+              <a:rPr sz="1200" b="0">
+                <a:solidFill>
+                  <a:srgbClr val="333333"/>
+                </a:solidFill>
+                <a:latin typeface="微软雅黑"/>
+              </a:rPr>
+              <a:t>• 特征码/报价规律等疑点自动提示</a:t>
+            </a:r>
+          </a:p>
+        </p:txBody>
+      </p:sp>
+    </p:spTree>
+  </p:cSld>
+  <p:clrMapOvr>
+    <a:masterClrMapping/>
+  </p:clrMapOvr>
+</p:sld>
+</file>
+
+<file path=ppt/slides/slide14.xml><?xml version="1.0" encoding="utf-8"?>
+<p:sld xmlns:a="http://schemas.openxmlformats.org/drawingml/2006/main" xmlns:p="http://schemas.openxmlformats.org/presentationml/2006/main" xmlns:r="http://schemas.openxmlformats.org/officeDocument/2006/relationships">
+  <p:cSld>
+    <p:spTree>
+      <p:nvGrpSpPr>
+        <p:cNvPr id="1" name=""/>
+        <p:cNvGrpSpPr/>
+        <p:nvPr/>
+      </p:nvGrpSpPr>
+      <p:grpSpPr/>
+      <p:sp>
+        <p:nvSpPr>
+          <p:cNvPr id="2" name="Rectangle 1"/>
+          <p:cNvSpPr/>
+          <p:nvPr/>
+        </p:nvSpPr>
+        <p:spPr>
+          <a:xfrm>
+            <a:off x="0" y="0"/>
+            <a:ext cx="12191695" cy="822960"/>
+          </a:xfrm>
+          <a:prstGeom prst="rect">
+            <a:avLst/>
+          </a:prstGeom>
+          <a:solidFill>
+            <a:srgbClr val="1F4E79"/>
+          </a:solidFill>
+          <a:ln>
+            <a:noFill/>
+          </a:ln>
+          <a:effectLst/>
+        </p:spPr>
+        <p:style>
+          <a:lnRef idx="1">
+            <a:schemeClr val="accent1"/>
+          </a:lnRef>
+          <a:fillRef idx="3">
+            <a:schemeClr val="accent1"/>
+          </a:fillRef>
+          <a:effectRef idx="2">
+            <a:schemeClr val="accent1"/>
+          </a:effectRef>
+          <a:fontRef idx="minor">
+            <a:schemeClr val="lt1"/>
+          </a:fontRef>
+        </p:style>
+        <p:txBody>
+          <a:bodyPr rtlCol="0" anchor="ctr"/>
+          <a:lstStyle/>
+          <a:p>
+            <a:pPr algn="ctr"/>
+          </a:p>
+        </p:txBody>
+      </p:sp>
+      <p:sp>
+        <p:nvSpPr>
+          <p:cNvPr id="3" name="TextBox 2"/>
+          <p:cNvSpPr txBox="1"/>
+          <p:nvPr/>
+        </p:nvSpPr>
+        <p:spPr>
+          <a:xfrm>
+            <a:off x="457200" y="109728"/>
+            <a:ext cx="11247120" cy="603504"/>
+          </a:xfrm>
+          <a:prstGeom prst="rect">
+            <a:avLst/>
+          </a:prstGeom>
+          <a:noFill/>
+        </p:spPr>
+        <p:txBody>
+          <a:bodyPr wrap="square">
+            <a:spAutoFit/>
+          </a:bodyPr>
+          <a:lstStyle/>
+          <a:p>
+            <a:pPr algn="l">
+              <a:spcAft>
+                <a:spcPts val="400"/>
+              </a:spcAft>
+            </a:pPr>
+            <a:r>
+              <a:rPr sz="2400" b="1">
+                <a:solidFill>
+                  <a:srgbClr val="FFFFFF"/>
+                </a:solidFill>
+                <a:latin typeface="微软雅黑"/>
+              </a:rPr>
+              <a:t>十二、质量保障 — 评测体系与验收数据</a:t>
+            </a:r>
+          </a:p>
+        </p:txBody>
+      </p:sp>
+      <p:sp>
+        <p:nvSpPr>
+          <p:cNvPr id="4" name="Rectangle 3"/>
+          <p:cNvSpPr/>
+          <p:nvPr/>
+        </p:nvSpPr>
+        <p:spPr>
+          <a:xfrm>
+            <a:off x="0" y="822960"/>
+            <a:ext cx="12191695" cy="38100"/>
+          </a:xfrm>
+          <a:prstGeom prst="rect">
+            <a:avLst/>
+          </a:prstGeom>
+          <a:solidFill>
+            <a:srgbClr val="BF8F00"/>
+          </a:solidFill>
+          <a:ln>
+            <a:noFill/>
+          </a:ln>
+          <a:effectLst/>
+        </p:spPr>
+        <p:style>
+          <a:lnRef idx="1">
+            <a:schemeClr val="accent1"/>
+          </a:lnRef>
+          <a:fillRef idx="3">
+            <a:schemeClr val="accent1"/>
+          </a:fillRef>
+          <a:effectRef idx="2">
+            <a:schemeClr val="accent1"/>
+          </a:effectRef>
+          <a:fontRef idx="minor">
+            <a:schemeClr val="lt1"/>
+          </a:fontRef>
+        </p:style>
+        <p:txBody>
+          <a:bodyPr rtlCol="0" anchor="ctr"/>
+          <a:lstStyle/>
+          <a:p>
+            <a:pPr algn="ctr"/>
+          </a:p>
+        </p:txBody>
+      </p:sp>
+      <p:sp>
+        <p:nvSpPr>
+          <p:cNvPr id="5" name="Rounded Rectangle 4"/>
+          <p:cNvSpPr/>
+          <p:nvPr/>
+        </p:nvSpPr>
+        <p:spPr>
+          <a:xfrm>
+            <a:off x="411480" y="1097280"/>
+            <a:ext cx="1737360" cy="749808"/>
+          </a:xfrm>
+          <a:prstGeom prst="roundRect">
+            <a:avLst/>
+          </a:prstGeom>
+          <a:solidFill>
+            <a:srgbClr val="4F8A5B"/>
+          </a:solidFill>
+          <a:ln>
+            <a:noFill/>
+          </a:ln>
+          <a:effectLst/>
+        </p:spPr>
+        <p:style>
+          <a:lnRef idx="1">
+            <a:schemeClr val="accent1"/>
+          </a:lnRef>
+          <a:fillRef idx="3">
+            <a:schemeClr val="accent1"/>
+          </a:fillRef>
+          <a:effectRef idx="2">
+            <a:schemeClr val="accent1"/>
+          </a:effectRef>
+          <a:fontRef idx="minor">
+            <a:schemeClr val="lt1"/>
+          </a:fontRef>
+        </p:style>
+        <p:txBody>
+          <a:bodyPr rtlCol="0" anchor="ctr"/>
+          <a:lstStyle/>
+          <a:p>
+            <a:pPr algn="ctr"/>
+          </a:p>
+        </p:txBody>
+      </p:sp>
+      <p:sp>
+        <p:nvSpPr>
+          <p:cNvPr id="6" name="TextBox 5"/>
+          <p:cNvSpPr txBox="1"/>
+          <p:nvPr/>
+        </p:nvSpPr>
+        <p:spPr>
+          <a:xfrm>
+            <a:off x="457200" y="1170432"/>
+            <a:ext cx="1645920" cy="603504"/>
+          </a:xfrm>
+          <a:prstGeom prst="rect">
+            <a:avLst/>
+          </a:prstGeom>
+          <a:noFill/>
+        </p:spPr>
+        <p:txBody>
+          <a:bodyPr wrap="square">
+            <a:spAutoFit/>
+          </a:bodyPr>
+          <a:lstStyle/>
+          <a:p>
+            <a:pPr algn="ctr">
+              <a:spcAft>
+                <a:spcPts val="400"/>
+              </a:spcAft>
+            </a:pPr>
+            <a:r>
+              <a:rPr sz="1300" b="1">
+                <a:solidFill>
+                  <a:srgbClr val="FFFFFF"/>
+                </a:solidFill>
+                <a:latin typeface="微软雅黑"/>
+              </a:rPr>
+              <a:t>检索评测</a:t>
+            </a:r>
+          </a:p>
+        </p:txBody>
+      </p:sp>
+      <p:sp>
+        <p:nvSpPr>
+          <p:cNvPr id="7" name="Rounded Rectangle 6"/>
+          <p:cNvSpPr/>
+          <p:nvPr/>
+        </p:nvSpPr>
+        <p:spPr>
+          <a:xfrm>
+            <a:off x="2194560" y="1097280"/>
+            <a:ext cx="1783080" cy="749808"/>
+          </a:xfrm>
+          <a:prstGeom prst="roundRect">
+            <a:avLst/>
+          </a:prstGeom>
+          <a:solidFill>
+            <a:srgbClr val="DCE6F1"/>
+          </a:solidFill>
+          <a:ln>
+            <a:noFill/>
+          </a:ln>
+          <a:effectLst/>
+        </p:spPr>
+        <p:style>
+          <a:lnRef idx="1">
+            <a:schemeClr val="accent1"/>
+          </a:lnRef>
+          <a:fillRef idx="3">
+            <a:schemeClr val="accent1"/>
+          </a:fillRef>
+          <a:effectRef idx="2">
+            <a:schemeClr val="accent1"/>
+          </a:effectRef>
+          <a:fontRef idx="minor">
+            <a:schemeClr val="lt1"/>
+          </a:fontRef>
+        </p:style>
+        <p:txBody>
+          <a:bodyPr rtlCol="0" anchor="ctr"/>
+          <a:lstStyle/>
+          <a:p>
+            <a:pPr algn="ctr"/>
+          </a:p>
+        </p:txBody>
+      </p:sp>
+      <p:sp>
+        <p:nvSpPr>
+          <p:cNvPr id="8" name="TextBox 7"/>
+          <p:cNvSpPr txBox="1"/>
+          <p:nvPr/>
+        </p:nvSpPr>
+        <p:spPr>
+          <a:xfrm>
+            <a:off x="2286000" y="1243584"/>
+            <a:ext cx="1645920" cy="502920"/>
+          </a:xfrm>
+          <a:prstGeom prst="rect">
+            <a:avLst/>
+          </a:prstGeom>
+          <a:noFill/>
+        </p:spPr>
+        <p:txBody>
+          <a:bodyPr wrap="square">
+            <a:spAutoFit/>
+          </a:bodyPr>
+          <a:lstStyle/>
+          <a:p>
+            <a:pPr algn="ctr">
+              <a:spcAft>
+                <a:spcPts val="400"/>
+              </a:spcAft>
+            </a:pPr>
+            <a:r>
+              <a:rPr sz="1150" b="1">
+                <a:solidFill>
+                  <a:srgbClr val="1F4E79"/>
+                </a:solidFill>
+                <a:latin typeface="微软雅黑"/>
+              </a:rPr>
+              <a:t>70 题 × 6 指标</a:t>
+            </a:r>
+          </a:p>
+        </p:txBody>
+      </p:sp>
+      <p:sp>
+        <p:nvSpPr>
+          <p:cNvPr id="9" name="Rounded Rectangle 8"/>
+          <p:cNvSpPr/>
+          <p:nvPr/>
+        </p:nvSpPr>
+        <p:spPr>
+          <a:xfrm>
+            <a:off x="4023360" y="1097280"/>
+            <a:ext cx="7772400" cy="749808"/>
+          </a:xfrm>
+          <a:prstGeom prst="roundRect">
+            <a:avLst/>
+          </a:prstGeom>
+          <a:solidFill>
+            <a:srgbClr val="DCE6F1"/>
+          </a:solidFill>
+          <a:ln>
+            <a:noFill/>
+          </a:ln>
+          <a:effectLst/>
+        </p:spPr>
+        <p:style>
+          <a:lnRef idx="1">
+            <a:schemeClr val="accent1"/>
+          </a:lnRef>
+          <a:fillRef idx="3">
+            <a:schemeClr val="accent1"/>
+          </a:fillRef>
+          <a:effectRef idx="2">
+            <a:schemeClr val="accent1"/>
+          </a:effectRef>
+          <a:fontRef idx="minor">
+            <a:schemeClr val="lt1"/>
+          </a:fontRef>
+        </p:style>
+        <p:txBody>
+          <a:bodyPr rtlCol="0" anchor="ctr"/>
+          <a:lstStyle/>
+          <a:p>
+            <a:pPr algn="ctr"/>
+          </a:p>
+        </p:txBody>
+      </p:sp>
+      <p:sp>
+        <p:nvSpPr>
+          <p:cNvPr id="10" name="TextBox 9"/>
+          <p:cNvSpPr txBox="1"/>
+          <p:nvPr/>
+        </p:nvSpPr>
+        <p:spPr>
+          <a:xfrm>
+            <a:off x="4206240" y="1243584"/>
+            <a:ext cx="7452360" cy="502920"/>
+          </a:xfrm>
+          <a:prstGeom prst="rect">
+            <a:avLst/>
+          </a:prstGeom>
+          <a:noFill/>
+        </p:spPr>
+        <p:txBody>
+          <a:bodyPr wrap="square">
+            <a:spAutoFit/>
+          </a:bodyPr>
+          <a:lstStyle/>
+          <a:p>
+            <a:pPr algn="l">
+              <a:spcAft>
+                <a:spcPts val="400"/>
+              </a:spcAft>
+            </a:pPr>
+            <a:r>
+              <a:rPr sz="1250" b="0">
+                <a:solidFill>
+                  <a:srgbClr val="333333"/>
+                </a:solidFill>
+                <a:latin typeface="微软雅黑"/>
+              </a:rPr>
+              <a:t>HitRate@5 = 100% · MRR = 1.0 · nDCG = 0.9933 · EvidenceCoverage = 100%</a:t>
+            </a:r>
+          </a:p>
+        </p:txBody>
+      </p:sp>
+      <p:sp>
+        <p:nvSpPr>
+          <p:cNvPr id="11" name="Rounded Rectangle 10"/>
+          <p:cNvSpPr/>
+          <p:nvPr/>
+        </p:nvSpPr>
+        <p:spPr>
+          <a:xfrm>
+            <a:off x="411480" y="1956816"/>
+            <a:ext cx="1737360" cy="749808"/>
+          </a:xfrm>
+          <a:prstGeom prst="roundRect">
+            <a:avLst/>
+          </a:prstGeom>
+          <a:solidFill>
+            <a:srgbClr val="4F8A5B"/>
+          </a:solidFill>
+          <a:ln>
+            <a:noFill/>
+          </a:ln>
+          <a:effectLst/>
+        </p:spPr>
+        <p:style>
+          <a:lnRef idx="1">
+            <a:schemeClr val="accent1"/>
+          </a:lnRef>
+          <a:fillRef idx="3">
+            <a:schemeClr val="accent1"/>
+          </a:fillRef>
+          <a:effectRef idx="2">
+            <a:schemeClr val="accent1"/>
+          </a:effectRef>
+          <a:fontRef idx="minor">
+            <a:schemeClr val="lt1"/>
+          </a:fontRef>
+        </p:style>
+        <p:txBody>
+          <a:bodyPr rtlCol="0" anchor="ctr"/>
+          <a:lstStyle/>
+          <a:p>
+            <a:pPr algn="ctr"/>
+          </a:p>
+        </p:txBody>
+      </p:sp>
+      <p:sp>
+        <p:nvSpPr>
+          <p:cNvPr id="12" name="TextBox 11"/>
+          <p:cNvSpPr txBox="1"/>
+          <p:nvPr/>
+        </p:nvSpPr>
+        <p:spPr>
+          <a:xfrm>
+            <a:off x="457200" y="2029968"/>
+            <a:ext cx="1645920" cy="603504"/>
+          </a:xfrm>
+          <a:prstGeom prst="rect">
+            <a:avLst/>
+          </a:prstGeom>
+          <a:noFill/>
+        </p:spPr>
+        <p:txBody>
+          <a:bodyPr wrap="square">
+            <a:spAutoFit/>
+          </a:bodyPr>
+          <a:lstStyle/>
+          <a:p>
+            <a:pPr algn="ctr">
+              <a:spcAft>
+                <a:spcPts val="400"/>
+              </a:spcAft>
+            </a:pPr>
+            <a:r>
+              <a:rPr sz="1300" b="1">
+                <a:solidFill>
+                  <a:srgbClr val="FFFFFF"/>
+                </a:solidFill>
+                <a:latin typeface="微软雅黑"/>
+              </a:rPr>
+              <a:t>消融对比</a:t>
+            </a:r>
+          </a:p>
+        </p:txBody>
+      </p:sp>
+      <p:sp>
+        <p:nvSpPr>
+          <p:cNvPr id="13" name="Rounded Rectangle 12"/>
+          <p:cNvSpPr/>
+          <p:nvPr/>
+        </p:nvSpPr>
+        <p:spPr>
+          <a:xfrm>
+            <a:off x="2194560" y="1956816"/>
+            <a:ext cx="1783080" cy="749808"/>
+          </a:xfrm>
+          <a:prstGeom prst="roundRect">
+            <a:avLst/>
+          </a:prstGeom>
+          <a:solidFill>
+            <a:srgbClr val="DCE6F1"/>
+          </a:solidFill>
+          <a:ln>
+            <a:noFill/>
+          </a:ln>
+          <a:effectLst/>
+        </p:spPr>
+        <p:style>
+          <a:lnRef idx="1">
+            <a:schemeClr val="accent1"/>
+          </a:lnRef>
+          <a:fillRef idx="3">
+            <a:schemeClr val="accent1"/>
+          </a:fillRef>
+          <a:effectRef idx="2">
+            <a:schemeClr val="accent1"/>
+          </a:effectRef>
+          <a:fontRef idx="minor">
+            <a:schemeClr val="lt1"/>
+          </a:fontRef>
+        </p:style>
+        <p:txBody>
+          <a:bodyPr rtlCol="0" anchor="ctr"/>
+          <a:lstStyle/>
+          <a:p>
+            <a:pPr algn="ctr"/>
+          </a:p>
+        </p:txBody>
+      </p:sp>
+      <p:sp>
+        <p:nvSpPr>
+          <p:cNvPr id="14" name="TextBox 13"/>
+          <p:cNvSpPr txBox="1"/>
+          <p:nvPr/>
+        </p:nvSpPr>
+        <p:spPr>
+          <a:xfrm>
+            <a:off x="2286000" y="2103120"/>
+            <a:ext cx="1645920" cy="502920"/>
+          </a:xfrm>
+          <a:prstGeom prst="rect">
+            <a:avLst/>
+          </a:prstGeom>
+          <a:noFill/>
+        </p:spPr>
+        <p:txBody>
+          <a:bodyPr wrap="square">
+            <a:spAutoFit/>
+          </a:bodyPr>
+          <a:lstStyle/>
+          <a:p>
+            <a:pPr algn="ctr">
+              <a:spcAft>
+                <a:spcPts val="400"/>
+              </a:spcAft>
+            </a:pPr>
+            <a:r>
+              <a:rPr sz="1150" b="1">
+                <a:solidFill>
+                  <a:srgbClr val="1F4E79"/>
+                </a:solidFill>
+                <a:latin typeface="微软雅黑"/>
+              </a:rPr>
+              <a:t>17 题 × 4 档</a:t>
+            </a:r>
+          </a:p>
+        </p:txBody>
+      </p:sp>
+      <p:sp>
+        <p:nvSpPr>
+          <p:cNvPr id="15" name="Rounded Rectangle 14"/>
+          <p:cNvSpPr/>
+          <p:nvPr/>
+        </p:nvSpPr>
+        <p:spPr>
+          <a:xfrm>
+            <a:off x="4023360" y="1956816"/>
+            <a:ext cx="7772400" cy="749808"/>
+          </a:xfrm>
+          <a:prstGeom prst="roundRect">
+            <a:avLst/>
+          </a:prstGeom>
+          <a:solidFill>
+            <a:srgbClr val="DCE6F1"/>
+          </a:solidFill>
+          <a:ln>
+            <a:noFill/>
+          </a:ln>
+          <a:effectLst/>
+        </p:spPr>
+        <p:style>
+          <a:lnRef idx="1">
+            <a:schemeClr val="accent1"/>
+          </a:lnRef>
+          <a:fillRef idx="3">
+            <a:schemeClr val="accent1"/>
+          </a:fillRef>
+          <a:effectRef idx="2">
+            <a:schemeClr val="accent1"/>
+          </a:effectRef>
+          <a:fontRef idx="minor">
+            <a:schemeClr val="lt1"/>
+          </a:fontRef>
+        </p:style>
+        <p:txBody>
+          <a:bodyPr rtlCol="0" anchor="ctr"/>
+          <a:lstStyle/>
+          <a:p>
+            <a:pPr algn="ctr"/>
+          </a:p>
+        </p:txBody>
+      </p:sp>
+      <p:sp>
+        <p:nvSpPr>
+          <p:cNvPr id="16" name="TextBox 15"/>
+          <p:cNvSpPr txBox="1"/>
+          <p:nvPr/>
+        </p:nvSpPr>
+        <p:spPr>
+          <a:xfrm>
+            <a:off x="4206240" y="2103120"/>
+            <a:ext cx="7452360" cy="502920"/>
+          </a:xfrm>
+          <a:prstGeom prst="rect">
+            <a:avLst/>
+          </a:prstGeom>
+          <a:noFill/>
+        </p:spPr>
+        <p:txBody>
+          <a:bodyPr wrap="square">
+            <a:spAutoFit/>
+          </a:bodyPr>
+          <a:lstStyle/>
+          <a:p>
+            <a:pPr algn="l">
+              <a:spcAft>
+                <a:spcPts val="400"/>
+              </a:spcAft>
+            </a:pPr>
+            <a:r>
+              <a:rPr sz="1250" b="0">
+                <a:solidFill>
+                  <a:srgbClr val="333333"/>
+                </a:solidFill>
+                <a:latin typeface="微软雅黑"/>
+              </a:rPr>
+              <a:t>A0 纯 Dense 0.9756 → A3 完整 0.9953; 精排单贡献 +34.3pp</a:t>
+            </a:r>
+          </a:p>
+        </p:txBody>
+      </p:sp>
+      <p:sp>
+        <p:nvSpPr>
+          <p:cNvPr id="17" name="Rounded Rectangle 16"/>
+          <p:cNvSpPr/>
+          <p:nvPr/>
+        </p:nvSpPr>
+        <p:spPr>
+          <a:xfrm>
+            <a:off x="411480" y="2816352"/>
+            <a:ext cx="1737360" cy="749808"/>
+          </a:xfrm>
+          <a:prstGeom prst="roundRect">
+            <a:avLst/>
+          </a:prstGeom>
+          <a:solidFill>
+            <a:srgbClr val="31859C"/>
+          </a:solidFill>
+          <a:ln>
+            <a:noFill/>
+          </a:ln>
+          <a:effectLst/>
+        </p:spPr>
+        <p:style>
+          <a:lnRef idx="1">
+            <a:schemeClr val="accent1"/>
+          </a:lnRef>
+          <a:fillRef idx="3">
+            <a:schemeClr val="accent1"/>
+          </a:fillRef>
+          <a:effectRef idx="2">
+            <a:schemeClr val="accent1"/>
+          </a:effectRef>
+          <a:fontRef idx="minor">
+            <a:schemeClr val="lt1"/>
+          </a:fontRef>
+        </p:style>
+        <p:txBody>
+          <a:bodyPr rtlCol="0" anchor="ctr"/>
+          <a:lstStyle/>
+          <a:p>
+            <a:pPr algn="ctr"/>
+          </a:p>
+        </p:txBody>
+      </p:sp>
+      <p:sp>
+        <p:nvSpPr>
+          <p:cNvPr id="18" name="TextBox 17"/>
+          <p:cNvSpPr txBox="1"/>
+          <p:nvPr/>
+        </p:nvSpPr>
+        <p:spPr>
+          <a:xfrm>
+            <a:off x="457200" y="2889504"/>
+            <a:ext cx="1645920" cy="603504"/>
+          </a:xfrm>
+          <a:prstGeom prst="rect">
+            <a:avLst/>
+          </a:prstGeom>
+          <a:noFill/>
+        </p:spPr>
+        <p:txBody>
+          <a:bodyPr wrap="square">
+            <a:spAutoFit/>
+          </a:bodyPr>
+          <a:lstStyle/>
+          <a:p>
+            <a:pPr algn="ctr">
+              <a:spcAft>
+                <a:spcPts val="400"/>
+              </a:spcAft>
+            </a:pPr>
+            <a:r>
+              <a:rPr sz="1300" b="1">
+                <a:solidFill>
+                  <a:srgbClr val="FFFFFF"/>
+                </a:solidFill>
+                <a:latin typeface="微软雅黑"/>
+              </a:rPr>
+              <a:t>Agent 端到端</a:t>
+            </a:r>
+          </a:p>
+        </p:txBody>
+      </p:sp>
+      <p:sp>
+        <p:nvSpPr>
+          <p:cNvPr id="19" name="Rounded Rectangle 18"/>
+          <p:cNvSpPr/>
+          <p:nvPr/>
+        </p:nvSpPr>
+        <p:spPr>
+          <a:xfrm>
+            <a:off x="2194560" y="2816352"/>
+            <a:ext cx="1783080" cy="749808"/>
+          </a:xfrm>
+          <a:prstGeom prst="roundRect">
+            <a:avLst/>
+          </a:prstGeom>
+          <a:solidFill>
+            <a:srgbClr val="DCE6F1"/>
+          </a:solidFill>
+          <a:ln>
+            <a:noFill/>
+          </a:ln>
+          <a:effectLst/>
+        </p:spPr>
+        <p:style>
+          <a:lnRef idx="1">
+            <a:schemeClr val="accent1"/>
+          </a:lnRef>
+          <a:fillRef idx="3">
+            <a:schemeClr val="accent1"/>
+          </a:fillRef>
+          <a:effectRef idx="2">
+            <a:schemeClr val="accent1"/>
+          </a:effectRef>
+          <a:fontRef idx="minor">
+            <a:schemeClr val="lt1"/>
+          </a:fontRef>
+        </p:style>
+        <p:txBody>
+          <a:bodyPr rtlCol="0" anchor="ctr"/>
+          <a:lstStyle/>
+          <a:p>
+            <a:pPr algn="ctr"/>
+          </a:p>
+        </p:txBody>
+      </p:sp>
+      <p:sp>
+        <p:nvSpPr>
+          <p:cNvPr id="20" name="TextBox 19"/>
+          <p:cNvSpPr txBox="1"/>
+          <p:nvPr/>
+        </p:nvSpPr>
+        <p:spPr>
+          <a:xfrm>
+            <a:off x="2286000" y="2962656"/>
+            <a:ext cx="1645920" cy="502920"/>
+          </a:xfrm>
+          <a:prstGeom prst="rect">
+            <a:avLst/>
+          </a:prstGeom>
+          <a:noFill/>
+        </p:spPr>
+        <p:txBody>
+          <a:bodyPr wrap="square">
+            <a:spAutoFit/>
+          </a:bodyPr>
+          <a:lstStyle/>
+          <a:p>
+            <a:pPr algn="ctr">
+              <a:spcAft>
+                <a:spcPts val="400"/>
+              </a:spcAft>
+            </a:pPr>
+            <a:r>
+              <a:rPr sz="1150" b="1">
+                <a:solidFill>
+                  <a:srgbClr val="1F4E79"/>
+                </a:solidFill>
+                <a:latin typeface="微软雅黑"/>
+              </a:rPr>
+              <a:t>55 题真实 HTTP</a:t>
+            </a:r>
+          </a:p>
+        </p:txBody>
+      </p:sp>
+      <p:sp>
+        <p:nvSpPr>
+          <p:cNvPr id="21" name="Rounded Rectangle 20"/>
+          <p:cNvSpPr/>
+          <p:nvPr/>
+        </p:nvSpPr>
+        <p:spPr>
+          <a:xfrm>
+            <a:off x="4023360" y="2816352"/>
+            <a:ext cx="7772400" cy="749808"/>
+          </a:xfrm>
+          <a:prstGeom prst="roundRect">
+            <a:avLst/>
+          </a:prstGeom>
+          <a:solidFill>
+            <a:srgbClr val="DCE6F1"/>
+          </a:solidFill>
+          <a:ln>
+            <a:noFill/>
+          </a:ln>
+          <a:effectLst/>
+        </p:spPr>
+        <p:style>
+          <a:lnRef idx="1">
+            <a:schemeClr val="accent1"/>
+          </a:lnRef>
+          <a:fillRef idx="3">
+            <a:schemeClr val="accent1"/>
+          </a:fillRef>
+          <a:effectRef idx="2">
+            <a:schemeClr val="accent1"/>
+          </a:effectRef>
+          <a:fontRef idx="minor">
+            <a:schemeClr val="lt1"/>
+          </a:fontRef>
+        </p:style>
+        <p:txBody>
+          <a:bodyPr rtlCol="0" anchor="ctr"/>
+          <a:lstStyle/>
+          <a:p>
+            <a:pPr algn="ctr"/>
+          </a:p>
+        </p:txBody>
+      </p:sp>
+      <p:sp>
+        <p:nvSpPr>
+          <p:cNvPr id="22" name="TextBox 21"/>
+          <p:cNvSpPr txBox="1"/>
+          <p:nvPr/>
+        </p:nvSpPr>
+        <p:spPr>
+          <a:xfrm>
+            <a:off x="4206240" y="2962656"/>
+            <a:ext cx="7452360" cy="502920"/>
+          </a:xfrm>
+          <a:prstGeom prst="rect">
+            <a:avLst/>
+          </a:prstGeom>
+          <a:noFill/>
+        </p:spPr>
+        <p:txBody>
+          <a:bodyPr wrap="square">
+            <a:spAutoFit/>
+          </a:bodyPr>
+          <a:lstStyle/>
+          <a:p>
+            <a:pPr algn="l">
+              <a:spcAft>
+                <a:spcPts val="400"/>
+              </a:spcAft>
+            </a:pPr>
+            <a:r>
+              <a:rPr sz="1250" b="0">
+                <a:solidFill>
+                  <a:srgbClr val="333333"/>
+                </a:solidFill>
+                <a:latin typeface="微软雅黑"/>
+              </a:rPr>
+              <a:t>通过率 85.5% · 工具选择 87.3% · 事实覆盖 92.6%</a:t>
+            </a:r>
+          </a:p>
+        </p:txBody>
+      </p:sp>
+      <p:sp>
+        <p:nvSpPr>
+          <p:cNvPr id="23" name="Rounded Rectangle 22"/>
+          <p:cNvSpPr/>
+          <p:nvPr/>
+        </p:nvSpPr>
+        <p:spPr>
+          <a:xfrm>
+            <a:off x="411480" y="3675888"/>
+            <a:ext cx="1737360" cy="749808"/>
+          </a:xfrm>
+          <a:prstGeom prst="roundRect">
+            <a:avLst/>
+          </a:prstGeom>
+          <a:solidFill>
+            <a:srgbClr val="1F4E79"/>
+          </a:solidFill>
+          <a:ln>
+            <a:noFill/>
+          </a:ln>
+          <a:effectLst/>
+        </p:spPr>
+        <p:style>
+          <a:lnRef idx="1">
+            <a:schemeClr val="accent1"/>
+          </a:lnRef>
+          <a:fillRef idx="3">
+            <a:schemeClr val="accent1"/>
+          </a:fillRef>
+          <a:effectRef idx="2">
+            <a:schemeClr val="accent1"/>
+          </a:effectRef>
+          <a:fontRef idx="minor">
+            <a:schemeClr val="lt1"/>
+          </a:fontRef>
+        </p:style>
+        <p:txBody>
+          <a:bodyPr rtlCol="0" anchor="ctr"/>
+          <a:lstStyle/>
+          <a:p>
+            <a:pPr algn="ctr"/>
+          </a:p>
+        </p:txBody>
+      </p:sp>
+      <p:sp>
+        <p:nvSpPr>
+          <p:cNvPr id="24" name="TextBox 23"/>
+          <p:cNvSpPr txBox="1"/>
+          <p:nvPr/>
+        </p:nvSpPr>
+        <p:spPr>
+          <a:xfrm>
+            <a:off x="457200" y="3749040"/>
+            <a:ext cx="1645920" cy="603504"/>
+          </a:xfrm>
+          <a:prstGeom prst="rect">
+            <a:avLst/>
+          </a:prstGeom>
+          <a:noFill/>
+        </p:spPr>
+        <p:txBody>
+          <a:bodyPr wrap="square">
+            <a:spAutoFit/>
+          </a:bodyPr>
+          <a:lstStyle/>
+          <a:p>
+            <a:pPr algn="ctr">
+              <a:spcAft>
+                <a:spcPts val="400"/>
+              </a:spcAft>
+            </a:pPr>
+            <a:r>
+              <a:rPr sz="1300" b="1">
+                <a:solidFill>
+                  <a:srgbClr val="FFFFFF"/>
+                </a:solidFill>
+                <a:latin typeface="微软雅黑"/>
+              </a:rPr>
+              <a:t>HTTP 验收</a:t>
+            </a:r>
+          </a:p>
+        </p:txBody>
+      </p:sp>
+      <p:sp>
+        <p:nvSpPr>
+          <p:cNvPr id="25" name="Rounded Rectangle 24"/>
+          <p:cNvSpPr/>
+          <p:nvPr/>
+        </p:nvSpPr>
+        <p:spPr>
+          <a:xfrm>
+            <a:off x="2194560" y="3675888"/>
+            <a:ext cx="1783080" cy="749808"/>
+          </a:xfrm>
+          <a:prstGeom prst="roundRect">
+            <a:avLst/>
+          </a:prstGeom>
+          <a:solidFill>
+            <a:srgbClr val="DCE6F1"/>
+          </a:solidFill>
+          <a:ln>
+            <a:noFill/>
+          </a:ln>
+          <a:effectLst/>
+        </p:spPr>
+        <p:style>
+          <a:lnRef idx="1">
+            <a:schemeClr val="accent1"/>
+          </a:lnRef>
+          <a:fillRef idx="3">
+            <a:schemeClr val="accent1"/>
+          </a:fillRef>
+          <a:effectRef idx="2">
+            <a:schemeClr val="accent1"/>
+          </a:effectRef>
+          <a:fontRef idx="minor">
+            <a:schemeClr val="lt1"/>
+          </a:fontRef>
+        </p:style>
+        <p:txBody>
+          <a:bodyPr rtlCol="0" anchor="ctr"/>
+          <a:lstStyle/>
+          <a:p>
+            <a:pPr algn="ctr"/>
+          </a:p>
+        </p:txBody>
+      </p:sp>
+      <p:sp>
+        <p:nvSpPr>
+          <p:cNvPr id="26" name="TextBox 25"/>
+          <p:cNvSpPr txBox="1"/>
+          <p:nvPr/>
+        </p:nvSpPr>
+        <p:spPr>
+          <a:xfrm>
+            <a:off x="2286000" y="3822192"/>
+            <a:ext cx="1645920" cy="502920"/>
+          </a:xfrm>
+          <a:prstGeom prst="rect">
+            <a:avLst/>
+          </a:prstGeom>
+          <a:noFill/>
+        </p:spPr>
+        <p:txBody>
+          <a:bodyPr wrap="square">
+            <a:spAutoFit/>
+          </a:bodyPr>
+          <a:lstStyle/>
+          <a:p>
+            <a:pPr algn="ctr">
+              <a:spcAft>
+                <a:spcPts val="400"/>
+              </a:spcAft>
+            </a:pPr>
+            <a:r>
+              <a:rPr sz="1150" b="1">
+                <a:solidFill>
+                  <a:srgbClr val="1F4E79"/>
+                </a:solidFill>
+                <a:latin typeface="微软雅黑"/>
+              </a:rPr>
+              <a:t>60 例全场景</a:t>
+            </a:r>
+          </a:p>
+        </p:txBody>
+      </p:sp>
+      <p:sp>
+        <p:nvSpPr>
+          <p:cNvPr id="27" name="Rounded Rectangle 26"/>
+          <p:cNvSpPr/>
+          <p:nvPr/>
+        </p:nvSpPr>
+        <p:spPr>
+          <a:xfrm>
+            <a:off x="4023360" y="3675888"/>
+            <a:ext cx="7772400" cy="749808"/>
+          </a:xfrm>
+          <a:prstGeom prst="roundRect">
+            <a:avLst/>
+          </a:prstGeom>
+          <a:solidFill>
+            <a:srgbClr val="DCE6F1"/>
+          </a:solidFill>
+          <a:ln>
+            <a:noFill/>
+          </a:ln>
+          <a:effectLst/>
+        </p:spPr>
+        <p:style>
+          <a:lnRef idx="1">
+            <a:schemeClr val="accent1"/>
+          </a:lnRef>
+          <a:fillRef idx="3">
+            <a:schemeClr val="accent1"/>
+          </a:fillRef>
+          <a:effectRef idx="2">
+            <a:schemeClr val="accent1"/>
+          </a:effectRef>
+          <a:fontRef idx="minor">
+            <a:schemeClr val="lt1"/>
+          </a:fontRef>
+        </p:style>
+        <p:txBody>
+          <a:bodyPr rtlCol="0" anchor="ctr"/>
+          <a:lstStyle/>
+          <a:p>
+            <a:pPr algn="ctr"/>
+          </a:p>
+        </p:txBody>
+      </p:sp>
+      <p:sp>
+        <p:nvSpPr>
+          <p:cNvPr id="28" name="TextBox 27"/>
+          <p:cNvSpPr txBox="1"/>
+          <p:nvPr/>
+        </p:nvSpPr>
+        <p:spPr>
+          <a:xfrm>
+            <a:off x="4206240" y="3822192"/>
+            <a:ext cx="7452360" cy="502920"/>
+          </a:xfrm>
+          <a:prstGeom prst="rect">
+            <a:avLst/>
+          </a:prstGeom>
+          <a:noFill/>
+        </p:spPr>
+        <p:txBody>
+          <a:bodyPr wrap="square">
+            <a:spAutoFit/>
+          </a:bodyPr>
+          <a:lstStyle/>
+          <a:p>
+            <a:pPr algn="l">
+              <a:spcAft>
+                <a:spcPts val="400"/>
+              </a:spcAft>
+            </a:pPr>
+            <a:r>
+              <a:rPr sz="1250" b="0">
+                <a:solidFill>
+                  <a:srgbClr val="333333"/>
+                </a:solidFill>
+                <a:latin typeface="微软雅黑"/>
+              </a:rPr>
+              <a:t>60/60 通过 · 链路可用性 100% · GATE-01 持续拒答</a:t>
+            </a:r>
+          </a:p>
+        </p:txBody>
+      </p:sp>
+      <p:sp>
+        <p:nvSpPr>
+          <p:cNvPr id="29" name="Rounded Rectangle 28"/>
+          <p:cNvSpPr/>
+          <p:nvPr/>
+        </p:nvSpPr>
+        <p:spPr>
+          <a:xfrm>
+            <a:off x="411480" y="4535424"/>
+            <a:ext cx="1737360" cy="749808"/>
+          </a:xfrm>
+          <a:prstGeom prst="roundRect">
+            <a:avLst/>
+          </a:prstGeom>
+          <a:solidFill>
+            <a:srgbClr val="BF8F00"/>
+          </a:solidFill>
+          <a:ln>
+            <a:noFill/>
+          </a:ln>
+          <a:effectLst/>
+        </p:spPr>
+        <p:style>
+          <a:lnRef idx="1">
+            <a:schemeClr val="accent1"/>
+          </a:lnRef>
+          <a:fillRef idx="3">
+            <a:schemeClr val="accent1"/>
+          </a:fillRef>
+          <a:effectRef idx="2">
+            <a:schemeClr val="accent1"/>
+          </a:effectRef>
+          <a:fontRef idx="minor">
+            <a:schemeClr val="lt1"/>
+          </a:fontRef>
+        </p:style>
+        <p:txBody>
+          <a:bodyPr rtlCol="0" anchor="ctr"/>
+          <a:lstStyle/>
+          <a:p>
+            <a:pPr algn="ctr"/>
+          </a:p>
+        </p:txBody>
+      </p:sp>
+      <p:sp>
+        <p:nvSpPr>
+          <p:cNvPr id="30" name="TextBox 29"/>
+          <p:cNvSpPr txBox="1"/>
+          <p:nvPr/>
+        </p:nvSpPr>
+        <p:spPr>
+          <a:xfrm>
+            <a:off x="457200" y="4608576"/>
+            <a:ext cx="1645920" cy="603504"/>
+          </a:xfrm>
+          <a:prstGeom prst="rect">
+            <a:avLst/>
+          </a:prstGeom>
+          <a:noFill/>
+        </p:spPr>
+        <p:txBody>
+          <a:bodyPr wrap="square">
+            <a:spAutoFit/>
+          </a:bodyPr>
+          <a:lstStyle/>
+          <a:p>
+            <a:pPr algn="ctr">
+              <a:spcAft>
+                <a:spcPts val="400"/>
+              </a:spcAft>
+            </a:pPr>
+            <a:r>
+              <a:rPr sz="1300" b="1">
+                <a:solidFill>
+                  <a:srgbClr val="FFFFFF"/>
+                </a:solidFill>
+                <a:latin typeface="微软雅黑"/>
+              </a:rPr>
+              <a:t>硬闸门</a:t>
+            </a:r>
+          </a:p>
+        </p:txBody>
+      </p:sp>
+      <p:sp>
+        <p:nvSpPr>
+          <p:cNvPr id="31" name="Rounded Rectangle 30"/>
+          <p:cNvSpPr/>
+          <p:nvPr/>
+        </p:nvSpPr>
+        <p:spPr>
+          <a:xfrm>
+            <a:off x="2194560" y="4535424"/>
+            <a:ext cx="1783080" cy="749808"/>
+          </a:xfrm>
+          <a:prstGeom prst="roundRect">
+            <a:avLst/>
+          </a:prstGeom>
+          <a:solidFill>
+            <a:srgbClr val="DCE6F1"/>
+          </a:solidFill>
+          <a:ln>
+            <a:noFill/>
+          </a:ln>
+          <a:effectLst/>
+        </p:spPr>
+        <p:style>
+          <a:lnRef idx="1">
+            <a:schemeClr val="accent1"/>
+          </a:lnRef>
+          <a:fillRef idx="3">
+            <a:schemeClr val="accent1"/>
+          </a:fillRef>
+          <a:effectRef idx="2">
+            <a:schemeClr val="accent1"/>
+          </a:effectRef>
+          <a:fontRef idx="minor">
+            <a:schemeClr val="lt1"/>
+          </a:fontRef>
+        </p:style>
+        <p:txBody>
+          <a:bodyPr rtlCol="0" anchor="ctr"/>
+          <a:lstStyle/>
+          <a:p>
+            <a:pPr algn="ctr"/>
+          </a:p>
+        </p:txBody>
+      </p:sp>
+      <p:sp>
+        <p:nvSpPr>
+          <p:cNvPr id="32" name="TextBox 31"/>
+          <p:cNvSpPr txBox="1"/>
+          <p:nvPr/>
+        </p:nvSpPr>
+        <p:spPr>
+          <a:xfrm>
+            <a:off x="2286000" y="4681728"/>
+            <a:ext cx="1645920" cy="502920"/>
+          </a:xfrm>
+          <a:prstGeom prst="rect">
+            <a:avLst/>
+          </a:prstGeom>
+          <a:noFill/>
+        </p:spPr>
+        <p:txBody>
+          <a:bodyPr wrap="square">
+            <a:spAutoFit/>
+          </a:bodyPr>
+          <a:lstStyle/>
+          <a:p>
+            <a:pPr algn="ctr">
+              <a:spcAft>
+                <a:spcPts val="400"/>
+              </a:spcAft>
+            </a:pPr>
+            <a:r>
+              <a:rPr sz="1150" b="1">
+                <a:solidFill>
+                  <a:srgbClr val="1F4E79"/>
+                </a:solidFill>
+                <a:latin typeface="微软雅黑"/>
+              </a:rPr>
+              <a:t>54 项断言</a:t>
+            </a:r>
+          </a:p>
+        </p:txBody>
+      </p:sp>
+      <p:sp>
+        <p:nvSpPr>
+          <p:cNvPr id="33" name="Rounded Rectangle 32"/>
+          <p:cNvSpPr/>
+          <p:nvPr/>
+        </p:nvSpPr>
+        <p:spPr>
+          <a:xfrm>
+            <a:off x="4023360" y="4535424"/>
+            <a:ext cx="7772400" cy="749808"/>
+          </a:xfrm>
+          <a:prstGeom prst="roundRect">
+            <a:avLst/>
+          </a:prstGeom>
+          <a:solidFill>
+            <a:srgbClr val="DCE6F1"/>
+          </a:solidFill>
+          <a:ln>
+            <a:noFill/>
+          </a:ln>
+          <a:effectLst/>
+        </p:spPr>
+        <p:style>
+          <a:lnRef idx="1">
+            <a:schemeClr val="accent1"/>
+          </a:lnRef>
+          <a:fillRef idx="3">
+            <a:schemeClr val="accent1"/>
+          </a:fillRef>
+          <a:effectRef idx="2">
+            <a:schemeClr val="accent1"/>
+          </a:effectRef>
+          <a:fontRef idx="minor">
+            <a:schemeClr val="lt1"/>
+          </a:fontRef>
+        </p:style>
+        <p:txBody>
+          <a:bodyPr rtlCol="0" anchor="ctr"/>
+          <a:lstStyle/>
+          <a:p>
+            <a:pPr algn="ctr"/>
+          </a:p>
+        </p:txBody>
+      </p:sp>
+      <p:sp>
+        <p:nvSpPr>
+          <p:cNvPr id="34" name="TextBox 33"/>
+          <p:cNvSpPr txBox="1"/>
+          <p:nvPr/>
+        </p:nvSpPr>
+        <p:spPr>
+          <a:xfrm>
+            <a:off x="4206240" y="4681728"/>
+            <a:ext cx="7452360" cy="502920"/>
+          </a:xfrm>
+          <a:prstGeom prst="rect">
+            <a:avLst/>
+          </a:prstGeom>
+          <a:noFill/>
+        </p:spPr>
+        <p:txBody>
+          <a:bodyPr wrap="square">
+            <a:spAutoFit/>
+          </a:bodyPr>
+          <a:lstStyle/>
+          <a:p>
+            <a:pPr algn="l">
+              <a:spcAft>
+                <a:spcPts val="400"/>
+              </a:spcAft>
+            </a:pPr>
+            <a:r>
+              <a:rPr sz="1250" b="0">
+                <a:solidFill>
+                  <a:srgbClr val="333333"/>
+                </a:solidFill>
+                <a:latin typeface="微软雅黑"/>
+              </a:rPr>
+              <a:t>无引用不生成 · 低分噪声拦截 · 特征词覆盖校验</a:t>
+            </a:r>
+          </a:p>
+        </p:txBody>
+      </p:sp>
+      <p:sp>
+        <p:nvSpPr>
+          <p:cNvPr id="35" name="Rounded Rectangle 34"/>
+          <p:cNvSpPr/>
+          <p:nvPr/>
+        </p:nvSpPr>
+        <p:spPr>
+          <a:xfrm>
+            <a:off x="411480" y="5394960"/>
+            <a:ext cx="1737360" cy="749808"/>
+          </a:xfrm>
+          <a:prstGeom prst="roundRect">
+            <a:avLst/>
+          </a:prstGeom>
+          <a:solidFill>
+            <a:srgbClr val="595959"/>
+          </a:solidFill>
+          <a:ln>
+            <a:noFill/>
+          </a:ln>
+          <a:effectLst/>
+        </p:spPr>
+        <p:style>
+          <a:lnRef idx="1">
+            <a:schemeClr val="accent1"/>
+          </a:lnRef>
+          <a:fillRef idx="3">
+            <a:schemeClr val="accent1"/>
+          </a:fillRef>
+          <a:effectRef idx="2">
+            <a:schemeClr val="accent1"/>
+          </a:effectRef>
+          <a:fontRef idx="minor">
+            <a:schemeClr val="lt1"/>
+          </a:fontRef>
+        </p:style>
+        <p:txBody>
+          <a:bodyPr rtlCol="0" anchor="ctr"/>
+          <a:lstStyle/>
+          <a:p>
+            <a:pPr algn="ctr"/>
+          </a:p>
+        </p:txBody>
+      </p:sp>
+      <p:sp>
+        <p:nvSpPr>
+          <p:cNvPr id="36" name="TextBox 35"/>
+          <p:cNvSpPr txBox="1"/>
+          <p:nvPr/>
+        </p:nvSpPr>
+        <p:spPr>
+          <a:xfrm>
+            <a:off x="457200" y="5468112"/>
+            <a:ext cx="1645920" cy="603504"/>
+          </a:xfrm>
+          <a:prstGeom prst="rect">
+            <a:avLst/>
+          </a:prstGeom>
+          <a:noFill/>
+        </p:spPr>
+        <p:txBody>
+          <a:bodyPr wrap="square">
+            <a:spAutoFit/>
+          </a:bodyPr>
+          <a:lstStyle/>
+          <a:p>
+            <a:pPr algn="ctr">
+              <a:spcAft>
+                <a:spcPts val="400"/>
+              </a:spcAft>
+            </a:pPr>
+            <a:r>
+              <a:rPr sz="1300" b="1">
+                <a:solidFill>
+                  <a:srgbClr val="FFFFFF"/>
+                </a:solidFill>
+                <a:latin typeface="微软雅黑"/>
+              </a:rPr>
+              <a:t>审计与安全</a:t>
+            </a:r>
+          </a:p>
+        </p:txBody>
+      </p:sp>
+      <p:sp>
+        <p:nvSpPr>
+          <p:cNvPr id="37" name="Rounded Rectangle 36"/>
+          <p:cNvSpPr/>
+          <p:nvPr/>
+        </p:nvSpPr>
+        <p:spPr>
+          <a:xfrm>
+            <a:off x="2194560" y="5394960"/>
+            <a:ext cx="1783080" cy="749808"/>
+          </a:xfrm>
+          <a:prstGeom prst="roundRect">
+            <a:avLst/>
+          </a:prstGeom>
+          <a:solidFill>
+            <a:srgbClr val="DCE6F1"/>
+          </a:solidFill>
+          <a:ln>
+            <a:noFill/>
+          </a:ln>
+          <a:effectLst/>
+        </p:spPr>
+        <p:style>
+          <a:lnRef idx="1">
+            <a:schemeClr val="accent1"/>
+          </a:lnRef>
+          <a:fillRef idx="3">
+            <a:schemeClr val="accent1"/>
+          </a:fillRef>
+          <a:effectRef idx="2">
+            <a:schemeClr val="accent1"/>
+          </a:effectRef>
+          <a:fontRef idx="minor">
+            <a:schemeClr val="lt1"/>
+          </a:fontRef>
+        </p:style>
+        <p:txBody>
+          <a:bodyPr rtlCol="0" anchor="ctr"/>
+          <a:lstStyle/>
+          <a:p>
+            <a:pPr algn="ctr"/>
+          </a:p>
+        </p:txBody>
+      </p:sp>
+      <p:sp>
+        <p:nvSpPr>
+          <p:cNvPr id="38" name="TextBox 37"/>
+          <p:cNvSpPr txBox="1"/>
+          <p:nvPr/>
+        </p:nvSpPr>
+        <p:spPr>
+          <a:xfrm>
+            <a:off x="2286000" y="5541264"/>
+            <a:ext cx="1645920" cy="502920"/>
+          </a:xfrm>
+          <a:prstGeom prst="rect">
+            <a:avLst/>
+          </a:prstGeom>
+          <a:noFill/>
+        </p:spPr>
+        <p:txBody>
+          <a:bodyPr wrap="square">
+            <a:spAutoFit/>
+          </a:bodyPr>
+          <a:lstStyle/>
+          <a:p>
+            <a:pPr algn="ctr">
+              <a:spcAft>
+                <a:spcPts val="400"/>
+              </a:spcAft>
+            </a:pPr>
+            <a:r>
+              <a:rPr sz="1150" b="1">
+                <a:solidFill>
+                  <a:srgbClr val="1F4E79"/>
+                </a:solidFill>
+                <a:latin typeface="微软雅黑"/>
+              </a:rPr>
+              <a:t>audit_logs</a:t>
+            </a:r>
+          </a:p>
+        </p:txBody>
+      </p:sp>
+      <p:sp>
+        <p:nvSpPr>
+          <p:cNvPr id="39" name="Rounded Rectangle 38"/>
+          <p:cNvSpPr/>
+          <p:nvPr/>
+        </p:nvSpPr>
+        <p:spPr>
+          <a:xfrm>
+            <a:off x="4023360" y="5394960"/>
+            <a:ext cx="7772400" cy="749808"/>
+          </a:xfrm>
+          <a:prstGeom prst="roundRect">
+            <a:avLst/>
+          </a:prstGeom>
+          <a:solidFill>
+            <a:srgbClr val="DCE6F1"/>
+          </a:solidFill>
+          <a:ln>
+            <a:noFill/>
+          </a:ln>
+          <a:effectLst/>
+        </p:spPr>
+        <p:style>
+          <a:lnRef idx="1">
+            <a:schemeClr val="accent1"/>
+          </a:lnRef>
+          <a:fillRef idx="3">
+            <a:schemeClr val="accent1"/>
+          </a:fillRef>
+          <a:effectRef idx="2">
+            <a:schemeClr val="accent1"/>
+          </a:effectRef>
+          <a:fontRef idx="minor">
+            <a:schemeClr val="lt1"/>
+          </a:fontRef>
+        </p:style>
+        <p:txBody>
+          <a:bodyPr rtlCol="0" anchor="ctr"/>
+          <a:lstStyle/>
+          <a:p>
+            <a:pPr algn="ctr"/>
+          </a:p>
+        </p:txBody>
+      </p:sp>
+      <p:sp>
+        <p:nvSpPr>
+          <p:cNvPr id="40" name="TextBox 39"/>
+          <p:cNvSpPr txBox="1"/>
+          <p:nvPr/>
+        </p:nvSpPr>
+        <p:spPr>
+          <a:xfrm>
+            <a:off x="4206240" y="5541264"/>
+            <a:ext cx="7452360" cy="502920"/>
+          </a:xfrm>
+          <a:prstGeom prst="rect">
+            <a:avLst/>
+          </a:prstGeom>
+          <a:noFill/>
+        </p:spPr>
+        <p:txBody>
+          <a:bodyPr wrap="square">
+            <a:spAutoFit/>
+          </a:bodyPr>
+          <a:lstStyle/>
+          <a:p>
+            <a:pPr algn="l">
+              <a:spcAft>
+                <a:spcPts val="400"/>
+              </a:spcAft>
+            </a:pPr>
+            <a:r>
+              <a:rPr sz="1250" b="0">
+                <a:solidFill>
+                  <a:srgbClr val="333333"/>
+                </a:solidFill>
+                <a:latin typeface="微软雅黑"/>
+              </a:rPr>
+              <a:t>敏感操作 + 问答交互双审计 · JWT/RBAC 三角色 · Fernet 字段加密</a:t>
+            </a:r>
+          </a:p>
+        </p:txBody>
+      </p:sp>
+      <p:sp>
+        <p:nvSpPr>
+          <p:cNvPr id="41" name="TextBox 40"/>
+          <p:cNvSpPr txBox="1"/>
+          <p:nvPr/>
+        </p:nvSpPr>
+        <p:spPr>
+          <a:xfrm>
+            <a:off x="411480" y="6355080"/>
+            <a:ext cx="11338560" cy="365760"/>
+          </a:xfrm>
+          <a:prstGeom prst="rect">
+            <a:avLst/>
+          </a:prstGeom>
+          <a:noFill/>
+        </p:spPr>
+        <p:txBody>
+          <a:bodyPr wrap="square">
+            <a:spAutoFit/>
+          </a:bodyPr>
+          <a:lstStyle/>
+          <a:p>
+            <a:pPr algn="l">
+              <a:spcAft>
+                <a:spcPts val="400"/>
+              </a:spcAft>
+            </a:pPr>
+            <a:r>
+              <a:rPr sz="1200" b="1">
+                <a:solidFill>
+                  <a:srgbClr val="31859C"/>
+                </a:solidFill>
+                <a:latin typeface="微软雅黑"/>
+              </a:rPr>
+              <a:t>原则: 检索与生成分离评测 · 固定语料固定题集 · 指标可复现可追溯 · 全部离线毫秒级可回归</a:t>
+            </a:r>
+          </a:p>
+        </p:txBody>
+      </p:sp>
+    </p:spTree>
+  </p:cSld>
+  <p:clrMapOvr>
+    <a:masterClrMapping/>
+  </p:clrMapOvr>
+</p:sld>
+</file>
+
+<file path=ppt/slides/slide15.xml><?xml version="1.0" encoding="utf-8"?>
+<p:sld xmlns:a="http://schemas.openxmlformats.org/drawingml/2006/main" xmlns:p="http://schemas.openxmlformats.org/presentationml/2006/main" xmlns:r="http://schemas.openxmlformats.org/officeDocument/2006/relationships">
+  <p:cSld>
+    <p:spTree>
+      <p:nvGrpSpPr>
+        <p:cNvPr id="1" name=""/>
+        <p:cNvGrpSpPr/>
+        <p:nvPr/>
+      </p:nvGrpSpPr>
+      <p:grpSpPr/>
+      <p:sp>
+        <p:nvSpPr>
+          <p:cNvPr id="2" name="Rectangle 1"/>
+          <p:cNvSpPr/>
+          <p:nvPr/>
+        </p:nvSpPr>
+        <p:spPr>
+          <a:xfrm>
+            <a:off x="0" y="0"/>
+            <a:ext cx="12191695" cy="822960"/>
+          </a:xfrm>
+          <a:prstGeom prst="rect">
+            <a:avLst/>
+          </a:prstGeom>
+          <a:solidFill>
+            <a:srgbClr val="1F4E79"/>
+          </a:solidFill>
+          <a:ln>
+            <a:noFill/>
+          </a:ln>
+          <a:effectLst/>
+        </p:spPr>
+        <p:style>
+          <a:lnRef idx="1">
+            <a:schemeClr val="accent1"/>
+          </a:lnRef>
+          <a:fillRef idx="3">
+            <a:schemeClr val="accent1"/>
+          </a:fillRef>
+          <a:effectRef idx="2">
+            <a:schemeClr val="accent1"/>
+          </a:effectRef>
+          <a:fontRef idx="minor">
+            <a:schemeClr val="lt1"/>
+          </a:fontRef>
+        </p:style>
+        <p:txBody>
+          <a:bodyPr rtlCol="0" anchor="ctr"/>
+          <a:lstStyle/>
+          <a:p>
+            <a:pPr algn="ctr"/>
+          </a:p>
+        </p:txBody>
+      </p:sp>
+      <p:sp>
+        <p:nvSpPr>
+          <p:cNvPr id="3" name="TextBox 2"/>
+          <p:cNvSpPr txBox="1"/>
+          <p:nvPr/>
+        </p:nvSpPr>
+        <p:spPr>
+          <a:xfrm>
+            <a:off x="457200" y="109728"/>
+            <a:ext cx="11247120" cy="603504"/>
+          </a:xfrm>
+          <a:prstGeom prst="rect">
+            <a:avLst/>
+          </a:prstGeom>
+          <a:noFill/>
+        </p:spPr>
+        <p:txBody>
+          <a:bodyPr wrap="square">
+            <a:spAutoFit/>
+          </a:bodyPr>
+          <a:lstStyle/>
+          <a:p>
+            <a:pPr algn="l">
+              <a:spcAft>
+                <a:spcPts val="400"/>
+              </a:spcAft>
+            </a:pPr>
+            <a:r>
+              <a:rPr sz="2400" b="1">
+                <a:solidFill>
+                  <a:srgbClr val="FFFFFF"/>
+                </a:solidFill>
+                <a:latin typeface="微软雅黑"/>
+              </a:rPr>
+              <a:t>十三、本地部署 — 两种方式一键启动</a:t>
+            </a:r>
+          </a:p>
+        </p:txBody>
+      </p:sp>
+      <p:sp>
+        <p:nvSpPr>
+          <p:cNvPr id="4" name="Rectangle 3"/>
+          <p:cNvSpPr/>
+          <p:nvPr/>
+        </p:nvSpPr>
+        <p:spPr>
+          <a:xfrm>
+            <a:off x="0" y="822960"/>
+            <a:ext cx="12191695" cy="38100"/>
+          </a:xfrm>
+          <a:prstGeom prst="rect">
+            <a:avLst/>
+          </a:prstGeom>
+          <a:solidFill>
+            <a:srgbClr val="BF8F00"/>
+          </a:solidFill>
+          <a:ln>
+            <a:noFill/>
+          </a:ln>
+          <a:effectLst/>
+        </p:spPr>
+        <p:style>
+          <a:lnRef idx="1">
+            <a:schemeClr val="accent1"/>
+          </a:lnRef>
+          <a:fillRef idx="3">
+            <a:schemeClr val="accent1"/>
+          </a:fillRef>
+          <a:effectRef idx="2">
+            <a:schemeClr val="accent1"/>
+          </a:effectRef>
+          <a:fontRef idx="minor">
+            <a:schemeClr val="lt1"/>
+          </a:fontRef>
+        </p:style>
+        <p:txBody>
+          <a:bodyPr rtlCol="0" anchor="ctr"/>
+          <a:lstStyle/>
+          <a:p>
+            <a:pPr algn="ctr"/>
+          </a:p>
+        </p:txBody>
+      </p:sp>
+      <p:sp>
+        <p:nvSpPr>
+          <p:cNvPr id="5" name="Rounded Rectangle 4"/>
+          <p:cNvSpPr/>
+          <p:nvPr/>
+        </p:nvSpPr>
+        <p:spPr>
+          <a:xfrm>
+            <a:off x="365760" y="1097280"/>
+            <a:ext cx="5577840" cy="4480560"/>
+          </a:xfrm>
+          <a:prstGeom prst="roundRect">
+            <a:avLst/>
+          </a:prstGeom>
+          <a:solidFill>
+            <a:srgbClr val="DCE6F1"/>
+          </a:solidFill>
+          <a:ln>
+            <a:noFill/>
+          </a:ln>
+          <a:effectLst/>
+        </p:spPr>
+        <p:style>
+          <a:lnRef idx="1">
+            <a:schemeClr val="accent1"/>
+          </a:lnRef>
+          <a:fillRef idx="3">
+            <a:schemeClr val="accent1"/>
+          </a:fillRef>
+          <a:effectRef idx="2">
+            <a:schemeClr val="accent1"/>
+          </a:effectRef>
+          <a:fontRef idx="minor">
+            <a:schemeClr val="lt1"/>
+          </a:fontRef>
+        </p:style>
+        <p:txBody>
+          <a:bodyPr rtlCol="0" anchor="ctr"/>
+          <a:lstStyle/>
+          <a:p>
+            <a:pPr algn="ctr"/>
+          </a:p>
+        </p:txBody>
+      </p:sp>
+      <p:sp>
+        <p:nvSpPr>
+          <p:cNvPr id="6" name="TextBox 5"/>
+          <p:cNvSpPr txBox="1"/>
+          <p:nvPr/>
+        </p:nvSpPr>
+        <p:spPr>
+          <a:xfrm>
+            <a:off x="594360" y="1280160"/>
+            <a:ext cx="5120640" cy="411480"/>
+          </a:xfrm>
+          <a:prstGeom prst="rect">
+            <a:avLst/>
+          </a:prstGeom>
+          <a:noFill/>
+        </p:spPr>
+        <p:txBody>
+          <a:bodyPr wrap="square">
+            <a:spAutoFit/>
+          </a:bodyPr>
+          <a:lstStyle/>
+          <a:p>
+            <a:pPr algn="l">
+              <a:spcAft>
+                <a:spcPts val="400"/>
+              </a:spcAft>
+            </a:pPr>
+            <a:r>
+              <a:rPr sz="1600" b="1">
+                <a:solidFill>
+                  <a:srgbClr val="1F4E79"/>
+                </a:solidFill>
+                <a:latin typeface="微软雅黑"/>
+              </a:rPr>
+              <a:t>方式 A: 原生部署 (开发常用)</a:t>
+            </a:r>
+          </a:p>
+        </p:txBody>
+      </p:sp>
+      <p:sp>
+        <p:nvSpPr>
+          <p:cNvPr id="7" name="TextBox 6"/>
+          <p:cNvSpPr txBox="1"/>
+          <p:nvPr/>
+        </p:nvSpPr>
+        <p:spPr>
+          <a:xfrm>
+            <a:off x="594360" y="1783080"/>
+            <a:ext cx="5120640" cy="3657600"/>
+          </a:xfrm>
+          <a:prstGeom prst="rect">
+            <a:avLst/>
+          </a:prstGeom>
+          <a:noFill/>
+        </p:spPr>
+        <p:txBody>
+          <a:bodyPr wrap="square">
+            <a:spAutoFit/>
+          </a:bodyPr>
+          <a:lstStyle/>
+          <a:p>
+            <a:pPr algn="l">
+              <a:spcAft>
+                <a:spcPts val="400"/>
+              </a:spcAft>
+            </a:pPr>
+            <a:r>
+              <a:rPr sz="1400" b="0">
+                <a:solidFill>
+                  <a:srgbClr val="595959"/>
+                </a:solidFill>
+                <a:latin typeface="微软雅黑"/>
+              </a:rPr>
+              <a:t>1. uv sync — 建 .venv 装依赖</a:t>
+            </a:r>
+          </a:p>
+          <a:p>
+            <a:pPr algn="l">
+              <a:spcAft>
+                <a:spcPts val="400"/>
+              </a:spcAft>
+            </a:pPr>
+            <a:r>
+              <a:rPr sz="1400" b="0">
+                <a:solidFill>
+                  <a:srgbClr val="595959"/>
+                </a:solidFill>
+                <a:latin typeface="微软雅黑"/>
+              </a:rPr>
+              <a:t>2. 配置 .env — API Key / Qdrant / 加密密钥</a:t>
+            </a:r>
+          </a:p>
+          <a:p>
+            <a:pPr algn="l">
+              <a:spcAft>
+                <a:spcPts val="400"/>
+              </a:spcAft>
+            </a:pPr>
+            <a:r>
+              <a:rPr sz="1400" b="0">
+                <a:solidFill>
+                  <a:srgbClr val="595959"/>
+                </a:solidFill>
+                <a:latin typeface="微软雅黑"/>
+              </a:rPr>
+              <a:t>3. python main.py ingest — Excel 灌知识库</a:t>
+            </a:r>
+          </a:p>
+          <a:p>
+            <a:pPr algn="l">
+              <a:spcAft>
+                <a:spcPts val="400"/>
+              </a:spcAft>
+            </a:pPr>
+            <a:r>
+              <a:rPr sz="1400" b="0">
+                <a:solidFill>
+                  <a:srgbClr val="595959"/>
+                </a:solidFill>
+                <a:latin typeface="微软雅黑"/>
+              </a:rPr>
+              <a:t>4. 种子脚本 — PG 历史中标 30 条</a:t>
+            </a:r>
+          </a:p>
+          <a:p>
+            <a:pPr algn="l">
+              <a:spcAft>
+                <a:spcPts val="400"/>
+              </a:spcAft>
+            </a:pPr>
+            <a:r>
+              <a:rPr sz="1400" b="0">
+                <a:solidFill>
+                  <a:srgbClr val="595959"/>
+                </a:solidFill>
+                <a:latin typeface="微软雅黑"/>
+              </a:rPr>
+              <a:t>5. start.bat — 自动拉起前后端两个窗口</a:t>
+            </a:r>
+          </a:p>
+          <a:p>
+            <a:pPr algn="l">
+              <a:spcAft>
+                <a:spcPts val="400"/>
+              </a:spcAft>
+            </a:pPr>
+            <a:r>
+              <a:rPr sz="1400" b="0">
+                <a:solidFill>
+                  <a:srgbClr val="595959"/>
+                </a:solidFill>
+                <a:latin typeface="微软雅黑"/>
+              </a:rPr>
+              <a:t/>
+            </a:r>
+          </a:p>
+          <a:p>
+            <a:pPr algn="l">
+              <a:spcAft>
+                <a:spcPts val="400"/>
+              </a:spcAft>
+            </a:pPr>
+            <a:r>
+              <a:rPr sz="1400" b="1">
+                <a:solidFill>
+                  <a:srgbClr val="595959"/>
+                </a:solidFill>
+                <a:latin typeface="微软雅黑"/>
+              </a:rPr>
+              <a:t>前端 :3000 · 后端 :8001 · /docs 在线文档</a:t>
+            </a:r>
+          </a:p>
+          <a:p>
+            <a:pPr algn="l">
+              <a:spcAft>
+                <a:spcPts val="400"/>
+              </a:spcAft>
+            </a:pPr>
+            <a:r>
+              <a:rPr sz="1400" b="0">
+                <a:solidFill>
+                  <a:srgbClr val="595959"/>
+                </a:solidFill>
+                <a:latin typeface="微软雅黑"/>
+              </a:rPr>
+              <a:t>stop.bat 四级兜底停止 (标题/端口/进程树/进程名)</a:t>
+            </a:r>
+          </a:p>
+        </p:txBody>
+      </p:sp>
+      <p:sp>
+        <p:nvSpPr>
+          <p:cNvPr id="8" name="Rounded Rectangle 7"/>
+          <p:cNvSpPr/>
+          <p:nvPr/>
+        </p:nvSpPr>
+        <p:spPr>
+          <a:xfrm>
+            <a:off x="6217920" y="1097280"/>
+            <a:ext cx="5577840" cy="4480560"/>
+          </a:xfrm>
+          <a:prstGeom prst="roundRect">
+            <a:avLst/>
+          </a:prstGeom>
+          <a:solidFill>
+            <a:srgbClr val="DCE6F1"/>
+          </a:solidFill>
+          <a:ln>
+            <a:noFill/>
+          </a:ln>
+          <a:effectLst/>
+        </p:spPr>
+        <p:style>
+          <a:lnRef idx="1">
+            <a:schemeClr val="accent1"/>
+          </a:lnRef>
+          <a:fillRef idx="3">
+            <a:schemeClr val="accent1"/>
+          </a:fillRef>
+          <a:effectRef idx="2">
+            <a:schemeClr val="accent1"/>
+          </a:effectRef>
+          <a:fontRef idx="minor">
+            <a:schemeClr val="lt1"/>
+          </a:fontRef>
+        </p:style>
+        <p:txBody>
+          <a:bodyPr rtlCol="0" anchor="ctr"/>
+          <a:lstStyle/>
+          <a:p>
+            <a:pPr algn="ctr"/>
+          </a:p>
+        </p:txBody>
+      </p:sp>
+      <p:sp>
+        <p:nvSpPr>
+          <p:cNvPr id="9" name="TextBox 8"/>
+          <p:cNvSpPr txBox="1"/>
+          <p:nvPr/>
+        </p:nvSpPr>
+        <p:spPr>
+          <a:xfrm>
+            <a:off x="6446520" y="1280160"/>
+            <a:ext cx="5120640" cy="411480"/>
+          </a:xfrm>
+          <a:prstGeom prst="rect">
+            <a:avLst/>
+          </a:prstGeom>
+          <a:noFill/>
+        </p:spPr>
+        <p:txBody>
+          <a:bodyPr wrap="square">
+            <a:spAutoFit/>
+          </a:bodyPr>
+          <a:lstStyle/>
+          <a:p>
+            <a:pPr algn="l">
+              <a:spcAft>
+                <a:spcPts val="400"/>
+              </a:spcAft>
+            </a:pPr>
+            <a:r>
+              <a:rPr sz="1600" b="1">
+                <a:solidFill>
+                  <a:srgbClr val="4F8A5B"/>
+                </a:solidFill>
+                <a:latin typeface="微软雅黑"/>
+              </a:rPr>
+              <a:t>方式 B: Docker Compose 全栈 (交付演示)</a:t>
+            </a:r>
+          </a:p>
+        </p:txBody>
+      </p:sp>
+      <p:sp>
+        <p:nvSpPr>
+          <p:cNvPr id="10" name="TextBox 9"/>
+          <p:cNvSpPr txBox="1"/>
+          <p:nvPr/>
+        </p:nvSpPr>
+        <p:spPr>
+          <a:xfrm>
+            <a:off x="6446520" y="1783080"/>
+            <a:ext cx="5120640" cy="3657600"/>
+          </a:xfrm>
+          <a:prstGeom prst="rect">
+            <a:avLst/>
+          </a:prstGeom>
+          <a:noFill/>
+        </p:spPr>
+        <p:txBody>
+          <a:bodyPr wrap="square">
+            <a:spAutoFit/>
+          </a:bodyPr>
+          <a:lstStyle/>
+          <a:p>
+            <a:pPr algn="l">
+              <a:spcAft>
+                <a:spcPts val="400"/>
+              </a:spcAft>
+            </a:pPr>
+            <a:r>
+              <a:rPr sz="1400" b="0">
+                <a:solidFill>
+                  <a:srgbClr val="595959"/>
+                </a:solidFill>
+                <a:latin typeface="微软雅黑"/>
+              </a:rPr>
+              <a:t>start-docker.bat 一条命令起 5 容器:</a:t>
+            </a:r>
+          </a:p>
+          <a:p>
+            <a:pPr algn="l">
+              <a:spcAft>
+                <a:spcPts val="400"/>
+              </a:spcAft>
+            </a:pPr>
+            <a:r>
+              <a:rPr sz="1400" b="0">
+                <a:solidFill>
+                  <a:srgbClr val="595959"/>
+                </a:solidFill>
+                <a:latin typeface="微软雅黑"/>
+              </a:rPr>
+              <a:t>  backend (python:3.12-slim + uv)</a:t>
+            </a:r>
+          </a:p>
+          <a:p>
+            <a:pPr algn="l">
+              <a:spcAft>
+                <a:spcPts val="400"/>
+              </a:spcAft>
+            </a:pPr>
+            <a:r>
+              <a:rPr sz="1400" b="0">
+                <a:solidFill>
+                  <a:srgbClr val="595959"/>
+                </a:solidFill>
+                <a:latin typeface="微软雅黑"/>
+              </a:rPr>
+              <a:t>  frontend (Next.js standalone 产物)</a:t>
+            </a:r>
+          </a:p>
+          <a:p>
+            <a:pPr algn="l">
+              <a:spcAft>
+                <a:spcPts val="400"/>
+              </a:spcAft>
+            </a:pPr>
+            <a:r>
+              <a:rPr sz="1400" b="0">
+                <a:solidFill>
+                  <a:srgbClr val="595959"/>
+                </a:solidFill>
+                <a:latin typeface="微软雅黑"/>
+              </a:rPr>
+              <a:t>  qdrant :6333 (volume 持久化)</a:t>
+            </a:r>
+          </a:p>
+          <a:p>
+            <a:pPr algn="l">
+              <a:spcAft>
+                <a:spcPts val="400"/>
+              </a:spcAft>
+            </a:pPr>
+            <a:r>
+              <a:rPr sz="1400" b="0">
+                <a:solidFill>
+                  <a:srgbClr val="595959"/>
+                </a:solidFill>
+                <a:latin typeface="微软雅黑"/>
+              </a:rPr>
+              <a:t>  postgres :5432 (volume 持久化)</a:t>
+            </a:r>
+          </a:p>
+          <a:p>
+            <a:pPr algn="l">
+              <a:spcAft>
+                <a:spcPts val="400"/>
+              </a:spcAft>
+            </a:pPr>
+            <a:r>
+              <a:rPr sz="1400" b="0">
+                <a:solidFill>
+                  <a:srgbClr val="595959"/>
+                </a:solidFill>
+                <a:latin typeface="微软雅黑"/>
+              </a:rPr>
+              <a:t>  neo4j :7474/7687 (volume 持久化)</a:t>
+            </a:r>
+          </a:p>
+          <a:p>
+            <a:pPr algn="l">
+              <a:spcAft>
+                <a:spcPts val="400"/>
+              </a:spcAft>
+            </a:pPr>
+            <a:r>
+              <a:rPr sz="1400" b="0">
+                <a:solidFill>
+                  <a:srgbClr val="595959"/>
+                </a:solidFill>
+                <a:latin typeface="微软雅黑"/>
+              </a:rPr>
+              <a:t/>
+            </a:r>
+          </a:p>
+          <a:p>
+            <a:pPr algn="l">
+              <a:spcAft>
+                <a:spcPts val="400"/>
+              </a:spcAft>
+            </a:pPr>
+            <a:r>
+              <a:rPr sz="1400" b="1">
+                <a:solidFill>
+                  <a:srgbClr val="595959"/>
+                </a:solidFill>
+                <a:latin typeface="微软雅黑"/>
+              </a:rPr>
+              <a:t>健康检查轮询 60s → 自动开浏览器</a:t>
+            </a:r>
+          </a:p>
+          <a:p>
+            <a:pPr algn="l">
+              <a:spcAft>
+                <a:spcPts val="400"/>
+              </a:spcAft>
+            </a:pPr>
+            <a:r>
+              <a:rPr sz="1400" b="0">
+                <a:solidFill>
+                  <a:srgbClr val="595959"/>
+                </a:solidFill>
+                <a:latin typeface="微软雅黑"/>
+              </a:rPr>
+              <a:t>容器内服务名互联, restart: unless-stopped</a:t>
+            </a:r>
+          </a:p>
+        </p:txBody>
+      </p:sp>
+      <p:sp>
+        <p:nvSpPr>
+          <p:cNvPr id="11" name="TextBox 10"/>
+          <p:cNvSpPr txBox="1"/>
+          <p:nvPr/>
+        </p:nvSpPr>
+        <p:spPr>
+          <a:xfrm>
+            <a:off x="365760" y="5852160"/>
+            <a:ext cx="11430000" cy="640080"/>
+          </a:xfrm>
+          <a:prstGeom prst="rect">
+            <a:avLst/>
+          </a:prstGeom>
+          <a:noFill/>
+        </p:spPr>
+        <p:txBody>
+          <a:bodyPr wrap="square">
+            <a:spAutoFit/>
+          </a:bodyPr>
+          <a:lstStyle/>
+          <a:p>
+            <a:pPr algn="l">
+              <a:spcAft>
+                <a:spcPts val="400"/>
+              </a:spcAft>
+            </a:pPr>
+            <a:r>
+              <a:rPr sz="1200" b="1">
+                <a:solidFill>
+                  <a:srgbClr val="1F4E79"/>
+                </a:solidFill>
+                <a:latin typeface="微软雅黑"/>
+              </a:rPr>
+              <a:t>组件清单: FastAPI API + Next.js 前端 + Qdrant 向量库 + PostgreSQL 业务库 + Neo4j 图谱 + BGE-M3/reranker 本地模型</a:t>
+            </a:r>
+          </a:p>
+          <a:p>
+            <a:pPr algn="l">
+              <a:spcAft>
+                <a:spcPts val="400"/>
+              </a:spcAft>
+            </a:pPr>
+            <a:r>
+              <a:rPr sz="1100" b="0">
+                <a:solidFill>
+                  <a:srgbClr val="595959"/>
+                </a:solidFill>
+                <a:latin typeface="微软雅黑"/>
+              </a:rPr>
+              <a:t>模型本地化: HF_HOME 重定向 D 盘, 离线可加载, 无 GPU 依赖</a:t>
+            </a:r>
+          </a:p>
+        </p:txBody>
+      </p:sp>
+    </p:spTree>
+  </p:cSld>
+  <p:clrMapOvr>
+    <a:masterClrMapping/>
+  </p:clrMapOvr>
+</p:sld>
+</file>
+
+<file path=ppt/slides/slide16.xml><?xml version="1.0" encoding="utf-8"?>
+<p:sld xmlns:a="http://schemas.openxmlformats.org/drawingml/2006/main" xmlns:p="http://schemas.openxmlformats.org/presentationml/2006/main" xmlns:r="http://schemas.openxmlformats.org/officeDocument/2006/relationships">
+  <p:cSld>
+    <p:spTree>
+      <p:nvGrpSpPr>
+        <p:cNvPr id="1" name=""/>
+        <p:cNvGrpSpPr/>
+        <p:nvPr/>
+      </p:nvGrpSpPr>
+      <p:grpSpPr/>
+      <p:sp>
+        <p:nvSpPr>
+          <p:cNvPr id="2" name="Rectangle 1"/>
+          <p:cNvSpPr/>
+          <p:nvPr/>
+        </p:nvSpPr>
+        <p:spPr>
+          <a:xfrm>
+            <a:off x="0" y="0"/>
+            <a:ext cx="12191695" cy="6858000"/>
+          </a:xfrm>
+          <a:prstGeom prst="rect">
+            <a:avLst/>
+          </a:prstGeom>
+          <a:solidFill>
+            <a:srgbClr val="1F4E79"/>
+          </a:solidFill>
+          <a:ln>
+            <a:noFill/>
+          </a:ln>
+          <a:effectLst/>
+        </p:spPr>
+        <p:style>
+          <a:lnRef idx="1">
+            <a:schemeClr val="accent1"/>
+          </a:lnRef>
+          <a:fillRef idx="3">
+            <a:schemeClr val="accent1"/>
+          </a:fillRef>
+          <a:effectRef idx="2">
+            <a:schemeClr val="accent1"/>
+          </a:effectRef>
+          <a:fontRef idx="minor">
+            <a:schemeClr val="lt1"/>
+          </a:fontRef>
+        </p:style>
+        <p:txBody>
+          <a:bodyPr rtlCol="0" anchor="ctr"/>
+          <a:lstStyle/>
+          <a:p>
+            <a:pPr algn="ctr"/>
+          </a:p>
+        </p:txBody>
+      </p:sp>
+      <p:sp>
+        <p:nvSpPr>
+          <p:cNvPr id="3" name="TextBox 2"/>
+          <p:cNvSpPr txBox="1"/>
+          <p:nvPr/>
+        </p:nvSpPr>
+        <p:spPr>
+          <a:xfrm>
+            <a:off x="914400" y="1463040"/>
+            <a:ext cx="10332720" cy="731520"/>
+          </a:xfrm>
+          <a:prstGeom prst="rect">
+            <a:avLst/>
+          </a:prstGeom>
+          <a:noFill/>
+        </p:spPr>
+        <p:txBody>
+          <a:bodyPr wrap="square">
+            <a:spAutoFit/>
+          </a:bodyPr>
+          <a:lstStyle/>
+          <a:p>
+            <a:pPr algn="l">
+              <a:spcAft>
+                <a:spcPts val="400"/>
+              </a:spcAft>
+            </a:pPr>
+            <a:r>
+              <a:rPr sz="3000" b="1">
+                <a:solidFill>
+                  <a:srgbClr val="BF8F00"/>
+                </a:solidFill>
+                <a:latin typeface="微软雅黑"/>
+              </a:rPr>
+              <a:t>十四、总结</a:t>
             </a:r>
           </a:p>
         </p:txBody>
@@ -5791,7 +7517,46 @@
         </p:nvSpPr>
         <p:spPr>
           <a:xfrm>
-            <a:off x="914400" y="3474720"/>
+            <a:off x="914400" y="2560320"/>
+            <a:ext cx="10332720" cy="914400"/>
+          </a:xfrm>
+          <a:prstGeom prst="rect">
+            <a:avLst/>
+          </a:prstGeom>
+          <a:noFill/>
+        </p:spPr>
+        <p:txBody>
+          <a:bodyPr wrap="square">
+            <a:spAutoFit/>
+          </a:bodyPr>
+          <a:lstStyle/>
+          <a:p>
+            <a:pPr algn="l">
+              <a:spcAft>
+                <a:spcPts val="400"/>
+              </a:spcAft>
+            </a:pPr>
+            <a:r>
+              <a:rPr sz="3600" b="1">
+                <a:solidFill>
+                  <a:srgbClr val="FFFFFF"/>
+                </a:solidFill>
+                <a:latin typeface="微软雅黑"/>
+              </a:rPr>
+              <a:t>从 "能回答" 到 "有依据地回答"</a:t>
+            </a:r>
+          </a:p>
+        </p:txBody>
+      </p:sp>
+      <p:sp>
+        <p:nvSpPr>
+          <p:cNvPr id="5" name="TextBox 4"/>
+          <p:cNvSpPr txBox="1"/>
+          <p:nvPr/>
+        </p:nvSpPr>
+        <p:spPr>
+          <a:xfrm>
+            <a:off x="914400" y="3657600"/>
             <a:ext cx="10332720" cy="1097280"/>
           </a:xfrm>
           <a:prstGeom prst="rect">
@@ -12094,7 +13859,7 @@
                 </a:solidFill>
                 <a:latin typeface="微软雅黑"/>
               </a:rPr>
-              <a:t>评测看板 (Dashboard)</a:t>
+              <a:t>Agent 过程页 (/agent)</a:t>
             </a:r>
           </a:p>
           <a:p>
@@ -12110,7 +13875,7 @@
                 </a:solidFill>
                 <a:latin typeface="微软雅黑"/>
               </a:rPr>
-              <a:t>检索/Agent 指标可视化</a:t>
+              <a:t>执行历史 + 状态筛选 + 自动刷新</a:t>
             </a:r>
           </a:p>
           <a:p>
@@ -12126,7 +13891,7 @@
                 </a:solidFill>
                 <a:latin typeface="微软雅黑"/>
               </a:rPr>
-              <a:t>HitRate / MRR / nDCG / 通过率</a:t>
+              <a:t>阶段耗时条 + 工具调用批次 + Trace ID</a:t>
             </a:r>
           </a:p>
         </p:txBody>
@@ -12227,7 +13992,7 @@
                 </a:solidFill>
                 <a:latin typeface="微软雅黑"/>
               </a:rPr>
-              <a:t>七、前端展示 — 招投标专项工具 (1/2): 评估分析</a:t>
+              <a:t>七、前端展示 — 数据看板 (实时聚合监控)</a:t>
             </a:r>
           </a:p>
         </p:txBody>
@@ -12278,7 +14043,7 @@
       </p:sp>
       <p:pic>
         <p:nvPicPr>
-          <p:cNvPr id="5" name="Picture 4" descr="07_price_panel.png"/>
+          <p:cNvPr id="5" name="Picture 4" descr="fe_test_dashboard_fixed.png"/>
           <p:cNvPicPr>
             <a:picLocks noChangeAspect="1"/>
           </p:cNvPicPr>
@@ -12292,8 +14057,8 @@
         </p:blipFill>
         <p:spPr>
           <a:xfrm>
-            <a:off x="459868" y="1097280"/>
-            <a:ext cx="5481063" cy="4069080"/>
+            <a:off x="457200" y="1105615"/>
+            <a:ext cx="7863840" cy="5378289"/>
           </a:xfrm>
           <a:prstGeom prst="rect">
             <a:avLst/>
@@ -12307,58 +14072,14 @@
       </p:pic>
       <p:sp>
         <p:nvSpPr>
-          <p:cNvPr id="6" name="Rounded Rectangle 5"/>
-          <p:cNvSpPr/>
-          <p:nvPr/>
-        </p:nvSpPr>
-        <p:spPr>
-          <a:xfrm>
-            <a:off x="365760" y="5303520"/>
-            <a:ext cx="5669280" cy="1280160"/>
-          </a:xfrm>
-          <a:prstGeom prst="roundRect">
-            <a:avLst/>
-          </a:prstGeom>
-          <a:solidFill>
-            <a:srgbClr val="DCE6F1"/>
-          </a:solidFill>
-          <a:ln>
-            <a:noFill/>
-          </a:ln>
-          <a:effectLst/>
-        </p:spPr>
-        <p:style>
-          <a:lnRef idx="1">
-            <a:schemeClr val="accent1"/>
-          </a:lnRef>
-          <a:fillRef idx="3">
-            <a:schemeClr val="accent1"/>
-          </a:fillRef>
-          <a:effectRef idx="2">
-            <a:schemeClr val="accent1"/>
-          </a:effectRef>
-          <a:fontRef idx="minor">
-            <a:schemeClr val="lt1"/>
-          </a:fontRef>
-        </p:style>
-        <p:txBody>
-          <a:bodyPr rtlCol="0" anchor="ctr"/>
-          <a:lstStyle/>
-          <a:p>
-            <a:pPr algn="ctr"/>
-          </a:p>
-        </p:txBody>
-      </p:sp>
-      <p:sp>
-        <p:nvSpPr>
-          <p:cNvPr id="7" name="TextBox 6"/>
+          <p:cNvPr id="6" name="TextBox 5"/>
           <p:cNvSpPr txBox="1"/>
           <p:nvPr/>
         </p:nvSpPr>
         <p:spPr>
           <a:xfrm>
-            <a:off x="530352" y="5413248"/>
-            <a:ext cx="5349240" cy="1097280"/>
+            <a:off x="8549640" y="1170432"/>
+            <a:ext cx="3291840" cy="402336"/>
           </a:xfrm>
           <a:prstGeom prst="rect">
             <a:avLst/>
@@ -12377,132 +14098,27 @@
               </a:spcAft>
             </a:pPr>
             <a:r>
-              <a:rPr sz="1500" b="1">
+              <a:rPr sz="1200" b="1">
                 <a:solidFill>
                   <a:srgbClr val="1F4E79"/>
                 </a:solidFill>
                 <a:latin typeface="微软雅黑"/>
               </a:rPr>
-              <a:t>价格分析面板</a:t>
-            </a:r>
-          </a:p>
-          <a:p>
-            <a:pPr algn="l">
-              <a:spcAft>
-                <a:spcPts val="500"/>
-              </a:spcAft>
-            </a:pPr>
-            <a:r>
-              <a:rPr sz="1200" b="0">
-                <a:solidFill>
-                  <a:srgbClr val="333333"/>
-                </a:solidFill>
-                <a:latin typeface="微软雅黑"/>
-              </a:rPr>
-              <a:t>• 投标报价对比分析, 异常报价提示</a:t>
-            </a:r>
-          </a:p>
-          <a:p>
-            <a:pPr algn="l">
-              <a:spcAft>
-                <a:spcPts val="500"/>
-              </a:spcAft>
-            </a:pPr>
-            <a:r>
-              <a:rPr sz="1200" b="0">
-                <a:solidFill>
-                  <a:srgbClr val="333333"/>
-                </a:solidFill>
-                <a:latin typeface="微软雅黑"/>
-              </a:rPr>
-              <a:t>• 总价/单价构成透明可查</a:t>
-            </a:r>
-          </a:p>
-        </p:txBody>
-      </p:sp>
-      <p:pic>
-        <p:nvPicPr>
-          <p:cNvPr id="8" name="Picture 7" descr="08_bid_parse_panel.png"/>
-          <p:cNvPicPr>
-            <a:picLocks noChangeAspect="1"/>
-          </p:cNvPicPr>
-          <p:nvPr/>
-        </p:nvPicPr>
-        <p:blipFill>
-          <a:blip r:embed="rId3"/>
-          <a:stretch>
-            <a:fillRect/>
-          </a:stretch>
-        </p:blipFill>
-        <p:spPr>
-          <a:xfrm>
-            <a:off x="6266308" y="1097280"/>
-            <a:ext cx="5481063" cy="4069080"/>
-          </a:xfrm>
-          <a:prstGeom prst="rect">
-            <a:avLst/>
-          </a:prstGeom>
-          <a:ln w="9525">
-            <a:solidFill>
-              <a:srgbClr val="BDBDBD"/>
-            </a:solidFill>
-          </a:ln>
-        </p:spPr>
-      </p:pic>
-      <p:sp>
-        <p:nvSpPr>
-          <p:cNvPr id="9" name="Rounded Rectangle 8"/>
-          <p:cNvSpPr/>
-          <p:nvPr/>
-        </p:nvSpPr>
-        <p:spPr>
-          <a:xfrm>
-            <a:off x="6172200" y="5303520"/>
-            <a:ext cx="5669280" cy="1280160"/>
-          </a:xfrm>
-          <a:prstGeom prst="roundRect">
-            <a:avLst/>
-          </a:prstGeom>
-          <a:solidFill>
-            <a:srgbClr val="DCE6F1"/>
-          </a:solidFill>
-          <a:ln>
-            <a:noFill/>
-          </a:ln>
-          <a:effectLst/>
-        </p:spPr>
-        <p:style>
-          <a:lnRef idx="1">
-            <a:schemeClr val="accent1"/>
-          </a:lnRef>
-          <a:fillRef idx="3">
-            <a:schemeClr val="accent1"/>
-          </a:fillRef>
-          <a:effectRef idx="2">
-            <a:schemeClr val="accent1"/>
-          </a:effectRef>
-          <a:fontRef idx="minor">
-            <a:schemeClr val="lt1"/>
-          </a:fontRef>
-        </p:style>
-        <p:txBody>
-          <a:bodyPr rtlCol="0" anchor="ctr"/>
-          <a:lstStyle/>
-          <a:p>
-            <a:pPr algn="ctr"/>
-          </a:p>
-        </p:txBody>
-      </p:sp>
-      <p:sp>
-        <p:nvSpPr>
-          <p:cNvPr id="10" name="TextBox 9"/>
+              <a:t>▸ 知识库向量点数 (683 点)</a:t>
+            </a:r>
+          </a:p>
+        </p:txBody>
+      </p:sp>
+      <p:sp>
+        <p:nvSpPr>
+          <p:cNvPr id="7" name="TextBox 6"/>
           <p:cNvSpPr txBox="1"/>
           <p:nvPr/>
         </p:nvSpPr>
         <p:spPr>
           <a:xfrm>
-            <a:off x="6336792" y="5413248"/>
-            <a:ext cx="5349240" cy="1097280"/>
+            <a:off x="8549640" y="1700784"/>
+            <a:ext cx="3291840" cy="402336"/>
           </a:xfrm>
           <a:prstGeom prst="rect">
             <a:avLst/>
@@ -12521,45 +14137,279 @@
               </a:spcAft>
             </a:pPr>
             <a:r>
-              <a:rPr sz="1500" b="1">
+              <a:rPr sz="1200" b="1">
                 <a:solidFill>
                   <a:srgbClr val="1F4E79"/>
                 </a:solidFill>
                 <a:latin typeface="微软雅黑"/>
               </a:rPr>
-              <a:t>标书解析 + 逐条响应矩阵</a:t>
-            </a:r>
-          </a:p>
-          <a:p>
-            <a:pPr algn="l">
-              <a:spcAft>
-                <a:spcPts val="500"/>
-              </a:spcAft>
-            </a:pPr>
-            <a:r>
-              <a:rPr sz="1200" b="0">
-                <a:solidFill>
-                  <a:srgbClr val="333333"/>
-                </a:solidFill>
-                <a:latin typeface="微软雅黑"/>
-              </a:rPr>
-              <a:t>• 招标要求 vs 投标响应逐条对照</a:t>
-            </a:r>
-          </a:p>
-          <a:p>
-            <a:pPr algn="l">
-              <a:spcAft>
-                <a:spcPts val="500"/>
-              </a:spcAft>
-            </a:pPr>
-            <a:r>
-              <a:rPr sz="1200" b="0">
-                <a:solidFill>
-                  <a:srgbClr val="333333"/>
-                </a:solidFill>
-                <a:latin typeface="微软雅黑"/>
-              </a:rPr>
-              <a:t>• 响应/偏离自动判定, 偏差项高亮</a:t>
+              <a:t>▸ 业务数据库记录 (30 条)</a:t>
+            </a:r>
+          </a:p>
+        </p:txBody>
+      </p:sp>
+      <p:sp>
+        <p:nvSpPr>
+          <p:cNvPr id="8" name="TextBox 7"/>
+          <p:cNvSpPr txBox="1"/>
+          <p:nvPr/>
+        </p:nvSpPr>
+        <p:spPr>
+          <a:xfrm>
+            <a:off x="8549640" y="2231136"/>
+            <a:ext cx="3291840" cy="402336"/>
+          </a:xfrm>
+          <a:prstGeom prst="rect">
+            <a:avLst/>
+          </a:prstGeom>
+          <a:noFill/>
+        </p:spPr>
+        <p:txBody>
+          <a:bodyPr wrap="square">
+            <a:spAutoFit/>
+          </a:bodyPr>
+          <a:lstStyle/>
+          <a:p>
+            <a:pPr algn="l">
+              <a:spcAft>
+                <a:spcPts val="400"/>
+              </a:spcAft>
+            </a:pPr>
+            <a:r>
+              <a:rPr sz="1200" b="1">
+                <a:solidFill>
+                  <a:srgbClr val="1F4E79"/>
+                </a:solidFill>
+                <a:latin typeface="微软雅黑"/>
+              </a:rPr>
+              <a:t>▸ 知识图谱规模 (68/52)</a:t>
+            </a:r>
+          </a:p>
+        </p:txBody>
+      </p:sp>
+      <p:sp>
+        <p:nvSpPr>
+          <p:cNvPr id="9" name="TextBox 8"/>
+          <p:cNvSpPr txBox="1"/>
+          <p:nvPr/>
+        </p:nvSpPr>
+        <p:spPr>
+          <a:xfrm>
+            <a:off x="8549640" y="2761488"/>
+            <a:ext cx="3291840" cy="402336"/>
+          </a:xfrm>
+          <a:prstGeom prst="rect">
+            <a:avLst/>
+          </a:prstGeom>
+          <a:noFill/>
+        </p:spPr>
+        <p:txBody>
+          <a:bodyPr wrap="square">
+            <a:spAutoFit/>
+          </a:bodyPr>
+          <a:lstStyle/>
+          <a:p>
+            <a:pPr algn="l">
+              <a:spcAft>
+                <a:spcPts val="400"/>
+              </a:spcAft>
+            </a:pPr>
+            <a:r>
+              <a:rPr sz="1200" b="1">
+                <a:solidFill>
+                  <a:srgbClr val="1F4E79"/>
+                </a:solidFill>
+                <a:latin typeface="微软雅黑"/>
+              </a:rPr>
+              <a:t>▸ Agent 总请求 / 平均耗时</a:t>
+            </a:r>
+          </a:p>
+        </p:txBody>
+      </p:sp>
+      <p:sp>
+        <p:nvSpPr>
+          <p:cNvPr id="10" name="TextBox 9"/>
+          <p:cNvSpPr txBox="1"/>
+          <p:nvPr/>
+        </p:nvSpPr>
+        <p:spPr>
+          <a:xfrm>
+            <a:off x="8549640" y="3291840"/>
+            <a:ext cx="3291840" cy="402336"/>
+          </a:xfrm>
+          <a:prstGeom prst="rect">
+            <a:avLst/>
+          </a:prstGeom>
+          <a:noFill/>
+        </p:spPr>
+        <p:txBody>
+          <a:bodyPr wrap="square">
+            <a:spAutoFit/>
+          </a:bodyPr>
+          <a:lstStyle/>
+          <a:p>
+            <a:pPr algn="l">
+              <a:spcAft>
+                <a:spcPts val="400"/>
+              </a:spcAft>
+            </a:pPr>
+            <a:r>
+              <a:rPr sz="1200" b="1">
+                <a:solidFill>
+                  <a:srgbClr val="1F4E79"/>
+                </a:solidFill>
+                <a:latin typeface="微软雅黑"/>
+              </a:rPr>
+              <a:t>▸ 状态分布: ok/no_evidence/error</a:t>
+            </a:r>
+          </a:p>
+        </p:txBody>
+      </p:sp>
+      <p:sp>
+        <p:nvSpPr>
+          <p:cNvPr id="11" name="TextBox 10"/>
+          <p:cNvSpPr txBox="1"/>
+          <p:nvPr/>
+        </p:nvSpPr>
+        <p:spPr>
+          <a:xfrm>
+            <a:off x="8549640" y="3822192"/>
+            <a:ext cx="3291840" cy="402336"/>
+          </a:xfrm>
+          <a:prstGeom prst="rect">
+            <a:avLst/>
+          </a:prstGeom>
+          <a:noFill/>
+        </p:spPr>
+        <p:txBody>
+          <a:bodyPr wrap="square">
+            <a:spAutoFit/>
+          </a:bodyPr>
+          <a:lstStyle/>
+          <a:p>
+            <a:pPr algn="l">
+              <a:spcAft>
+                <a:spcPts val="400"/>
+              </a:spcAft>
+            </a:pPr>
+            <a:r>
+              <a:rPr sz="1200" b="1">
+                <a:solidFill>
+                  <a:srgbClr val="1F4E79"/>
+                </a:solidFill>
+                <a:latin typeface="微软雅黑"/>
+              </a:rPr>
+              <a:t>▸ 工具调用排行 Top5</a:t>
+            </a:r>
+          </a:p>
+        </p:txBody>
+      </p:sp>
+      <p:sp>
+        <p:nvSpPr>
+          <p:cNvPr id="12" name="TextBox 11"/>
+          <p:cNvSpPr txBox="1"/>
+          <p:nvPr/>
+        </p:nvSpPr>
+        <p:spPr>
+          <a:xfrm>
+            <a:off x="8549640" y="4352544"/>
+            <a:ext cx="3291840" cy="402336"/>
+          </a:xfrm>
+          <a:prstGeom prst="rect">
+            <a:avLst/>
+          </a:prstGeom>
+          <a:noFill/>
+        </p:spPr>
+        <p:txBody>
+          <a:bodyPr wrap="square">
+            <a:spAutoFit/>
+          </a:bodyPr>
+          <a:lstStyle/>
+          <a:p>
+            <a:pPr algn="l">
+              <a:spcAft>
+                <a:spcPts val="400"/>
+              </a:spcAft>
+            </a:pPr>
+            <a:r>
+              <a:rPr sz="1200" b="1">
+                <a:solidFill>
+                  <a:srgbClr val="1F4E79"/>
+                </a:solidFill>
+                <a:latin typeface="微软雅黑"/>
+              </a:rPr>
+              <a:t>▸ CPU/内存/磁盘 实时监控</a:t>
+            </a:r>
+          </a:p>
+        </p:txBody>
+      </p:sp>
+      <p:sp>
+        <p:nvSpPr>
+          <p:cNvPr id="13" name="TextBox 12"/>
+          <p:cNvSpPr txBox="1"/>
+          <p:nvPr/>
+        </p:nvSpPr>
+        <p:spPr>
+          <a:xfrm>
+            <a:off x="8549640" y="4974336"/>
+            <a:ext cx="3291840" cy="1097280"/>
+          </a:xfrm>
+          <a:prstGeom prst="rect">
+            <a:avLst/>
+          </a:prstGeom>
+          <a:noFill/>
+        </p:spPr>
+        <p:txBody>
+          <a:bodyPr wrap="square">
+            <a:spAutoFit/>
+          </a:bodyPr>
+          <a:lstStyle/>
+          <a:p>
+            <a:pPr algn="l">
+              <a:spcAft>
+                <a:spcPts val="400"/>
+              </a:spcAft>
+            </a:pPr>
+            <a:r>
+              <a:rPr sz="1100" b="0">
+                <a:solidFill>
+                  <a:srgbClr val="595959"/>
+                </a:solidFill>
+                <a:latin typeface="微软雅黑"/>
+              </a:rPr>
+              <a:t>定时自动刷新 (10s)</a:t>
+            </a:r>
+          </a:p>
+          <a:p>
+            <a:pPr algn="l">
+              <a:spcAft>
+                <a:spcPts val="400"/>
+              </a:spcAft>
+            </a:pPr>
+            <a:r>
+              <a:rPr sz="1100" b="0">
+                <a:solidFill>
+                  <a:srgbClr val="595959"/>
+                </a:solidFill>
+                <a:latin typeface="微软雅黑"/>
+              </a:rPr>
+              <a:t>修复后统计正确显示</a:t>
+            </a:r>
+          </a:p>
+          <a:p>
+            <a:pPr algn="l">
+              <a:spcAft>
+                <a:spcPts val="400"/>
+              </a:spcAft>
+            </a:pPr>
+            <a:r>
+              <a:rPr sz="1100" b="0">
+                <a:solidFill>
+                  <a:srgbClr val="595959"/>
+                </a:solidFill>
+                <a:latin typeface="微软雅黑"/>
+              </a:rPr>
+              <a:t>一键跳转图谱页</a:t>
             </a:r>
           </a:p>
         </p:txBody>
@@ -12660,7 +14510,7 @@
                 </a:solidFill>
                 <a:latin typeface="微软雅黑"/>
               </a:rPr>
-              <a:t>七、前端展示 — 招投标专项工具 (2/2): 核验风控</a:t>
+              <a:t>八、前端展示 — 文件解析页 (上传 → 解析 → 合规检查)</a:t>
             </a:r>
           </a:p>
         </p:txBody>
@@ -12711,7 +14561,7 @@
       </p:sp>
       <p:pic>
         <p:nvPicPr>
-          <p:cNvPr id="5" name="Picture 4" descr="v15_cert_ocr.png"/>
+          <p:cNvPr id="5" name="Picture 4" descr="fe_test_compliance.png"/>
           <p:cNvPicPr>
             <a:picLocks noChangeAspect="1"/>
           </p:cNvPicPr>
@@ -12725,8 +14575,8 @@
         </p:blipFill>
         <p:spPr>
           <a:xfrm>
-            <a:off x="459868" y="1097280"/>
-            <a:ext cx="5481063" cy="4069080"/>
+            <a:off x="457200" y="1105615"/>
+            <a:ext cx="7863840" cy="5378289"/>
           </a:xfrm>
           <a:prstGeom prst="rect">
             <a:avLst/>
@@ -12740,58 +14590,14 @@
       </p:pic>
       <p:sp>
         <p:nvSpPr>
-          <p:cNvPr id="6" name="Rounded Rectangle 5"/>
-          <p:cNvSpPr/>
-          <p:nvPr/>
-        </p:nvSpPr>
-        <p:spPr>
-          <a:xfrm>
-            <a:off x="365760" y="5303520"/>
-            <a:ext cx="5669280" cy="1280160"/>
-          </a:xfrm>
-          <a:prstGeom prst="roundRect">
-            <a:avLst/>
-          </a:prstGeom>
-          <a:solidFill>
-            <a:srgbClr val="DCE6F1"/>
-          </a:solidFill>
-          <a:ln>
-            <a:noFill/>
-          </a:ln>
-          <a:effectLst/>
-        </p:spPr>
-        <p:style>
-          <a:lnRef idx="1">
-            <a:schemeClr val="accent1"/>
-          </a:lnRef>
-          <a:fillRef idx="3">
-            <a:schemeClr val="accent1"/>
-          </a:fillRef>
-          <a:effectRef idx="2">
-            <a:schemeClr val="accent1"/>
-          </a:effectRef>
-          <a:fontRef idx="minor">
-            <a:schemeClr val="lt1"/>
-          </a:fontRef>
-        </p:style>
-        <p:txBody>
-          <a:bodyPr rtlCol="0" anchor="ctr"/>
-          <a:lstStyle/>
-          <a:p>
-            <a:pPr algn="ctr"/>
-          </a:p>
-        </p:txBody>
-      </p:sp>
-      <p:sp>
-        <p:nvSpPr>
-          <p:cNvPr id="7" name="TextBox 6"/>
+          <p:cNvPr id="6" name="TextBox 5"/>
           <p:cNvSpPr txBox="1"/>
           <p:nvPr/>
         </p:nvSpPr>
         <p:spPr>
           <a:xfrm>
-            <a:off x="530352" y="5413248"/>
-            <a:ext cx="5349240" cy="1097280"/>
+            <a:off x="8549640" y="1170432"/>
+            <a:ext cx="3291840" cy="402336"/>
           </a:xfrm>
           <a:prstGeom prst="rect">
             <a:avLst/>
@@ -12810,132 +14616,27 @@
               </a:spcAft>
             </a:pPr>
             <a:r>
-              <a:rPr sz="1500" b="1">
+              <a:rPr sz="1200" b="1">
                 <a:solidFill>
                   <a:srgbClr val="1F4E79"/>
                 </a:solidFill>
                 <a:latin typeface="微软雅黑"/>
               </a:rPr>
-              <a:t>企业资料 + 证书 OCR</a:t>
-            </a:r>
-          </a:p>
-          <a:p>
-            <a:pPr algn="l">
-              <a:spcAft>
-                <a:spcPts val="500"/>
-              </a:spcAft>
-            </a:pPr>
-            <a:r>
-              <a:rPr sz="1200" b="0">
-                <a:solidFill>
-                  <a:srgbClr val="333333"/>
-                </a:solidFill>
-                <a:latin typeface="微软雅黑"/>
-              </a:rPr>
-              <a:t>• 营业执照/资质证书自动识别录入</a:t>
-            </a:r>
-          </a:p>
-          <a:p>
-            <a:pPr algn="l">
-              <a:spcAft>
-                <a:spcPts val="500"/>
-              </a:spcAft>
-            </a:pPr>
-            <a:r>
-              <a:rPr sz="1200" b="0">
-                <a:solidFill>
-                  <a:srgbClr val="333333"/>
-                </a:solidFill>
-                <a:latin typeface="微软雅黑"/>
-              </a:rPr>
-              <a:t>• 敏感字段 Fernet 加密入库</a:t>
-            </a:r>
-          </a:p>
-        </p:txBody>
-      </p:sp>
-      <p:pic>
-        <p:nvPicPr>
-          <p:cNvPr id="8" name="Picture 7" descr="09_collusion_dialog.png"/>
-          <p:cNvPicPr>
-            <a:picLocks noChangeAspect="1"/>
-          </p:cNvPicPr>
-          <p:nvPr/>
-        </p:nvPicPr>
-        <p:blipFill>
-          <a:blip r:embed="rId3"/>
-          <a:stretch>
-            <a:fillRect/>
-          </a:stretch>
-        </p:blipFill>
-        <p:spPr>
-          <a:xfrm>
-            <a:off x="6266308" y="1097280"/>
-            <a:ext cx="5481063" cy="4069080"/>
-          </a:xfrm>
-          <a:prstGeom prst="rect">
-            <a:avLst/>
-          </a:prstGeom>
-          <a:ln w="9525">
-            <a:solidFill>
-              <a:srgbClr val="BDBDBD"/>
-            </a:solidFill>
-          </a:ln>
-        </p:spPr>
-      </p:pic>
-      <p:sp>
-        <p:nvSpPr>
-          <p:cNvPr id="9" name="Rounded Rectangle 8"/>
-          <p:cNvSpPr/>
-          <p:nvPr/>
-        </p:nvSpPr>
-        <p:spPr>
-          <a:xfrm>
-            <a:off x="6172200" y="5303520"/>
-            <a:ext cx="5669280" cy="1280160"/>
-          </a:xfrm>
-          <a:prstGeom prst="roundRect">
-            <a:avLst/>
-          </a:prstGeom>
-          <a:solidFill>
-            <a:srgbClr val="DCE6F1"/>
-          </a:solidFill>
-          <a:ln>
-            <a:noFill/>
-          </a:ln>
-          <a:effectLst/>
-        </p:spPr>
-        <p:style>
-          <a:lnRef idx="1">
-            <a:schemeClr val="accent1"/>
-          </a:lnRef>
-          <a:fillRef idx="3">
-            <a:schemeClr val="accent1"/>
-          </a:fillRef>
-          <a:effectRef idx="2">
-            <a:schemeClr val="accent1"/>
-          </a:effectRef>
-          <a:fontRef idx="minor">
-            <a:schemeClr val="lt1"/>
-          </a:fontRef>
-        </p:style>
-        <p:txBody>
-          <a:bodyPr rtlCol="0" anchor="ctr"/>
-          <a:lstStyle/>
-          <a:p>
-            <a:pPr algn="ctr"/>
-          </a:p>
-        </p:txBody>
-      </p:sp>
-      <p:sp>
-        <p:nvSpPr>
-          <p:cNvPr id="10" name="TextBox 9"/>
+              <a:t>▸ 上传: PDF / DOCX / XLSX / TXT</a:t>
+            </a:r>
+          </a:p>
+        </p:txBody>
+      </p:sp>
+      <p:sp>
+        <p:nvSpPr>
+          <p:cNvPr id="7" name="TextBox 6"/>
           <p:cNvSpPr txBox="1"/>
           <p:nvPr/>
         </p:nvSpPr>
         <p:spPr>
           <a:xfrm>
-            <a:off x="6336792" y="5413248"/>
-            <a:ext cx="5349240" cy="1097280"/>
+            <a:off x="8549640" y="1700784"/>
+            <a:ext cx="3291840" cy="402336"/>
           </a:xfrm>
           <a:prstGeom prst="rect">
             <a:avLst/>
@@ -12954,45 +14655,256 @@
               </a:spcAft>
             </a:pPr>
             <a:r>
-              <a:rPr sz="1500" b="1">
+              <a:rPr sz="1200" b="1">
                 <a:solidFill>
                   <a:srgbClr val="1F4E79"/>
                 </a:solidFill>
                 <a:latin typeface="微软雅黑"/>
               </a:rPr>
-              <a:t>围串标检测</a:t>
-            </a:r>
-          </a:p>
-          <a:p>
-            <a:pPr algn="l">
-              <a:spcAft>
-                <a:spcPts val="500"/>
-              </a:spcAft>
-            </a:pPr>
-            <a:r>
-              <a:rPr sz="1200" b="0">
-                <a:solidFill>
-                  <a:srgbClr val="333333"/>
-                </a:solidFill>
-                <a:latin typeface="微软雅黑"/>
-              </a:rPr>
-              <a:t>• 两份投标文件相似度对比</a:t>
-            </a:r>
-          </a:p>
-          <a:p>
-            <a:pPr algn="l">
-              <a:spcAft>
-                <a:spcPts val="500"/>
-              </a:spcAft>
-            </a:pPr>
-            <a:r>
-              <a:rPr sz="1200" b="0">
-                <a:solidFill>
-                  <a:srgbClr val="333333"/>
-                </a:solidFill>
-                <a:latin typeface="微软雅黑"/>
-              </a:rPr>
-              <a:t>• 特征码/报价规律等疑点自动提示</a:t>
+              <a:t>▸ 自动抽取 8 字段 (项目名/预算等)</a:t>
+            </a:r>
+          </a:p>
+        </p:txBody>
+      </p:sp>
+      <p:sp>
+        <p:nvSpPr>
+          <p:cNvPr id="8" name="TextBox 7"/>
+          <p:cNvSpPr txBox="1"/>
+          <p:nvPr/>
+        </p:nvSpPr>
+        <p:spPr>
+          <a:xfrm>
+            <a:off x="8549640" y="2231136"/>
+            <a:ext cx="3291840" cy="402336"/>
+          </a:xfrm>
+          <a:prstGeom prst="rect">
+            <a:avLst/>
+          </a:prstGeom>
+          <a:noFill/>
+        </p:spPr>
+        <p:txBody>
+          <a:bodyPr wrap="square">
+            <a:spAutoFit/>
+          </a:bodyPr>
+          <a:lstStyle/>
+          <a:p>
+            <a:pPr algn="l">
+              <a:spcAft>
+                <a:spcPts val="400"/>
+              </a:spcAft>
+            </a:pPr>
+            <a:r>
+              <a:rPr sz="1200" b="1">
+                <a:solidFill>
+                  <a:srgbClr val="1F4E79"/>
+                </a:solidFill>
+                <a:latin typeface="微软雅黑"/>
+              </a:rPr>
+              <a:t>▸ 自动入向量库 (vector_indexed)</a:t>
+            </a:r>
+          </a:p>
+        </p:txBody>
+      </p:sp>
+      <p:sp>
+        <p:nvSpPr>
+          <p:cNvPr id="9" name="TextBox 8"/>
+          <p:cNvSpPr txBox="1"/>
+          <p:nvPr/>
+        </p:nvSpPr>
+        <p:spPr>
+          <a:xfrm>
+            <a:off x="8549640" y="2761488"/>
+            <a:ext cx="3291840" cy="402336"/>
+          </a:xfrm>
+          <a:prstGeom prst="rect">
+            <a:avLst/>
+          </a:prstGeom>
+          <a:noFill/>
+        </p:spPr>
+        <p:txBody>
+          <a:bodyPr wrap="square">
+            <a:spAutoFit/>
+          </a:bodyPr>
+          <a:lstStyle/>
+          <a:p>
+            <a:pPr algn="l">
+              <a:spcAft>
+                <a:spcPts val="400"/>
+              </a:spcAft>
+            </a:pPr>
+            <a:r>
+              <a:rPr sz="1200" b="1">
+                <a:solidFill>
+                  <a:srgbClr val="1F4E79"/>
+                </a:solidFill>
+                <a:latin typeface="微软雅黑"/>
+              </a:rPr>
+              <a:t>▸ 15 条合规规则扫描 (高/中/低)</a:t>
+            </a:r>
+          </a:p>
+        </p:txBody>
+      </p:sp>
+      <p:sp>
+        <p:nvSpPr>
+          <p:cNvPr id="10" name="TextBox 9"/>
+          <p:cNvSpPr txBox="1"/>
+          <p:nvPr/>
+        </p:nvSpPr>
+        <p:spPr>
+          <a:xfrm>
+            <a:off x="8549640" y="3291840"/>
+            <a:ext cx="3291840" cy="402336"/>
+          </a:xfrm>
+          <a:prstGeom prst="rect">
+            <a:avLst/>
+          </a:prstGeom>
+          <a:noFill/>
+        </p:spPr>
+        <p:txBody>
+          <a:bodyPr wrap="square">
+            <a:spAutoFit/>
+          </a:bodyPr>
+          <a:lstStyle/>
+          <a:p>
+            <a:pPr algn="l">
+              <a:spcAft>
+                <a:spcPts val="400"/>
+              </a:spcAft>
+            </a:pPr>
+            <a:r>
+              <a:rPr sz="1200" b="1">
+                <a:solidFill>
+                  <a:srgbClr val="1F4E79"/>
+                </a:solidFill>
+                <a:latin typeface="微软雅黑"/>
+              </a:rPr>
+              <a:t>▸ 人工确认 + 审计留痕 (复核/驳回)</a:t>
+            </a:r>
+          </a:p>
+        </p:txBody>
+      </p:sp>
+      <p:sp>
+        <p:nvSpPr>
+          <p:cNvPr id="11" name="TextBox 10"/>
+          <p:cNvSpPr txBox="1"/>
+          <p:nvPr/>
+        </p:nvSpPr>
+        <p:spPr>
+          <a:xfrm>
+            <a:off x="8549640" y="3822192"/>
+            <a:ext cx="3291840" cy="402336"/>
+          </a:xfrm>
+          <a:prstGeom prst="rect">
+            <a:avLst/>
+          </a:prstGeom>
+          <a:noFill/>
+        </p:spPr>
+        <p:txBody>
+          <a:bodyPr wrap="square">
+            <a:spAutoFit/>
+          </a:bodyPr>
+          <a:lstStyle/>
+          <a:p>
+            <a:pPr algn="l">
+              <a:spcAft>
+                <a:spcPts val="400"/>
+              </a:spcAft>
+            </a:pPr>
+            <a:r>
+              <a:rPr sz="1200" b="1">
+                <a:solidFill>
+                  <a:srgbClr val="1F4E79"/>
+                </a:solidFill>
+                <a:latin typeface="微软雅黑"/>
+              </a:rPr>
+              <a:t>▸ 文档列表实时更新</a:t>
+            </a:r>
+          </a:p>
+        </p:txBody>
+      </p:sp>
+      <p:sp>
+        <p:nvSpPr>
+          <p:cNvPr id="12" name="TextBox 11"/>
+          <p:cNvSpPr txBox="1"/>
+          <p:nvPr/>
+        </p:nvSpPr>
+        <p:spPr>
+          <a:xfrm>
+            <a:off x="8549640" y="4443984"/>
+            <a:ext cx="3291840" cy="1463040"/>
+          </a:xfrm>
+          <a:prstGeom prst="rect">
+            <a:avLst/>
+          </a:prstGeom>
+          <a:noFill/>
+        </p:spPr>
+        <p:txBody>
+          <a:bodyPr wrap="square">
+            <a:spAutoFit/>
+          </a:bodyPr>
+          <a:lstStyle/>
+          <a:p>
+            <a:pPr algn="l">
+              <a:spcAft>
+                <a:spcPts val="400"/>
+              </a:spcAft>
+            </a:pPr>
+            <a:r>
+              <a:rPr sz="1300" b="1">
+                <a:solidFill>
+                  <a:srgbClr val="4F8A5B"/>
+                </a:solidFill>
+                <a:latin typeface="微软雅黑"/>
+              </a:rPr>
+              <a:t>审查工具链 (4 项)</a:t>
+            </a:r>
+          </a:p>
+          <a:p>
+            <a:pPr algn="l">
+              <a:spcAft>
+                <a:spcPts val="400"/>
+              </a:spcAft>
+            </a:pPr>
+            <a:r>
+              <a:rPr sz="1100" b="0">
+                <a:solidFill>
+                  <a:srgbClr val="595959"/>
+                </a:solidFill>
+                <a:latin typeface="微软雅黑"/>
+              </a:rPr>
+              <a:t>资格审查: FULL/PARTIAL/NO_MATCH</a:t>
+            </a:r>
+          </a:p>
+          <a:p>
+            <a:pPr algn="l">
+              <a:spcAft>
+                <a:spcPts val="400"/>
+              </a:spcAft>
+            </a:pPr>
+            <a:r>
+              <a:rPr sz="1100" b="0">
+                <a:solidFill>
+                  <a:srgbClr val="595959"/>
+                </a:solidFill>
+                <a:latin typeface="微软雅黑"/>
+              </a:rPr>
+              <a:t>废标自检: safe/risk/uncertain</a:t>
+            </a:r>
+          </a:p>
+          <a:p>
+            <a:pPr algn="l">
+              <a:spcAft>
+                <a:spcPts val="400"/>
+              </a:spcAft>
+            </a:pPr>
+            <a:r>
+              <a:rPr sz="1100" b="0">
+                <a:solidFill>
+                  <a:srgbClr val="595959"/>
+                </a:solidFill>
+                <a:latin typeface="微软雅黑"/>
+              </a:rPr>
+              <a:t>响应性检查 + 评分辅助表</a:t>
             </a:r>
           </a:p>
         </p:txBody>
